--- a/Customer_Feedback_Analysis_Presentation.pptx
+++ b/Customer_Feedback_Analysis_Presentation.pptx
@@ -1,54 +1,54 @@
 
 <file path=ppt/presentation.xml><?xml version="1.0" encoding="utf-8"?>
-<p:presentation xmlns:a="http://schemas.openxmlformats.org/drawingml/2006/main" xmlns:r="http://schemas.openxmlformats.org/officeDocument/2006/relationships" xmlns:mc="http://schemas.openxmlformats.org/markup-compatibility/2006" xmlns:mv="urn:schemas-microsoft-com:mac:vml" xmlns:p="http://schemas.openxmlformats.org/presentationml/2006/main" xmlns:c="http://schemas.openxmlformats.org/drawingml/2006/chart" xmlns:dgm="http://schemas.openxmlformats.org/drawingml/2006/diagram" xmlns:o="urn:schemas-microsoft-com:office:office" xmlns:v="urn:schemas-microsoft-com:vml" xmlns:pvml="urn:schemas-microsoft-com:office:powerpoint" xmlns:com="http://schemas.openxmlformats.org/drawingml/2006/compatibility" xmlns:p14="http://schemas.microsoft.com/office/powerpoint/2010/main" xmlns:p15="http://schemas.microsoft.com/office/powerpoint/2012/main" xmlns:ahyp="http://schemas.microsoft.com/office/drawing/2018/hyperlinkcolor" autoCompressPictures="0" embedTrueTypeFonts="1" strictFirstAndLastChars="0" saveSubsetFonts="1">
+<p:presentation xmlns:a="http://schemas.openxmlformats.org/drawingml/2006/main" xmlns:r="http://schemas.openxmlformats.org/officeDocument/2006/relationships" xmlns:p="http://schemas.openxmlformats.org/presentationml/2006/main" strictFirstAndLastChars="0" embedTrueTypeFonts="1" saveSubsetFonts="1" autoCompressPictures="0">
   <p:sldMasterIdLst>
-    <p:sldMasterId id="2147483648" r:id="rId4"/>
+    <p:sldMasterId id="2147483648" r:id="rId1"/>
   </p:sldMasterIdLst>
   <p:notesMasterIdLst>
-    <p:notesMasterId r:id="rId5"/>
+    <p:notesMasterId r:id="rId22"/>
   </p:notesMasterIdLst>
   <p:sldIdLst>
-    <p:sldId id="256" r:id="rId6"/>
-    <p:sldId id="257" r:id="rId7"/>
-    <p:sldId id="258" r:id="rId8"/>
-    <p:sldId id="259" r:id="rId9"/>
-    <p:sldId id="260" r:id="rId10"/>
-    <p:sldId id="261" r:id="rId11"/>
-    <p:sldId id="262" r:id="rId12"/>
-    <p:sldId id="263" r:id="rId13"/>
-    <p:sldId id="264" r:id="rId14"/>
-    <p:sldId id="265" r:id="rId15"/>
-    <p:sldId id="266" r:id="rId16"/>
-    <p:sldId id="267" r:id="rId17"/>
-    <p:sldId id="268" r:id="rId18"/>
-    <p:sldId id="269" r:id="rId19"/>
-    <p:sldId id="270" r:id="rId20"/>
-    <p:sldId id="271" r:id="rId21"/>
-    <p:sldId id="272" r:id="rId22"/>
-    <p:sldId id="273" r:id="rId23"/>
-    <p:sldId id="274" r:id="rId24"/>
-    <p:sldId id="275" r:id="rId25"/>
+    <p:sldId id="256" r:id="rId2"/>
+    <p:sldId id="257" r:id="rId3"/>
+    <p:sldId id="258" r:id="rId4"/>
+    <p:sldId id="259" r:id="rId5"/>
+    <p:sldId id="260" r:id="rId6"/>
+    <p:sldId id="261" r:id="rId7"/>
+    <p:sldId id="262" r:id="rId8"/>
+    <p:sldId id="263" r:id="rId9"/>
+    <p:sldId id="264" r:id="rId10"/>
+    <p:sldId id="265" r:id="rId11"/>
+    <p:sldId id="266" r:id="rId12"/>
+    <p:sldId id="267" r:id="rId13"/>
+    <p:sldId id="268" r:id="rId14"/>
+    <p:sldId id="269" r:id="rId15"/>
+    <p:sldId id="270" r:id="rId16"/>
+    <p:sldId id="271" r:id="rId17"/>
+    <p:sldId id="272" r:id="rId18"/>
+    <p:sldId id="273" r:id="rId19"/>
+    <p:sldId id="274" r:id="rId20"/>
+    <p:sldId id="275" r:id="rId21"/>
   </p:sldIdLst>
-  <p:sldSz cy="6858000" cx="9144000"/>
+  <p:sldSz cx="9144000" cy="6858000" type="screen4x3"/>
   <p:notesSz cx="6858000" cy="9144000"/>
   <p:embeddedFontLst>
     <p:embeddedFont>
-      <p:font typeface="Economica"/>
-      <p:regular r:id="rId26"/>
-      <p:bold r:id="rId27"/>
-      <p:italic r:id="rId28"/>
-      <p:boldItalic r:id="rId29"/>
+      <p:font typeface="Economica" panose="020B0604020202020204" charset="0"/>
+      <p:regular r:id="rId23"/>
+      <p:bold r:id="rId24"/>
+      <p:italic r:id="rId25"/>
+      <p:boldItalic r:id="rId26"/>
     </p:embeddedFont>
     <p:embeddedFont>
-      <p:font typeface="Open Sans"/>
-      <p:regular r:id="rId30"/>
-      <p:bold r:id="rId31"/>
-      <p:italic r:id="rId32"/>
-      <p:boldItalic r:id="rId33"/>
+      <p:font typeface="Open Sans" panose="020B0606030504020204" pitchFamily="34" charset="0"/>
+      <p:regular r:id="rId27"/>
+      <p:bold r:id="rId28"/>
+      <p:italic r:id="rId29"/>
+      <p:boldItalic r:id="rId30"/>
     </p:embeddedFont>
   </p:embeddedFontLst>
   <p:defaultTextStyle>
-    <a:defPPr lvl="0" marR="0" rtl="0" algn="l">
+    <a:defPPr marR="0" lvl="0" algn="l" rtl="0">
       <a:lnSpc>
         <a:spcPct val="100000"/>
       </a:lnSpc>
@@ -59,7 +59,7 @@
         <a:spcPts val="0"/>
       </a:spcAft>
     </a:defPPr>
-    <a:lvl1pPr lvl="0" marR="0" rtl="0" algn="l">
+    <a:lvl1pPr marR="0" lvl="0" algn="l" rtl="0">
       <a:lnSpc>
         <a:spcPct val="100000"/>
       </a:lnSpc>
@@ -73,7 +73,7 @@
         <a:srgbClr val="000000"/>
       </a:buClr>
       <a:buFont typeface="Arial"/>
-      <a:defRPr b="0" i="0" sz="1400" u="none" cap="none" strike="noStrike">
+      <a:defRPr sz="1400" b="0" i="0" u="none" strike="noStrike" cap="none">
         <a:solidFill>
           <a:srgbClr val="000000"/>
         </a:solidFill>
@@ -83,7 +83,7 @@
         <a:sym typeface="Arial"/>
       </a:defRPr>
     </a:lvl1pPr>
-    <a:lvl2pPr lvl="1" marR="0" rtl="0" algn="l">
+    <a:lvl2pPr marR="0" lvl="1" algn="l" rtl="0">
       <a:lnSpc>
         <a:spcPct val="100000"/>
       </a:lnSpc>
@@ -97,7 +97,7 @@
         <a:srgbClr val="000000"/>
       </a:buClr>
       <a:buFont typeface="Arial"/>
-      <a:defRPr b="0" i="0" sz="1400" u="none" cap="none" strike="noStrike">
+      <a:defRPr sz="1400" b="0" i="0" u="none" strike="noStrike" cap="none">
         <a:solidFill>
           <a:srgbClr val="000000"/>
         </a:solidFill>
@@ -107,7 +107,7 @@
         <a:sym typeface="Arial"/>
       </a:defRPr>
     </a:lvl2pPr>
-    <a:lvl3pPr lvl="2" marR="0" rtl="0" algn="l">
+    <a:lvl3pPr marR="0" lvl="2" algn="l" rtl="0">
       <a:lnSpc>
         <a:spcPct val="100000"/>
       </a:lnSpc>
@@ -121,7 +121,7 @@
         <a:srgbClr val="000000"/>
       </a:buClr>
       <a:buFont typeface="Arial"/>
-      <a:defRPr b="0" i="0" sz="1400" u="none" cap="none" strike="noStrike">
+      <a:defRPr sz="1400" b="0" i="0" u="none" strike="noStrike" cap="none">
         <a:solidFill>
           <a:srgbClr val="000000"/>
         </a:solidFill>
@@ -131,7 +131,7 @@
         <a:sym typeface="Arial"/>
       </a:defRPr>
     </a:lvl3pPr>
-    <a:lvl4pPr lvl="3" marR="0" rtl="0" algn="l">
+    <a:lvl4pPr marR="0" lvl="3" algn="l" rtl="0">
       <a:lnSpc>
         <a:spcPct val="100000"/>
       </a:lnSpc>
@@ -145,7 +145,7 @@
         <a:srgbClr val="000000"/>
       </a:buClr>
       <a:buFont typeface="Arial"/>
-      <a:defRPr b="0" i="0" sz="1400" u="none" cap="none" strike="noStrike">
+      <a:defRPr sz="1400" b="0" i="0" u="none" strike="noStrike" cap="none">
         <a:solidFill>
           <a:srgbClr val="000000"/>
         </a:solidFill>
@@ -155,7 +155,7 @@
         <a:sym typeface="Arial"/>
       </a:defRPr>
     </a:lvl4pPr>
-    <a:lvl5pPr lvl="4" marR="0" rtl="0" algn="l">
+    <a:lvl5pPr marR="0" lvl="4" algn="l" rtl="0">
       <a:lnSpc>
         <a:spcPct val="100000"/>
       </a:lnSpc>
@@ -169,7 +169,7 @@
         <a:srgbClr val="000000"/>
       </a:buClr>
       <a:buFont typeface="Arial"/>
-      <a:defRPr b="0" i="0" sz="1400" u="none" cap="none" strike="noStrike">
+      <a:defRPr sz="1400" b="0" i="0" u="none" strike="noStrike" cap="none">
         <a:solidFill>
           <a:srgbClr val="000000"/>
         </a:solidFill>
@@ -179,7 +179,7 @@
         <a:sym typeface="Arial"/>
       </a:defRPr>
     </a:lvl5pPr>
-    <a:lvl6pPr lvl="5" marR="0" rtl="0" algn="l">
+    <a:lvl6pPr marR="0" lvl="5" algn="l" rtl="0">
       <a:lnSpc>
         <a:spcPct val="100000"/>
       </a:lnSpc>
@@ -193,7 +193,7 @@
         <a:srgbClr val="000000"/>
       </a:buClr>
       <a:buFont typeface="Arial"/>
-      <a:defRPr b="0" i="0" sz="1400" u="none" cap="none" strike="noStrike">
+      <a:defRPr sz="1400" b="0" i="0" u="none" strike="noStrike" cap="none">
         <a:solidFill>
           <a:srgbClr val="000000"/>
         </a:solidFill>
@@ -203,7 +203,7 @@
         <a:sym typeface="Arial"/>
       </a:defRPr>
     </a:lvl6pPr>
-    <a:lvl7pPr lvl="6" marR="0" rtl="0" algn="l">
+    <a:lvl7pPr marR="0" lvl="6" algn="l" rtl="0">
       <a:lnSpc>
         <a:spcPct val="100000"/>
       </a:lnSpc>
@@ -217,7 +217,7 @@
         <a:srgbClr val="000000"/>
       </a:buClr>
       <a:buFont typeface="Arial"/>
-      <a:defRPr b="0" i="0" sz="1400" u="none" cap="none" strike="noStrike">
+      <a:defRPr sz="1400" b="0" i="0" u="none" strike="noStrike" cap="none">
         <a:solidFill>
           <a:srgbClr val="000000"/>
         </a:solidFill>
@@ -227,7 +227,7 @@
         <a:sym typeface="Arial"/>
       </a:defRPr>
     </a:lvl7pPr>
-    <a:lvl8pPr lvl="7" marR="0" rtl="0" algn="l">
+    <a:lvl8pPr marR="0" lvl="7" algn="l" rtl="0">
       <a:lnSpc>
         <a:spcPct val="100000"/>
       </a:lnSpc>
@@ -241,7 +241,7 @@
         <a:srgbClr val="000000"/>
       </a:buClr>
       <a:buFont typeface="Arial"/>
-      <a:defRPr b="0" i="0" sz="1400" u="none" cap="none" strike="noStrike">
+      <a:defRPr sz="1400" b="0" i="0" u="none" strike="noStrike" cap="none">
         <a:solidFill>
           <a:srgbClr val="000000"/>
         </a:solidFill>
@@ -251,7 +251,7 @@
         <a:sym typeface="Arial"/>
       </a:defRPr>
     </a:lvl8pPr>
-    <a:lvl9pPr lvl="8" marR="0" rtl="0" algn="l">
+    <a:lvl9pPr marR="0" lvl="8" algn="l" rtl="0">
       <a:lnSpc>
         <a:spcPct val="100000"/>
       </a:lnSpc>
@@ -265,7 +265,7 @@
         <a:srgbClr val="000000"/>
       </a:buClr>
       <a:buFont typeface="Arial"/>
-      <a:defRPr b="0" i="0" sz="1400" u="none" cap="none" strike="noStrike">
+      <a:defRPr sz="1400" b="0" i="0" u="none" strike="noStrike" cap="none">
         <a:solidFill>
           <a:srgbClr val="000000"/>
         </a:solidFill>
@@ -278,7 +278,7 @@
   </p:defaultTextStyle>
   <p:extLst>
     <p:ext uri="{EFAFB233-063F-42B5-8137-9DF3F51BA10A}">
-      <p15:sldGuideLst>
+      <p15:sldGuideLst xmlns:p15="http://schemas.microsoft.com/office/powerpoint/2012/main">
         <p15:guide id="1" orient="horz" pos="2160">
           <p15:clr>
             <a:srgbClr val="000000"/>
@@ -292,18 +292,23 @@
       </p15:sldGuideLst>
     </p:ext>
     <p:ext uri="GoogleSlidesCustomDataVersion2">
-      <go:slidesCustomData xmlns:go="http://customooxmlschemas.google.com/" r:id="rId34" roundtripDataSignature="AMtx7mj4j1XN029VxyZeIpL+OBy1k8EAaw=="/>
+      <go:slidesCustomData xmlns="" xmlns:mc="http://schemas.openxmlformats.org/markup-compatibility/2006" xmlns:mv="urn:schemas-microsoft-com:mac:vml" xmlns:c="http://schemas.openxmlformats.org/drawingml/2006/chart" xmlns:dgm="http://schemas.openxmlformats.org/drawingml/2006/diagram" xmlns:o="urn:schemas-microsoft-com:office:office" xmlns:v="urn:schemas-microsoft-com:vml" xmlns:pvml="urn:schemas-microsoft-com:office:powerpoint" xmlns:com="http://schemas.openxmlformats.org/drawingml/2006/compatibility" xmlns:p14="http://schemas.microsoft.com/office/powerpoint/2010/main" xmlns:p15="http://schemas.microsoft.com/office/powerpoint/2012/main" xmlns:ahyp="http://schemas.microsoft.com/office/drawing/2018/hyperlinkcolor" xmlns:go="http://customooxmlschemas.google.com/" r:id="rId34" roundtripDataSignature="AMtx7mj4j1XN029VxyZeIpL+OBy1k8EAaw=="/>
     </p:ext>
   </p:extLst>
 </p:presentation>
 </file>
 
 <file path=ppt/notesMasters/notesMaster1.xml><?xml version="1.0" encoding="utf-8"?>
-<p:notesMaster xmlns:a="http://schemas.openxmlformats.org/drawingml/2006/main" xmlns:r="http://schemas.openxmlformats.org/officeDocument/2006/relationships" xmlns:mc="http://schemas.openxmlformats.org/markup-compatibility/2006" xmlns:mv="urn:schemas-microsoft-com:mac:vml" xmlns:p="http://schemas.openxmlformats.org/presentationml/2006/main" xmlns:c="http://schemas.openxmlformats.org/drawingml/2006/chart" xmlns:dgm="http://schemas.openxmlformats.org/drawingml/2006/diagram" xmlns:o="urn:schemas-microsoft-com:office:office" xmlns:v="urn:schemas-microsoft-com:vml" xmlns:pvml="urn:schemas-microsoft-com:office:powerpoint" xmlns:com="http://schemas.openxmlformats.org/drawingml/2006/compatibility" xmlns:p14="http://schemas.microsoft.com/office/powerpoint/2010/main" xmlns:p15="http://schemas.microsoft.com/office/powerpoint/2012/main" xmlns:ahyp="http://schemas.microsoft.com/office/drawing/2018/hyperlinkcolor">
+<p:notesMaster xmlns:a="http://schemas.openxmlformats.org/drawingml/2006/main" xmlns:r="http://schemas.openxmlformats.org/officeDocument/2006/relationships" xmlns:p="http://schemas.openxmlformats.org/presentationml/2006/main">
   <p:cSld>
+    <p:bg>
+      <p:bgRef idx="1001">
+        <a:schemeClr val="bg1"/>
+      </p:bgRef>
+    </p:bg>
     <p:spTree>
       <p:nvGrpSpPr>
-        <p:cNvPr id="2" name="Shape 2"/>
+        <p:cNvPr id="1" name="Shape 2"/>
         <p:cNvGrpSpPr/>
         <p:nvPr/>
       </p:nvGrpSpPr>
@@ -318,9 +323,11 @@
       <p:sp>
         <p:nvSpPr>
           <p:cNvPr id="3" name="Google Shape;3;n"/>
-          <p:cNvSpPr/>
+          <p:cNvSpPr>
+            <a:spLocks noGrp="1" noRot="1" noChangeAspect="1"/>
+          </p:cNvSpPr>
           <p:nvPr>
-            <p:ph idx="2" type="sldImg"/>
+            <p:ph type="sldImg" idx="2"/>
           </p:nvPr>
         </p:nvSpPr>
         <p:spPr>
@@ -329,9 +336,13 @@
             <a:ext cx="4572225" cy="3429000"/>
           </a:xfrm>
           <a:custGeom>
-            <a:rect b="b" l="l" r="r" t="t"/>
+            <a:avLst/>
+            <a:gdLst/>
+            <a:ahLst/>
+            <a:cxnLst/>
+            <a:rect l="l" t="t" r="r" b="b"/>
             <a:pathLst>
-              <a:path extrusionOk="0" h="120000" w="120000">
+              <a:path w="120000" h="120000" extrusionOk="0">
                 <a:moveTo>
                   <a:pt x="0" y="0"/>
                 </a:moveTo>
@@ -349,23 +360,25 @@
             </a:pathLst>
           </a:custGeom>
           <a:noFill/>
-          <a:ln cap="flat" cmpd="sng" w="9525">
+          <a:ln w="9525" cap="flat" cmpd="sng">
             <a:solidFill>
               <a:srgbClr val="000000"/>
             </a:solidFill>
             <a:prstDash val="solid"/>
             <a:round/>
-            <a:headEnd len="sm" w="sm" type="none"/>
-            <a:tailEnd len="sm" w="sm" type="none"/>
+            <a:headEnd type="none" w="sm" len="sm"/>
+            <a:tailEnd type="none" w="sm" len="sm"/>
           </a:ln>
         </p:spPr>
       </p:sp>
       <p:sp>
         <p:nvSpPr>
           <p:cNvPr id="4" name="Google Shape;4;n"/>
-          <p:cNvSpPr txBox="1"/>
+          <p:cNvSpPr txBox="1">
+            <a:spLocks noGrp="1"/>
+          </p:cNvSpPr>
           <p:nvPr>
-            <p:ph idx="1" type="body"/>
+            <p:ph type="body" idx="1"/>
           </p:nvPr>
         </p:nvSpPr>
         <p:spPr>
@@ -382,11 +395,11 @@
           </a:ln>
         </p:spPr>
         <p:txBody>
-          <a:bodyPr anchorCtr="0" anchor="t" bIns="91425" lIns="91425" spcFirstLastPara="1" rIns="91425" wrap="square" tIns="91425">
+          <a:bodyPr spcFirstLastPara="1" wrap="square" lIns="91425" tIns="91425" rIns="91425" bIns="91425" anchor="t" anchorCtr="0">
             <a:noAutofit/>
           </a:bodyPr>
           <a:lstStyle>
-            <a:lvl1pPr indent="-298450" lvl="0" marL="457200">
+            <a:lvl1pPr marL="457200" lvl="0" indent="-298450">
               <a:spcBef>
                 <a:spcPts val="0"/>
               </a:spcBef>
@@ -397,7 +410,7 @@
               <a:buChar char="●"/>
               <a:defRPr sz="1100"/>
             </a:lvl1pPr>
-            <a:lvl2pPr indent="-298450" lvl="1" marL="914400">
+            <a:lvl2pPr marL="914400" lvl="1" indent="-298450">
               <a:spcBef>
                 <a:spcPts val="0"/>
               </a:spcBef>
@@ -408,7 +421,7 @@
               <a:buChar char="○"/>
               <a:defRPr sz="1100"/>
             </a:lvl2pPr>
-            <a:lvl3pPr indent="-298450" lvl="2" marL="1371600">
+            <a:lvl3pPr marL="1371600" lvl="2" indent="-298450">
               <a:spcBef>
                 <a:spcPts val="0"/>
               </a:spcBef>
@@ -419,7 +432,7 @@
               <a:buChar char="■"/>
               <a:defRPr sz="1100"/>
             </a:lvl3pPr>
-            <a:lvl4pPr indent="-298450" lvl="3" marL="1828800">
+            <a:lvl4pPr marL="1828800" lvl="3" indent="-298450">
               <a:spcBef>
                 <a:spcPts val="0"/>
               </a:spcBef>
@@ -430,7 +443,7 @@
               <a:buChar char="●"/>
               <a:defRPr sz="1100"/>
             </a:lvl4pPr>
-            <a:lvl5pPr indent="-298450" lvl="4" marL="2286000">
+            <a:lvl5pPr marL="2286000" lvl="4" indent="-298450">
               <a:spcBef>
                 <a:spcPts val="0"/>
               </a:spcBef>
@@ -441,7 +454,7 @@
               <a:buChar char="○"/>
               <a:defRPr sz="1100"/>
             </a:lvl5pPr>
-            <a:lvl6pPr indent="-298450" lvl="5" marL="2743200">
+            <a:lvl6pPr marL="2743200" lvl="5" indent="-298450">
               <a:spcBef>
                 <a:spcPts val="0"/>
               </a:spcBef>
@@ -452,7 +465,7 @@
               <a:buChar char="■"/>
               <a:defRPr sz="1100"/>
             </a:lvl6pPr>
-            <a:lvl7pPr indent="-298450" lvl="6" marL="3200400">
+            <a:lvl7pPr marL="3200400" lvl="6" indent="-298450">
               <a:spcBef>
                 <a:spcPts val="0"/>
               </a:spcBef>
@@ -463,7 +476,7 @@
               <a:buChar char="●"/>
               <a:defRPr sz="1100"/>
             </a:lvl7pPr>
-            <a:lvl8pPr indent="-298450" lvl="7" marL="3657600">
+            <a:lvl8pPr marL="3657600" lvl="7" indent="-298450">
               <a:spcBef>
                 <a:spcPts val="0"/>
               </a:spcBef>
@@ -474,7 +487,7 @@
               <a:buChar char="○"/>
               <a:defRPr sz="1100"/>
             </a:lvl8pPr>
-            <a:lvl9pPr indent="-298450" lvl="8" marL="4114800">
+            <a:lvl9pPr marL="4114800" lvl="8" indent="-298450">
               <a:spcBef>
                 <a:spcPts val="0"/>
               </a:spcBef>
@@ -486,14 +499,16 @@
               <a:defRPr sz="1100"/>
             </a:lvl9pPr>
           </a:lstStyle>
-          <a:p/>
+          <a:p>
+            <a:endParaRPr/>
+          </a:p>
         </p:txBody>
       </p:sp>
     </p:spTree>
   </p:cSld>
-  <p:clrMap accent1="accent1" accent2="accent2" accent3="accent3" accent4="accent4" accent5="accent5" accent6="accent6" bg1="lt1" bg2="dk2" tx1="dk1" tx2="lt2" folHlink="folHlink" hlink="hlink"/>
+  <p:clrMap bg1="lt1" tx1="dk1" bg2="dk2" tx2="lt2" accent1="accent1" accent2="accent2" accent3="accent3" accent4="accent4" accent5="accent5" accent6="accent6" hlink="hlink" folHlink="folHlink"/>
   <p:notesStyle>
-    <a:defPPr lvl="0" marR="0" rtl="0" algn="l">
+    <a:defPPr marR="0" lvl="0" algn="l" rtl="0">
       <a:lnSpc>
         <a:spcPct val="100000"/>
       </a:lnSpc>
@@ -504,7 +519,7 @@
         <a:spcPts val="0"/>
       </a:spcAft>
     </a:defPPr>
-    <a:lvl1pPr lvl="0" marR="0" rtl="0" algn="l">
+    <a:lvl1pPr marR="0" lvl="0" algn="l" rtl="0">
       <a:lnSpc>
         <a:spcPct val="100000"/>
       </a:lnSpc>
@@ -518,7 +533,7 @@
         <a:srgbClr val="000000"/>
       </a:buClr>
       <a:buFont typeface="Arial"/>
-      <a:defRPr b="0" i="0" sz="1400" u="none" cap="none" strike="noStrike">
+      <a:defRPr sz="1400" b="0" i="0" u="none" strike="noStrike" cap="none">
         <a:solidFill>
           <a:srgbClr val="000000"/>
         </a:solidFill>
@@ -528,7 +543,7 @@
         <a:sym typeface="Arial"/>
       </a:defRPr>
     </a:lvl1pPr>
-    <a:lvl2pPr lvl="1" marR="0" rtl="0" algn="l">
+    <a:lvl2pPr marR="0" lvl="1" algn="l" rtl="0">
       <a:lnSpc>
         <a:spcPct val="100000"/>
       </a:lnSpc>
@@ -542,7 +557,7 @@
         <a:srgbClr val="000000"/>
       </a:buClr>
       <a:buFont typeface="Arial"/>
-      <a:defRPr b="0" i="0" sz="1400" u="none" cap="none" strike="noStrike">
+      <a:defRPr sz="1400" b="0" i="0" u="none" strike="noStrike" cap="none">
         <a:solidFill>
           <a:srgbClr val="000000"/>
         </a:solidFill>
@@ -552,7 +567,7 @@
         <a:sym typeface="Arial"/>
       </a:defRPr>
     </a:lvl2pPr>
-    <a:lvl3pPr lvl="2" marR="0" rtl="0" algn="l">
+    <a:lvl3pPr marR="0" lvl="2" algn="l" rtl="0">
       <a:lnSpc>
         <a:spcPct val="100000"/>
       </a:lnSpc>
@@ -566,7 +581,7 @@
         <a:srgbClr val="000000"/>
       </a:buClr>
       <a:buFont typeface="Arial"/>
-      <a:defRPr b="0" i="0" sz="1400" u="none" cap="none" strike="noStrike">
+      <a:defRPr sz="1400" b="0" i="0" u="none" strike="noStrike" cap="none">
         <a:solidFill>
           <a:srgbClr val="000000"/>
         </a:solidFill>
@@ -576,7 +591,7 @@
         <a:sym typeface="Arial"/>
       </a:defRPr>
     </a:lvl3pPr>
-    <a:lvl4pPr lvl="3" marR="0" rtl="0" algn="l">
+    <a:lvl4pPr marR="0" lvl="3" algn="l" rtl="0">
       <a:lnSpc>
         <a:spcPct val="100000"/>
       </a:lnSpc>
@@ -590,7 +605,7 @@
         <a:srgbClr val="000000"/>
       </a:buClr>
       <a:buFont typeface="Arial"/>
-      <a:defRPr b="0" i="0" sz="1400" u="none" cap="none" strike="noStrike">
+      <a:defRPr sz="1400" b="0" i="0" u="none" strike="noStrike" cap="none">
         <a:solidFill>
           <a:srgbClr val="000000"/>
         </a:solidFill>
@@ -600,7 +615,7 @@
         <a:sym typeface="Arial"/>
       </a:defRPr>
     </a:lvl4pPr>
-    <a:lvl5pPr lvl="4" marR="0" rtl="0" algn="l">
+    <a:lvl5pPr marR="0" lvl="4" algn="l" rtl="0">
       <a:lnSpc>
         <a:spcPct val="100000"/>
       </a:lnSpc>
@@ -614,7 +629,7 @@
         <a:srgbClr val="000000"/>
       </a:buClr>
       <a:buFont typeface="Arial"/>
-      <a:defRPr b="0" i="0" sz="1400" u="none" cap="none" strike="noStrike">
+      <a:defRPr sz="1400" b="0" i="0" u="none" strike="noStrike" cap="none">
         <a:solidFill>
           <a:srgbClr val="000000"/>
         </a:solidFill>
@@ -624,7 +639,7 @@
         <a:sym typeface="Arial"/>
       </a:defRPr>
     </a:lvl5pPr>
-    <a:lvl6pPr lvl="5" marR="0" rtl="0" algn="l">
+    <a:lvl6pPr marR="0" lvl="5" algn="l" rtl="0">
       <a:lnSpc>
         <a:spcPct val="100000"/>
       </a:lnSpc>
@@ -638,7 +653,7 @@
         <a:srgbClr val="000000"/>
       </a:buClr>
       <a:buFont typeface="Arial"/>
-      <a:defRPr b="0" i="0" sz="1400" u="none" cap="none" strike="noStrike">
+      <a:defRPr sz="1400" b="0" i="0" u="none" strike="noStrike" cap="none">
         <a:solidFill>
           <a:srgbClr val="000000"/>
         </a:solidFill>
@@ -648,7 +663,7 @@
         <a:sym typeface="Arial"/>
       </a:defRPr>
     </a:lvl6pPr>
-    <a:lvl7pPr lvl="6" marR="0" rtl="0" algn="l">
+    <a:lvl7pPr marR="0" lvl="6" algn="l" rtl="0">
       <a:lnSpc>
         <a:spcPct val="100000"/>
       </a:lnSpc>
@@ -662,7 +677,7 @@
         <a:srgbClr val="000000"/>
       </a:buClr>
       <a:buFont typeface="Arial"/>
-      <a:defRPr b="0" i="0" sz="1400" u="none" cap="none" strike="noStrike">
+      <a:defRPr sz="1400" b="0" i="0" u="none" strike="noStrike" cap="none">
         <a:solidFill>
           <a:srgbClr val="000000"/>
         </a:solidFill>
@@ -672,7 +687,7 @@
         <a:sym typeface="Arial"/>
       </a:defRPr>
     </a:lvl7pPr>
-    <a:lvl8pPr lvl="7" marR="0" rtl="0" algn="l">
+    <a:lvl8pPr marR="0" lvl="7" algn="l" rtl="0">
       <a:lnSpc>
         <a:spcPct val="100000"/>
       </a:lnSpc>
@@ -686,7 +701,7 @@
         <a:srgbClr val="000000"/>
       </a:buClr>
       <a:buFont typeface="Arial"/>
-      <a:defRPr b="0" i="0" sz="1400" u="none" cap="none" strike="noStrike">
+      <a:defRPr sz="1400" b="0" i="0" u="none" strike="noStrike" cap="none">
         <a:solidFill>
           <a:srgbClr val="000000"/>
         </a:solidFill>
@@ -696,7 +711,7 @@
         <a:sym typeface="Arial"/>
       </a:defRPr>
     </a:lvl8pPr>
-    <a:lvl9pPr lvl="8" marR="0" rtl="0" algn="l">
+    <a:lvl9pPr marR="0" lvl="8" algn="l" rtl="0">
       <a:lnSpc>
         <a:spcPct val="100000"/>
       </a:lnSpc>
@@ -710,7 +725,7 @@
         <a:srgbClr val="000000"/>
       </a:buClr>
       <a:buFont typeface="Arial"/>
-      <a:defRPr b="0" i="0" sz="1400" u="none" cap="none" strike="noStrike">
+      <a:defRPr sz="1400" b="0" i="0" u="none" strike="noStrike" cap="none">
         <a:solidFill>
           <a:srgbClr val="000000"/>
         </a:solidFill>
@@ -725,11 +740,11 @@
 </file>
 
 <file path=ppt/notesSlides/notesSlide1.xml><?xml version="1.0" encoding="utf-8"?>
-<p:notes xmlns:a="http://schemas.openxmlformats.org/drawingml/2006/main" xmlns:r="http://schemas.openxmlformats.org/officeDocument/2006/relationships" xmlns:mc="http://schemas.openxmlformats.org/markup-compatibility/2006" xmlns:mv="urn:schemas-microsoft-com:mac:vml" xmlns:p="http://schemas.openxmlformats.org/presentationml/2006/main" xmlns:c="http://schemas.openxmlformats.org/drawingml/2006/chart" xmlns:dgm="http://schemas.openxmlformats.org/drawingml/2006/diagram" xmlns:o="urn:schemas-microsoft-com:office:office" xmlns:v="urn:schemas-microsoft-com:vml" xmlns:pvml="urn:schemas-microsoft-com:office:powerpoint" xmlns:com="http://schemas.openxmlformats.org/drawingml/2006/compatibility" xmlns:p14="http://schemas.microsoft.com/office/powerpoint/2010/main" xmlns:p15="http://schemas.microsoft.com/office/powerpoint/2012/main" xmlns:ahyp="http://schemas.microsoft.com/office/drawing/2018/hyperlinkcolor" showMasterPhAnim="0" showMasterSp="0">
+<p:notes xmlns:a="http://schemas.openxmlformats.org/drawingml/2006/main" xmlns:r="http://schemas.openxmlformats.org/officeDocument/2006/relationships" xmlns:p="http://schemas.openxmlformats.org/presentationml/2006/main" showMasterSp="0" showMasterPhAnim="0">
   <p:cSld>
     <p:spTree>
       <p:nvGrpSpPr>
-        <p:cNvPr id="64" name="Shape 64"/>
+        <p:cNvPr id="1" name="Shape 64"/>
         <p:cNvGrpSpPr/>
         <p:nvPr/>
       </p:nvGrpSpPr>
@@ -744,9 +759,11 @@
       <p:sp>
         <p:nvSpPr>
           <p:cNvPr id="65" name="Google Shape;65;p1:notes"/>
-          <p:cNvSpPr txBox="1"/>
+          <p:cNvSpPr txBox="1">
+            <a:spLocks noGrp="1"/>
+          </p:cNvSpPr>
           <p:nvPr>
-            <p:ph idx="1" type="body"/>
+            <p:ph type="body" idx="1"/>
           </p:nvPr>
         </p:nvSpPr>
         <p:spPr>
@@ -759,12 +776,12 @@
           </a:prstGeom>
         </p:spPr>
         <p:txBody>
-          <a:bodyPr anchorCtr="0" anchor="t" bIns="91425" lIns="91425" spcFirstLastPara="1" rIns="91425" wrap="square" tIns="91425">
+          <a:bodyPr spcFirstLastPara="1" wrap="square" lIns="91425" tIns="91425" rIns="91425" bIns="91425" anchor="t" anchorCtr="0">
             <a:noAutofit/>
           </a:bodyPr>
           <a:lstStyle/>
           <a:p>
-            <a:pPr indent="0" lvl="0" marL="0" rtl="0" algn="l">
+            <a:pPr marL="0" lvl="0" indent="0" algn="l" rtl="0">
               <a:spcBef>
                 <a:spcPts val="0"/>
               </a:spcBef>
@@ -773,9 +790,6 @@
               </a:spcAft>
               <a:buNone/>
             </a:pPr>
-            <a:r>
-              <a:t/>
-            </a:r>
             <a:endParaRPr/>
           </a:p>
         </p:txBody>
@@ -783,20 +797,26 @@
       <p:sp>
         <p:nvSpPr>
           <p:cNvPr id="66" name="Google Shape;66;p1:notes"/>
-          <p:cNvSpPr/>
+          <p:cNvSpPr>
+            <a:spLocks noGrp="1" noRot="1" noChangeAspect="1"/>
+          </p:cNvSpPr>
           <p:nvPr>
-            <p:ph idx="2" type="sldImg"/>
+            <p:ph type="sldImg" idx="2"/>
           </p:nvPr>
         </p:nvSpPr>
         <p:spPr>
           <a:xfrm>
-            <a:off x="1143225" y="685800"/>
-            <a:ext cx="4572225" cy="3429000"/>
+            <a:off x="1143000" y="685800"/>
+            <a:ext cx="4572000" cy="3429000"/>
           </a:xfrm>
           <a:custGeom>
-            <a:rect b="b" l="l" r="r" t="t"/>
+            <a:avLst/>
+            <a:gdLst/>
+            <a:ahLst/>
+            <a:cxnLst/>
+            <a:rect l="l" t="t" r="r" b="b"/>
             <a:pathLst>
-              <a:path extrusionOk="0" h="120000" w="120000">
+              <a:path w="120000" h="120000" extrusionOk="0">
                 <a:moveTo>
                   <a:pt x="0" y="0"/>
                 </a:moveTo>
@@ -824,11 +844,11 @@
 </file>
 
 <file path=ppt/notesSlides/notesSlide10.xml><?xml version="1.0" encoding="utf-8"?>
-<p:notes xmlns:a="http://schemas.openxmlformats.org/drawingml/2006/main" xmlns:r="http://schemas.openxmlformats.org/officeDocument/2006/relationships" xmlns:mc="http://schemas.openxmlformats.org/markup-compatibility/2006" xmlns:mv="urn:schemas-microsoft-com:mac:vml" xmlns:p="http://schemas.openxmlformats.org/presentationml/2006/main" xmlns:c="http://schemas.openxmlformats.org/drawingml/2006/chart" xmlns:dgm="http://schemas.openxmlformats.org/drawingml/2006/diagram" xmlns:o="urn:schemas-microsoft-com:office:office" xmlns:v="urn:schemas-microsoft-com:vml" xmlns:pvml="urn:schemas-microsoft-com:office:powerpoint" xmlns:com="http://schemas.openxmlformats.org/drawingml/2006/compatibility" xmlns:p14="http://schemas.microsoft.com/office/powerpoint/2010/main" xmlns:p15="http://schemas.microsoft.com/office/powerpoint/2012/main" xmlns:ahyp="http://schemas.microsoft.com/office/drawing/2018/hyperlinkcolor" showMasterPhAnim="0" showMasterSp="0">
+<p:notes xmlns:a="http://schemas.openxmlformats.org/drawingml/2006/main" xmlns:r="http://schemas.openxmlformats.org/officeDocument/2006/relationships" xmlns:p="http://schemas.openxmlformats.org/presentationml/2006/main" showMasterSp="0" showMasterPhAnim="0">
   <p:cSld>
     <p:spTree>
       <p:nvGrpSpPr>
-        <p:cNvPr id="124" name="Shape 124"/>
+        <p:cNvPr id="1" name="Shape 124"/>
         <p:cNvGrpSpPr/>
         <p:nvPr/>
       </p:nvGrpSpPr>
@@ -843,9 +863,11 @@
       <p:sp>
         <p:nvSpPr>
           <p:cNvPr id="125" name="Google Shape;125;g2d6be8c33fb_0_3:notes"/>
-          <p:cNvSpPr/>
+          <p:cNvSpPr>
+            <a:spLocks noGrp="1" noRot="1" noChangeAspect="1"/>
+          </p:cNvSpPr>
           <p:nvPr>
-            <p:ph idx="2" type="sldImg"/>
+            <p:ph type="sldImg" idx="2"/>
           </p:nvPr>
         </p:nvSpPr>
         <p:spPr>
@@ -854,9 +876,13 @@
             <a:ext cx="4572300" cy="3429000"/>
           </a:xfrm>
           <a:custGeom>
-            <a:rect b="b" l="l" r="r" t="t"/>
+            <a:avLst/>
+            <a:gdLst/>
+            <a:ahLst/>
+            <a:cxnLst/>
+            <a:rect l="l" t="t" r="r" b="b"/>
             <a:pathLst>
-              <a:path extrusionOk="0" h="120000" w="120000">
+              <a:path w="120000" h="120000" extrusionOk="0">
                 <a:moveTo>
                   <a:pt x="0" y="0"/>
                 </a:moveTo>
@@ -878,9 +904,11 @@
       <p:sp>
         <p:nvSpPr>
           <p:cNvPr id="126" name="Google Shape;126;g2d6be8c33fb_0_3:notes"/>
-          <p:cNvSpPr txBox="1"/>
+          <p:cNvSpPr txBox="1">
+            <a:spLocks noGrp="1"/>
+          </p:cNvSpPr>
           <p:nvPr>
-            <p:ph idx="1" type="body"/>
+            <p:ph type="body" idx="1"/>
           </p:nvPr>
         </p:nvSpPr>
         <p:spPr>
@@ -893,12 +921,12 @@
           </a:prstGeom>
         </p:spPr>
         <p:txBody>
-          <a:bodyPr anchorCtr="0" anchor="t" bIns="91425" lIns="91425" spcFirstLastPara="1" rIns="91425" wrap="square" tIns="91425">
+          <a:bodyPr spcFirstLastPara="1" wrap="square" lIns="91425" tIns="91425" rIns="91425" bIns="91425" anchor="t" anchorCtr="0">
             <a:noAutofit/>
           </a:bodyPr>
           <a:lstStyle/>
           <a:p>
-            <a:pPr indent="0" lvl="0" marL="0" rtl="0" algn="l">
+            <a:pPr marL="0" lvl="0" indent="0" algn="l" rtl="0">
               <a:spcBef>
                 <a:spcPts val="0"/>
               </a:spcBef>
@@ -907,9 +935,6 @@
               </a:spcAft>
               <a:buNone/>
             </a:pPr>
-            <a:r>
-              <a:t/>
-            </a:r>
             <a:endParaRPr/>
           </a:p>
         </p:txBody>
@@ -923,11 +948,11 @@
 </file>
 
 <file path=ppt/notesSlides/notesSlide11.xml><?xml version="1.0" encoding="utf-8"?>
-<p:notes xmlns:a="http://schemas.openxmlformats.org/drawingml/2006/main" xmlns:r="http://schemas.openxmlformats.org/officeDocument/2006/relationships" xmlns:mc="http://schemas.openxmlformats.org/markup-compatibility/2006" xmlns:mv="urn:schemas-microsoft-com:mac:vml" xmlns:p="http://schemas.openxmlformats.org/presentationml/2006/main" xmlns:c="http://schemas.openxmlformats.org/drawingml/2006/chart" xmlns:dgm="http://schemas.openxmlformats.org/drawingml/2006/diagram" xmlns:o="urn:schemas-microsoft-com:office:office" xmlns:v="urn:schemas-microsoft-com:vml" xmlns:pvml="urn:schemas-microsoft-com:office:powerpoint" xmlns:com="http://schemas.openxmlformats.org/drawingml/2006/compatibility" xmlns:p14="http://schemas.microsoft.com/office/powerpoint/2010/main" xmlns:p15="http://schemas.microsoft.com/office/powerpoint/2012/main" xmlns:ahyp="http://schemas.microsoft.com/office/drawing/2018/hyperlinkcolor" showMasterPhAnim="0" showMasterSp="0">
+<p:notes xmlns:a="http://schemas.openxmlformats.org/drawingml/2006/main" xmlns:r="http://schemas.openxmlformats.org/officeDocument/2006/relationships" xmlns:p="http://schemas.openxmlformats.org/presentationml/2006/main" showMasterSp="0" showMasterPhAnim="0">
   <p:cSld>
     <p:spTree>
       <p:nvGrpSpPr>
-        <p:cNvPr id="129" name="Shape 129"/>
+        <p:cNvPr id="1" name="Shape 129"/>
         <p:cNvGrpSpPr/>
         <p:nvPr/>
       </p:nvGrpSpPr>
@@ -942,9 +967,11 @@
       <p:sp>
         <p:nvSpPr>
           <p:cNvPr id="130" name="Google Shape;130;p6:notes"/>
-          <p:cNvSpPr txBox="1"/>
+          <p:cNvSpPr txBox="1">
+            <a:spLocks noGrp="1"/>
+          </p:cNvSpPr>
           <p:nvPr>
-            <p:ph idx="1" type="body"/>
+            <p:ph type="body" idx="1"/>
           </p:nvPr>
         </p:nvSpPr>
         <p:spPr>
@@ -957,12 +984,12 @@
           </a:prstGeom>
         </p:spPr>
         <p:txBody>
-          <a:bodyPr anchorCtr="0" anchor="t" bIns="91425" lIns="91425" spcFirstLastPara="1" rIns="91425" wrap="square" tIns="91425">
+          <a:bodyPr spcFirstLastPara="1" wrap="square" lIns="91425" tIns="91425" rIns="91425" bIns="91425" anchor="t" anchorCtr="0">
             <a:noAutofit/>
           </a:bodyPr>
           <a:lstStyle/>
           <a:p>
-            <a:pPr indent="0" lvl="0" marL="0" rtl="0" algn="l">
+            <a:pPr marL="0" lvl="0" indent="0" algn="l" rtl="0">
               <a:spcBef>
                 <a:spcPts val="0"/>
               </a:spcBef>
@@ -971,9 +998,6 @@
               </a:spcAft>
               <a:buNone/>
             </a:pPr>
-            <a:r>
-              <a:t/>
-            </a:r>
             <a:endParaRPr/>
           </a:p>
         </p:txBody>
@@ -981,9 +1005,11 @@
       <p:sp>
         <p:nvSpPr>
           <p:cNvPr id="131" name="Google Shape;131;p6:notes"/>
-          <p:cNvSpPr/>
+          <p:cNvSpPr>
+            <a:spLocks noGrp="1" noRot="1" noChangeAspect="1"/>
+          </p:cNvSpPr>
           <p:nvPr>
-            <p:ph idx="2" type="sldImg"/>
+            <p:ph type="sldImg" idx="2"/>
           </p:nvPr>
         </p:nvSpPr>
         <p:spPr>
@@ -992,9 +1018,13 @@
             <a:ext cx="4572225" cy="3429000"/>
           </a:xfrm>
           <a:custGeom>
-            <a:rect b="b" l="l" r="r" t="t"/>
+            <a:avLst/>
+            <a:gdLst/>
+            <a:ahLst/>
+            <a:cxnLst/>
+            <a:rect l="l" t="t" r="r" b="b"/>
             <a:pathLst>
-              <a:path extrusionOk="0" h="120000" w="120000">
+              <a:path w="120000" h="120000" extrusionOk="0">
                 <a:moveTo>
                   <a:pt x="0" y="0"/>
                 </a:moveTo>
@@ -1022,11 +1052,11 @@
 </file>
 
 <file path=ppt/notesSlides/notesSlide12.xml><?xml version="1.0" encoding="utf-8"?>
-<p:notes xmlns:a="http://schemas.openxmlformats.org/drawingml/2006/main" xmlns:r="http://schemas.openxmlformats.org/officeDocument/2006/relationships" xmlns:mc="http://schemas.openxmlformats.org/markup-compatibility/2006" xmlns:mv="urn:schemas-microsoft-com:mac:vml" xmlns:p="http://schemas.openxmlformats.org/presentationml/2006/main" xmlns:c="http://schemas.openxmlformats.org/drawingml/2006/chart" xmlns:dgm="http://schemas.openxmlformats.org/drawingml/2006/diagram" xmlns:o="urn:schemas-microsoft-com:office:office" xmlns:v="urn:schemas-microsoft-com:vml" xmlns:pvml="urn:schemas-microsoft-com:office:powerpoint" xmlns:com="http://schemas.openxmlformats.org/drawingml/2006/compatibility" xmlns:p14="http://schemas.microsoft.com/office/powerpoint/2010/main" xmlns:p15="http://schemas.microsoft.com/office/powerpoint/2012/main" xmlns:ahyp="http://schemas.microsoft.com/office/drawing/2018/hyperlinkcolor" showMasterPhAnim="0" showMasterSp="0">
+<p:notes xmlns:a="http://schemas.openxmlformats.org/drawingml/2006/main" xmlns:r="http://schemas.openxmlformats.org/officeDocument/2006/relationships" xmlns:p="http://schemas.openxmlformats.org/presentationml/2006/main" showMasterSp="0" showMasterPhAnim="0">
   <p:cSld>
     <p:spTree>
       <p:nvGrpSpPr>
-        <p:cNvPr id="136" name="Shape 136"/>
+        <p:cNvPr id="1" name="Shape 136"/>
         <p:cNvGrpSpPr/>
         <p:nvPr/>
       </p:nvGrpSpPr>
@@ -1041,9 +1071,11 @@
       <p:sp>
         <p:nvSpPr>
           <p:cNvPr id="137" name="Google Shape;137;p7:notes"/>
-          <p:cNvSpPr txBox="1"/>
+          <p:cNvSpPr txBox="1">
+            <a:spLocks noGrp="1"/>
+          </p:cNvSpPr>
           <p:nvPr>
-            <p:ph idx="1" type="body"/>
+            <p:ph type="body" idx="1"/>
           </p:nvPr>
         </p:nvSpPr>
         <p:spPr>
@@ -1056,12 +1088,12 @@
           </a:prstGeom>
         </p:spPr>
         <p:txBody>
-          <a:bodyPr anchorCtr="0" anchor="t" bIns="91425" lIns="91425" spcFirstLastPara="1" rIns="91425" wrap="square" tIns="91425">
+          <a:bodyPr spcFirstLastPara="1" wrap="square" lIns="91425" tIns="91425" rIns="91425" bIns="91425" anchor="t" anchorCtr="0">
             <a:noAutofit/>
           </a:bodyPr>
           <a:lstStyle/>
           <a:p>
-            <a:pPr indent="0" lvl="0" marL="0" rtl="0" algn="l">
+            <a:pPr marL="0" lvl="0" indent="0" algn="l" rtl="0">
               <a:spcBef>
                 <a:spcPts val="0"/>
               </a:spcBef>
@@ -1070,9 +1102,6 @@
               </a:spcAft>
               <a:buNone/>
             </a:pPr>
-            <a:r>
-              <a:t/>
-            </a:r>
             <a:endParaRPr/>
           </a:p>
         </p:txBody>
@@ -1080,9 +1109,11 @@
       <p:sp>
         <p:nvSpPr>
           <p:cNvPr id="138" name="Google Shape;138;p7:notes"/>
-          <p:cNvSpPr/>
+          <p:cNvSpPr>
+            <a:spLocks noGrp="1" noRot="1" noChangeAspect="1"/>
+          </p:cNvSpPr>
           <p:nvPr>
-            <p:ph idx="2" type="sldImg"/>
+            <p:ph type="sldImg" idx="2"/>
           </p:nvPr>
         </p:nvSpPr>
         <p:spPr>
@@ -1091,9 +1122,13 @@
             <a:ext cx="4572225" cy="3429000"/>
           </a:xfrm>
           <a:custGeom>
-            <a:rect b="b" l="l" r="r" t="t"/>
+            <a:avLst/>
+            <a:gdLst/>
+            <a:ahLst/>
+            <a:cxnLst/>
+            <a:rect l="l" t="t" r="r" b="b"/>
             <a:pathLst>
-              <a:path extrusionOk="0" h="120000" w="120000">
+              <a:path w="120000" h="120000" extrusionOk="0">
                 <a:moveTo>
                   <a:pt x="0" y="0"/>
                 </a:moveTo>
@@ -1121,11 +1156,11 @@
 </file>
 
 <file path=ppt/notesSlides/notesSlide13.xml><?xml version="1.0" encoding="utf-8"?>
-<p:notes xmlns:a="http://schemas.openxmlformats.org/drawingml/2006/main" xmlns:r="http://schemas.openxmlformats.org/officeDocument/2006/relationships" xmlns:mc="http://schemas.openxmlformats.org/markup-compatibility/2006" xmlns:mv="urn:schemas-microsoft-com:mac:vml" xmlns:p="http://schemas.openxmlformats.org/presentationml/2006/main" xmlns:c="http://schemas.openxmlformats.org/drawingml/2006/chart" xmlns:dgm="http://schemas.openxmlformats.org/drawingml/2006/diagram" xmlns:o="urn:schemas-microsoft-com:office:office" xmlns:v="urn:schemas-microsoft-com:vml" xmlns:pvml="urn:schemas-microsoft-com:office:powerpoint" xmlns:com="http://schemas.openxmlformats.org/drawingml/2006/compatibility" xmlns:p14="http://schemas.microsoft.com/office/powerpoint/2010/main" xmlns:p15="http://schemas.microsoft.com/office/powerpoint/2012/main" xmlns:ahyp="http://schemas.microsoft.com/office/drawing/2018/hyperlinkcolor" showMasterPhAnim="0" showMasterSp="0">
+<p:notes xmlns:a="http://schemas.openxmlformats.org/drawingml/2006/main" xmlns:r="http://schemas.openxmlformats.org/officeDocument/2006/relationships" xmlns:p="http://schemas.openxmlformats.org/presentationml/2006/main" showMasterSp="0" showMasterPhAnim="0">
   <p:cSld>
     <p:spTree>
       <p:nvGrpSpPr>
-        <p:cNvPr id="143" name="Shape 143"/>
+        <p:cNvPr id="1" name="Shape 143"/>
         <p:cNvGrpSpPr/>
         <p:nvPr/>
       </p:nvGrpSpPr>
@@ -1140,9 +1175,11 @@
       <p:sp>
         <p:nvSpPr>
           <p:cNvPr id="144" name="Google Shape;144;p8:notes"/>
-          <p:cNvSpPr txBox="1"/>
+          <p:cNvSpPr txBox="1">
+            <a:spLocks noGrp="1"/>
+          </p:cNvSpPr>
           <p:nvPr>
-            <p:ph idx="1" type="body"/>
+            <p:ph type="body" idx="1"/>
           </p:nvPr>
         </p:nvSpPr>
         <p:spPr>
@@ -1155,12 +1192,12 @@
           </a:prstGeom>
         </p:spPr>
         <p:txBody>
-          <a:bodyPr anchorCtr="0" anchor="t" bIns="91425" lIns="91425" spcFirstLastPara="1" rIns="91425" wrap="square" tIns="91425">
+          <a:bodyPr spcFirstLastPara="1" wrap="square" lIns="91425" tIns="91425" rIns="91425" bIns="91425" anchor="t" anchorCtr="0">
             <a:noAutofit/>
           </a:bodyPr>
           <a:lstStyle/>
           <a:p>
-            <a:pPr indent="0" lvl="0" marL="0" rtl="0" algn="l">
+            <a:pPr marL="0" lvl="0" indent="0" algn="l" rtl="0">
               <a:spcBef>
                 <a:spcPts val="0"/>
               </a:spcBef>
@@ -1169,9 +1206,6 @@
               </a:spcAft>
               <a:buNone/>
             </a:pPr>
-            <a:r>
-              <a:t/>
-            </a:r>
             <a:endParaRPr/>
           </a:p>
         </p:txBody>
@@ -1179,9 +1213,11 @@
       <p:sp>
         <p:nvSpPr>
           <p:cNvPr id="145" name="Google Shape;145;p8:notes"/>
-          <p:cNvSpPr/>
+          <p:cNvSpPr>
+            <a:spLocks noGrp="1" noRot="1" noChangeAspect="1"/>
+          </p:cNvSpPr>
           <p:nvPr>
-            <p:ph idx="2" type="sldImg"/>
+            <p:ph type="sldImg" idx="2"/>
           </p:nvPr>
         </p:nvSpPr>
         <p:spPr>
@@ -1190,9 +1226,13 @@
             <a:ext cx="4572225" cy="3429000"/>
           </a:xfrm>
           <a:custGeom>
-            <a:rect b="b" l="l" r="r" t="t"/>
+            <a:avLst/>
+            <a:gdLst/>
+            <a:ahLst/>
+            <a:cxnLst/>
+            <a:rect l="l" t="t" r="r" b="b"/>
             <a:pathLst>
-              <a:path extrusionOk="0" h="120000" w="120000">
+              <a:path w="120000" h="120000" extrusionOk="0">
                 <a:moveTo>
                   <a:pt x="0" y="0"/>
                 </a:moveTo>
@@ -1220,11 +1260,11 @@
 </file>
 
 <file path=ppt/notesSlides/notesSlide14.xml><?xml version="1.0" encoding="utf-8"?>
-<p:notes xmlns:a="http://schemas.openxmlformats.org/drawingml/2006/main" xmlns:r="http://schemas.openxmlformats.org/officeDocument/2006/relationships" xmlns:mc="http://schemas.openxmlformats.org/markup-compatibility/2006" xmlns:mv="urn:schemas-microsoft-com:mac:vml" xmlns:p="http://schemas.openxmlformats.org/presentationml/2006/main" xmlns:c="http://schemas.openxmlformats.org/drawingml/2006/chart" xmlns:dgm="http://schemas.openxmlformats.org/drawingml/2006/diagram" xmlns:o="urn:schemas-microsoft-com:office:office" xmlns:v="urn:schemas-microsoft-com:vml" xmlns:pvml="urn:schemas-microsoft-com:office:powerpoint" xmlns:com="http://schemas.openxmlformats.org/drawingml/2006/compatibility" xmlns:p14="http://schemas.microsoft.com/office/powerpoint/2010/main" xmlns:p15="http://schemas.microsoft.com/office/powerpoint/2012/main" xmlns:ahyp="http://schemas.microsoft.com/office/drawing/2018/hyperlinkcolor" showMasterPhAnim="0" showMasterSp="0">
+<p:notes xmlns:a="http://schemas.openxmlformats.org/drawingml/2006/main" xmlns:r="http://schemas.openxmlformats.org/officeDocument/2006/relationships" xmlns:p="http://schemas.openxmlformats.org/presentationml/2006/main" showMasterSp="0" showMasterPhAnim="0">
   <p:cSld>
     <p:spTree>
       <p:nvGrpSpPr>
-        <p:cNvPr id="149" name="Shape 149"/>
+        <p:cNvPr id="1" name="Shape 149"/>
         <p:cNvGrpSpPr/>
         <p:nvPr/>
       </p:nvGrpSpPr>
@@ -1239,9 +1279,11 @@
       <p:sp>
         <p:nvSpPr>
           <p:cNvPr id="150" name="Google Shape;150;p9:notes"/>
-          <p:cNvSpPr txBox="1"/>
+          <p:cNvSpPr txBox="1">
+            <a:spLocks noGrp="1"/>
+          </p:cNvSpPr>
           <p:nvPr>
-            <p:ph idx="1" type="body"/>
+            <p:ph type="body" idx="1"/>
           </p:nvPr>
         </p:nvSpPr>
         <p:spPr>
@@ -1254,12 +1296,12 @@
           </a:prstGeom>
         </p:spPr>
         <p:txBody>
-          <a:bodyPr anchorCtr="0" anchor="t" bIns="91425" lIns="91425" spcFirstLastPara="1" rIns="91425" wrap="square" tIns="91425">
+          <a:bodyPr spcFirstLastPara="1" wrap="square" lIns="91425" tIns="91425" rIns="91425" bIns="91425" anchor="t" anchorCtr="0">
             <a:noAutofit/>
           </a:bodyPr>
           <a:lstStyle/>
           <a:p>
-            <a:pPr indent="0" lvl="0" marL="0" rtl="0" algn="l">
+            <a:pPr marL="0" lvl="0" indent="0" algn="l" rtl="0">
               <a:spcBef>
                 <a:spcPts val="0"/>
               </a:spcBef>
@@ -1268,9 +1310,6 @@
               </a:spcAft>
               <a:buNone/>
             </a:pPr>
-            <a:r>
-              <a:t/>
-            </a:r>
             <a:endParaRPr/>
           </a:p>
         </p:txBody>
@@ -1278,9 +1317,11 @@
       <p:sp>
         <p:nvSpPr>
           <p:cNvPr id="151" name="Google Shape;151;p9:notes"/>
-          <p:cNvSpPr/>
+          <p:cNvSpPr>
+            <a:spLocks noGrp="1" noRot="1" noChangeAspect="1"/>
+          </p:cNvSpPr>
           <p:nvPr>
-            <p:ph idx="2" type="sldImg"/>
+            <p:ph type="sldImg" idx="2"/>
           </p:nvPr>
         </p:nvSpPr>
         <p:spPr>
@@ -1289,9 +1330,13 @@
             <a:ext cx="4572225" cy="3429000"/>
           </a:xfrm>
           <a:custGeom>
-            <a:rect b="b" l="l" r="r" t="t"/>
+            <a:avLst/>
+            <a:gdLst/>
+            <a:ahLst/>
+            <a:cxnLst/>
+            <a:rect l="l" t="t" r="r" b="b"/>
             <a:pathLst>
-              <a:path extrusionOk="0" h="120000" w="120000">
+              <a:path w="120000" h="120000" extrusionOk="0">
                 <a:moveTo>
                   <a:pt x="0" y="0"/>
                 </a:moveTo>
@@ -1319,11 +1364,11 @@
 </file>
 
 <file path=ppt/notesSlides/notesSlide15.xml><?xml version="1.0" encoding="utf-8"?>
-<p:notes xmlns:a="http://schemas.openxmlformats.org/drawingml/2006/main" xmlns:r="http://schemas.openxmlformats.org/officeDocument/2006/relationships" xmlns:mc="http://schemas.openxmlformats.org/markup-compatibility/2006" xmlns:mv="urn:schemas-microsoft-com:mac:vml" xmlns:p="http://schemas.openxmlformats.org/presentationml/2006/main" xmlns:c="http://schemas.openxmlformats.org/drawingml/2006/chart" xmlns:dgm="http://schemas.openxmlformats.org/drawingml/2006/diagram" xmlns:o="urn:schemas-microsoft-com:office:office" xmlns:v="urn:schemas-microsoft-com:vml" xmlns:pvml="urn:schemas-microsoft-com:office:powerpoint" xmlns:com="http://schemas.openxmlformats.org/drawingml/2006/compatibility" xmlns:p14="http://schemas.microsoft.com/office/powerpoint/2010/main" xmlns:p15="http://schemas.microsoft.com/office/powerpoint/2012/main" xmlns:ahyp="http://schemas.microsoft.com/office/drawing/2018/hyperlinkcolor" showMasterPhAnim="0" showMasterSp="0">
+<p:notes xmlns:a="http://schemas.openxmlformats.org/drawingml/2006/main" xmlns:r="http://schemas.openxmlformats.org/officeDocument/2006/relationships" xmlns:p="http://schemas.openxmlformats.org/presentationml/2006/main" showMasterSp="0" showMasterPhAnim="0">
   <p:cSld>
     <p:spTree>
       <p:nvGrpSpPr>
-        <p:cNvPr id="155" name="Shape 155"/>
+        <p:cNvPr id="1" name="Shape 155"/>
         <p:cNvGrpSpPr/>
         <p:nvPr/>
       </p:nvGrpSpPr>
@@ -1338,9 +1383,11 @@
       <p:sp>
         <p:nvSpPr>
           <p:cNvPr id="156" name="Google Shape;156;g31dd249a56a_0_245:notes"/>
-          <p:cNvSpPr/>
+          <p:cNvSpPr>
+            <a:spLocks noGrp="1" noRot="1" noChangeAspect="1"/>
+          </p:cNvSpPr>
           <p:nvPr>
-            <p:ph idx="2" type="sldImg"/>
+            <p:ph type="sldImg" idx="2"/>
           </p:nvPr>
         </p:nvSpPr>
         <p:spPr>
@@ -1349,9 +1396,13 @@
             <a:ext cx="4572300" cy="3429000"/>
           </a:xfrm>
           <a:custGeom>
-            <a:rect b="b" l="l" r="r" t="t"/>
+            <a:avLst/>
+            <a:gdLst/>
+            <a:ahLst/>
+            <a:cxnLst/>
+            <a:rect l="l" t="t" r="r" b="b"/>
             <a:pathLst>
-              <a:path extrusionOk="0" h="120000" w="120000">
+              <a:path w="120000" h="120000" extrusionOk="0">
                 <a:moveTo>
                   <a:pt x="0" y="0"/>
                 </a:moveTo>
@@ -1373,9 +1424,11 @@
       <p:sp>
         <p:nvSpPr>
           <p:cNvPr id="157" name="Google Shape;157;g31dd249a56a_0_245:notes"/>
-          <p:cNvSpPr txBox="1"/>
+          <p:cNvSpPr txBox="1">
+            <a:spLocks noGrp="1"/>
+          </p:cNvSpPr>
           <p:nvPr>
-            <p:ph idx="1" type="body"/>
+            <p:ph type="body" idx="1"/>
           </p:nvPr>
         </p:nvSpPr>
         <p:spPr>
@@ -1388,12 +1441,12 @@
           </a:prstGeom>
         </p:spPr>
         <p:txBody>
-          <a:bodyPr anchorCtr="0" anchor="t" bIns="91425" lIns="91425" spcFirstLastPara="1" rIns="91425" wrap="square" tIns="91425">
+          <a:bodyPr spcFirstLastPara="1" wrap="square" lIns="91425" tIns="91425" rIns="91425" bIns="91425" anchor="t" anchorCtr="0">
             <a:noAutofit/>
           </a:bodyPr>
           <a:lstStyle/>
           <a:p>
-            <a:pPr indent="0" lvl="0" marL="0" rtl="0" algn="l">
+            <a:pPr marL="0" lvl="0" indent="0" algn="l" rtl="0">
               <a:spcBef>
                 <a:spcPts val="0"/>
               </a:spcBef>
@@ -1402,9 +1455,6 @@
               </a:spcAft>
               <a:buNone/>
             </a:pPr>
-            <a:r>
-              <a:t/>
-            </a:r>
             <a:endParaRPr/>
           </a:p>
         </p:txBody>
@@ -1418,11 +1468,11 @@
 </file>
 
 <file path=ppt/notesSlides/notesSlide16.xml><?xml version="1.0" encoding="utf-8"?>
-<p:notes xmlns:a="http://schemas.openxmlformats.org/drawingml/2006/main" xmlns:r="http://schemas.openxmlformats.org/officeDocument/2006/relationships" xmlns:mc="http://schemas.openxmlformats.org/markup-compatibility/2006" xmlns:mv="urn:schemas-microsoft-com:mac:vml" xmlns:p="http://schemas.openxmlformats.org/presentationml/2006/main" xmlns:c="http://schemas.openxmlformats.org/drawingml/2006/chart" xmlns:dgm="http://schemas.openxmlformats.org/drawingml/2006/diagram" xmlns:o="urn:schemas-microsoft-com:office:office" xmlns:v="urn:schemas-microsoft-com:vml" xmlns:pvml="urn:schemas-microsoft-com:office:powerpoint" xmlns:com="http://schemas.openxmlformats.org/drawingml/2006/compatibility" xmlns:p14="http://schemas.microsoft.com/office/powerpoint/2010/main" xmlns:p15="http://schemas.microsoft.com/office/powerpoint/2012/main" xmlns:ahyp="http://schemas.microsoft.com/office/drawing/2018/hyperlinkcolor" showMasterPhAnim="0" showMasterSp="0">
+<p:notes xmlns:a="http://schemas.openxmlformats.org/drawingml/2006/main" xmlns:r="http://schemas.openxmlformats.org/officeDocument/2006/relationships" xmlns:p="http://schemas.openxmlformats.org/presentationml/2006/main" showMasterSp="0" showMasterPhAnim="0">
   <p:cSld>
     <p:spTree>
       <p:nvGrpSpPr>
-        <p:cNvPr id="161" name="Shape 161"/>
+        <p:cNvPr id="1" name="Shape 161"/>
         <p:cNvGrpSpPr/>
         <p:nvPr/>
       </p:nvGrpSpPr>
@@ -1437,9 +1487,11 @@
       <p:sp>
         <p:nvSpPr>
           <p:cNvPr id="162" name="Google Shape;162;g31dd249a56a_0_241:notes"/>
-          <p:cNvSpPr/>
+          <p:cNvSpPr>
+            <a:spLocks noGrp="1" noRot="1" noChangeAspect="1"/>
+          </p:cNvSpPr>
           <p:nvPr>
-            <p:ph idx="2" type="sldImg"/>
+            <p:ph type="sldImg" idx="2"/>
           </p:nvPr>
         </p:nvSpPr>
         <p:spPr>
@@ -1448,9 +1500,13 @@
             <a:ext cx="4572300" cy="3429000"/>
           </a:xfrm>
           <a:custGeom>
-            <a:rect b="b" l="l" r="r" t="t"/>
+            <a:avLst/>
+            <a:gdLst/>
+            <a:ahLst/>
+            <a:cxnLst/>
+            <a:rect l="l" t="t" r="r" b="b"/>
             <a:pathLst>
-              <a:path extrusionOk="0" h="120000" w="120000">
+              <a:path w="120000" h="120000" extrusionOk="0">
                 <a:moveTo>
                   <a:pt x="0" y="0"/>
                 </a:moveTo>
@@ -1472,9 +1528,11 @@
       <p:sp>
         <p:nvSpPr>
           <p:cNvPr id="163" name="Google Shape;163;g31dd249a56a_0_241:notes"/>
-          <p:cNvSpPr txBox="1"/>
+          <p:cNvSpPr txBox="1">
+            <a:spLocks noGrp="1"/>
+          </p:cNvSpPr>
           <p:nvPr>
-            <p:ph idx="1" type="body"/>
+            <p:ph type="body" idx="1"/>
           </p:nvPr>
         </p:nvSpPr>
         <p:spPr>
@@ -1487,12 +1545,12 @@
           </a:prstGeom>
         </p:spPr>
         <p:txBody>
-          <a:bodyPr anchorCtr="0" anchor="t" bIns="91425" lIns="91425" spcFirstLastPara="1" rIns="91425" wrap="square" tIns="91425">
+          <a:bodyPr spcFirstLastPara="1" wrap="square" lIns="91425" tIns="91425" rIns="91425" bIns="91425" anchor="t" anchorCtr="0">
             <a:noAutofit/>
           </a:bodyPr>
           <a:lstStyle/>
           <a:p>
-            <a:pPr indent="0" lvl="0" marL="0" rtl="0" algn="l">
+            <a:pPr marL="0" lvl="0" indent="0" algn="l" rtl="0">
               <a:spcBef>
                 <a:spcPts val="0"/>
               </a:spcBef>
@@ -1501,9 +1559,6 @@
               </a:spcAft>
               <a:buNone/>
             </a:pPr>
-            <a:r>
-              <a:t/>
-            </a:r>
             <a:endParaRPr/>
           </a:p>
         </p:txBody>
@@ -1517,11 +1572,11 @@
 </file>
 
 <file path=ppt/notesSlides/notesSlide17.xml><?xml version="1.0" encoding="utf-8"?>
-<p:notes xmlns:a="http://schemas.openxmlformats.org/drawingml/2006/main" xmlns:r="http://schemas.openxmlformats.org/officeDocument/2006/relationships" xmlns:mc="http://schemas.openxmlformats.org/markup-compatibility/2006" xmlns:mv="urn:schemas-microsoft-com:mac:vml" xmlns:p="http://schemas.openxmlformats.org/presentationml/2006/main" xmlns:c="http://schemas.openxmlformats.org/drawingml/2006/chart" xmlns:dgm="http://schemas.openxmlformats.org/drawingml/2006/diagram" xmlns:o="urn:schemas-microsoft-com:office:office" xmlns:v="urn:schemas-microsoft-com:vml" xmlns:pvml="urn:schemas-microsoft-com:office:powerpoint" xmlns:com="http://schemas.openxmlformats.org/drawingml/2006/compatibility" xmlns:p14="http://schemas.microsoft.com/office/powerpoint/2010/main" xmlns:p15="http://schemas.microsoft.com/office/powerpoint/2012/main" xmlns:ahyp="http://schemas.microsoft.com/office/drawing/2018/hyperlinkcolor" showMasterPhAnim="0" showMasterSp="0">
+<p:notes xmlns:a="http://schemas.openxmlformats.org/drawingml/2006/main" xmlns:r="http://schemas.openxmlformats.org/officeDocument/2006/relationships" xmlns:p="http://schemas.openxmlformats.org/presentationml/2006/main" showMasterSp="0" showMasterPhAnim="0">
   <p:cSld>
     <p:spTree>
       <p:nvGrpSpPr>
-        <p:cNvPr id="167" name="Shape 167"/>
+        <p:cNvPr id="1" name="Shape 167"/>
         <p:cNvGrpSpPr/>
         <p:nvPr/>
       </p:nvGrpSpPr>
@@ -1536,9 +1591,11 @@
       <p:sp>
         <p:nvSpPr>
           <p:cNvPr id="168" name="Google Shape;168;g31dd249a56a_0_237:notes"/>
-          <p:cNvSpPr/>
+          <p:cNvSpPr>
+            <a:spLocks noGrp="1" noRot="1" noChangeAspect="1"/>
+          </p:cNvSpPr>
           <p:nvPr>
-            <p:ph idx="2" type="sldImg"/>
+            <p:ph type="sldImg" idx="2"/>
           </p:nvPr>
         </p:nvSpPr>
         <p:spPr>
@@ -1547,9 +1604,13 @@
             <a:ext cx="4572300" cy="3429000"/>
           </a:xfrm>
           <a:custGeom>
-            <a:rect b="b" l="l" r="r" t="t"/>
+            <a:avLst/>
+            <a:gdLst/>
+            <a:ahLst/>
+            <a:cxnLst/>
+            <a:rect l="l" t="t" r="r" b="b"/>
             <a:pathLst>
-              <a:path extrusionOk="0" h="120000" w="120000">
+              <a:path w="120000" h="120000" extrusionOk="0">
                 <a:moveTo>
                   <a:pt x="0" y="0"/>
                 </a:moveTo>
@@ -1571,9 +1632,11 @@
       <p:sp>
         <p:nvSpPr>
           <p:cNvPr id="169" name="Google Shape;169;g31dd249a56a_0_237:notes"/>
-          <p:cNvSpPr txBox="1"/>
+          <p:cNvSpPr txBox="1">
+            <a:spLocks noGrp="1"/>
+          </p:cNvSpPr>
           <p:nvPr>
-            <p:ph idx="1" type="body"/>
+            <p:ph type="body" idx="1"/>
           </p:nvPr>
         </p:nvSpPr>
         <p:spPr>
@@ -1586,12 +1649,12 @@
           </a:prstGeom>
         </p:spPr>
         <p:txBody>
-          <a:bodyPr anchorCtr="0" anchor="t" bIns="91425" lIns="91425" spcFirstLastPara="1" rIns="91425" wrap="square" tIns="91425">
+          <a:bodyPr spcFirstLastPara="1" wrap="square" lIns="91425" tIns="91425" rIns="91425" bIns="91425" anchor="t" anchorCtr="0">
             <a:noAutofit/>
           </a:bodyPr>
           <a:lstStyle/>
           <a:p>
-            <a:pPr indent="0" lvl="0" marL="0" rtl="0" algn="l">
+            <a:pPr marL="0" lvl="0" indent="0" algn="l" rtl="0">
               <a:spcBef>
                 <a:spcPts val="0"/>
               </a:spcBef>
@@ -1600,9 +1663,6 @@
               </a:spcAft>
               <a:buNone/>
             </a:pPr>
-            <a:r>
-              <a:t/>
-            </a:r>
             <a:endParaRPr/>
           </a:p>
         </p:txBody>
@@ -1616,11 +1676,11 @@
 </file>
 
 <file path=ppt/notesSlides/notesSlide18.xml><?xml version="1.0" encoding="utf-8"?>
-<p:notes xmlns:a="http://schemas.openxmlformats.org/drawingml/2006/main" xmlns:r="http://schemas.openxmlformats.org/officeDocument/2006/relationships" xmlns:mc="http://schemas.openxmlformats.org/markup-compatibility/2006" xmlns:mv="urn:schemas-microsoft-com:mac:vml" xmlns:p="http://schemas.openxmlformats.org/presentationml/2006/main" xmlns:c="http://schemas.openxmlformats.org/drawingml/2006/chart" xmlns:dgm="http://schemas.openxmlformats.org/drawingml/2006/diagram" xmlns:o="urn:schemas-microsoft-com:office:office" xmlns:v="urn:schemas-microsoft-com:vml" xmlns:pvml="urn:schemas-microsoft-com:office:powerpoint" xmlns:com="http://schemas.openxmlformats.org/drawingml/2006/compatibility" xmlns:p14="http://schemas.microsoft.com/office/powerpoint/2010/main" xmlns:p15="http://schemas.microsoft.com/office/powerpoint/2012/main" xmlns:ahyp="http://schemas.microsoft.com/office/drawing/2018/hyperlinkcolor" showMasterPhAnim="0" showMasterSp="0">
+<p:notes xmlns:a="http://schemas.openxmlformats.org/drawingml/2006/main" xmlns:r="http://schemas.openxmlformats.org/officeDocument/2006/relationships" xmlns:p="http://schemas.openxmlformats.org/presentationml/2006/main" showMasterSp="0" showMasterPhAnim="0">
   <p:cSld>
     <p:spTree>
       <p:nvGrpSpPr>
-        <p:cNvPr id="173" name="Shape 173"/>
+        <p:cNvPr id="1" name="Shape 173"/>
         <p:cNvGrpSpPr/>
         <p:nvPr/>
       </p:nvGrpSpPr>
@@ -1635,9 +1695,11 @@
       <p:sp>
         <p:nvSpPr>
           <p:cNvPr id="174" name="Google Shape;174;g2d6bcb803ff_0_11:notes"/>
-          <p:cNvSpPr txBox="1"/>
+          <p:cNvSpPr txBox="1">
+            <a:spLocks noGrp="1"/>
+          </p:cNvSpPr>
           <p:nvPr>
-            <p:ph idx="1" type="body"/>
+            <p:ph type="body" idx="1"/>
           </p:nvPr>
         </p:nvSpPr>
         <p:spPr>
@@ -1650,12 +1712,12 @@
           </a:prstGeom>
         </p:spPr>
         <p:txBody>
-          <a:bodyPr anchorCtr="0" anchor="t" bIns="91425" lIns="91425" spcFirstLastPara="1" rIns="91425" wrap="square" tIns="91425">
+          <a:bodyPr spcFirstLastPara="1" wrap="square" lIns="91425" tIns="91425" rIns="91425" bIns="91425" anchor="t" anchorCtr="0">
             <a:noAutofit/>
           </a:bodyPr>
           <a:lstStyle/>
           <a:p>
-            <a:pPr indent="0" lvl="0" marL="0" rtl="0" algn="l">
+            <a:pPr marL="0" lvl="0" indent="0" algn="l" rtl="0">
               <a:spcBef>
                 <a:spcPts val="0"/>
               </a:spcBef>
@@ -1665,7 +1727,7 @@
               <a:buNone/>
             </a:pPr>
             <a:r>
-              <a:rPr b="1" lang="en-US" sz="1200">
+              <a:rPr lang="en-US" sz="1200" b="1">
                 <a:solidFill>
                   <a:srgbClr val="202122"/>
                 </a:solidFill>
@@ -1687,7 +1749,7 @@
               <a:t> (</a:t>
             </a:r>
             <a:r>
-              <a:rPr b="1" lang="en-US" sz="1200">
+              <a:rPr lang="en-US" sz="1200" b="1">
                 <a:solidFill>
                   <a:srgbClr val="202122"/>
                 </a:solidFill>
@@ -1722,9 +1784,11 @@
       <p:sp>
         <p:nvSpPr>
           <p:cNvPr id="175" name="Google Shape;175;g2d6bcb803ff_0_11:notes"/>
-          <p:cNvSpPr/>
+          <p:cNvSpPr>
+            <a:spLocks noGrp="1" noRot="1" noChangeAspect="1"/>
+          </p:cNvSpPr>
           <p:nvPr>
-            <p:ph idx="2" type="sldImg"/>
+            <p:ph type="sldImg" idx="2"/>
           </p:nvPr>
         </p:nvSpPr>
         <p:spPr>
@@ -1733,9 +1797,13 @@
             <a:ext cx="4572300" cy="3429000"/>
           </a:xfrm>
           <a:custGeom>
-            <a:rect b="b" l="l" r="r" t="t"/>
+            <a:avLst/>
+            <a:gdLst/>
+            <a:ahLst/>
+            <a:cxnLst/>
+            <a:rect l="l" t="t" r="r" b="b"/>
             <a:pathLst>
-              <a:path extrusionOk="0" h="120000" w="120000">
+              <a:path w="120000" h="120000" extrusionOk="0">
                 <a:moveTo>
                   <a:pt x="0" y="0"/>
                 </a:moveTo>
@@ -1763,11 +1831,11 @@
 </file>
 
 <file path=ppt/notesSlides/notesSlide19.xml><?xml version="1.0" encoding="utf-8"?>
-<p:notes xmlns:a="http://schemas.openxmlformats.org/drawingml/2006/main" xmlns:r="http://schemas.openxmlformats.org/officeDocument/2006/relationships" xmlns:mc="http://schemas.openxmlformats.org/markup-compatibility/2006" xmlns:mv="urn:schemas-microsoft-com:mac:vml" xmlns:p="http://schemas.openxmlformats.org/presentationml/2006/main" xmlns:c="http://schemas.openxmlformats.org/drawingml/2006/chart" xmlns:dgm="http://schemas.openxmlformats.org/drawingml/2006/diagram" xmlns:o="urn:schemas-microsoft-com:office:office" xmlns:v="urn:schemas-microsoft-com:vml" xmlns:pvml="urn:schemas-microsoft-com:office:powerpoint" xmlns:com="http://schemas.openxmlformats.org/drawingml/2006/compatibility" xmlns:p14="http://schemas.microsoft.com/office/powerpoint/2010/main" xmlns:p15="http://schemas.microsoft.com/office/powerpoint/2012/main" xmlns:ahyp="http://schemas.microsoft.com/office/drawing/2018/hyperlinkcolor" showMasterPhAnim="0" showMasterSp="0">
+<p:notes xmlns:a="http://schemas.openxmlformats.org/drawingml/2006/main" xmlns:r="http://schemas.openxmlformats.org/officeDocument/2006/relationships" xmlns:p="http://schemas.openxmlformats.org/presentationml/2006/main" showMasterSp="0" showMasterPhAnim="0">
   <p:cSld>
     <p:spTree>
       <p:nvGrpSpPr>
-        <p:cNvPr id="179" name="Shape 179"/>
+        <p:cNvPr id="1" name="Shape 179"/>
         <p:cNvGrpSpPr/>
         <p:nvPr/>
       </p:nvGrpSpPr>
@@ -1782,9 +1850,11 @@
       <p:sp>
         <p:nvSpPr>
           <p:cNvPr id="180" name="Google Shape;180;p10:notes"/>
-          <p:cNvSpPr txBox="1"/>
+          <p:cNvSpPr txBox="1">
+            <a:spLocks noGrp="1"/>
+          </p:cNvSpPr>
           <p:nvPr>
-            <p:ph idx="1" type="body"/>
+            <p:ph type="body" idx="1"/>
           </p:nvPr>
         </p:nvSpPr>
         <p:spPr>
@@ -1797,12 +1867,12 @@
           </a:prstGeom>
         </p:spPr>
         <p:txBody>
-          <a:bodyPr anchorCtr="0" anchor="t" bIns="91425" lIns="91425" spcFirstLastPara="1" rIns="91425" wrap="square" tIns="91425">
+          <a:bodyPr spcFirstLastPara="1" wrap="square" lIns="91425" tIns="91425" rIns="91425" bIns="91425" anchor="t" anchorCtr="0">
             <a:noAutofit/>
           </a:bodyPr>
           <a:lstStyle/>
           <a:p>
-            <a:pPr indent="0" lvl="0" marL="0" rtl="0" algn="l">
+            <a:pPr marL="0" lvl="0" indent="0" algn="l" rtl="0">
               <a:spcBef>
                 <a:spcPts val="0"/>
               </a:spcBef>
@@ -1811,9 +1881,6 @@
               </a:spcAft>
               <a:buNone/>
             </a:pPr>
-            <a:r>
-              <a:t/>
-            </a:r>
             <a:endParaRPr/>
           </a:p>
         </p:txBody>
@@ -1821,9 +1888,11 @@
       <p:sp>
         <p:nvSpPr>
           <p:cNvPr id="181" name="Google Shape;181;p10:notes"/>
-          <p:cNvSpPr/>
+          <p:cNvSpPr>
+            <a:spLocks noGrp="1" noRot="1" noChangeAspect="1"/>
+          </p:cNvSpPr>
           <p:nvPr>
-            <p:ph idx="2" type="sldImg"/>
+            <p:ph type="sldImg" idx="2"/>
           </p:nvPr>
         </p:nvSpPr>
         <p:spPr>
@@ -1832,9 +1901,13 @@
             <a:ext cx="4572225" cy="3429000"/>
           </a:xfrm>
           <a:custGeom>
-            <a:rect b="b" l="l" r="r" t="t"/>
+            <a:avLst/>
+            <a:gdLst/>
+            <a:ahLst/>
+            <a:cxnLst/>
+            <a:rect l="l" t="t" r="r" b="b"/>
             <a:pathLst>
-              <a:path extrusionOk="0" h="120000" w="120000">
+              <a:path w="120000" h="120000" extrusionOk="0">
                 <a:moveTo>
                   <a:pt x="0" y="0"/>
                 </a:moveTo>
@@ -1862,11 +1935,11 @@
 </file>
 
 <file path=ppt/notesSlides/notesSlide2.xml><?xml version="1.0" encoding="utf-8"?>
-<p:notes xmlns:a="http://schemas.openxmlformats.org/drawingml/2006/main" xmlns:r="http://schemas.openxmlformats.org/officeDocument/2006/relationships" xmlns:mc="http://schemas.openxmlformats.org/markup-compatibility/2006" xmlns:mv="urn:schemas-microsoft-com:mac:vml" xmlns:p="http://schemas.openxmlformats.org/presentationml/2006/main" xmlns:c="http://schemas.openxmlformats.org/drawingml/2006/chart" xmlns:dgm="http://schemas.openxmlformats.org/drawingml/2006/diagram" xmlns:o="urn:schemas-microsoft-com:office:office" xmlns:v="urn:schemas-microsoft-com:vml" xmlns:pvml="urn:schemas-microsoft-com:office:powerpoint" xmlns:com="http://schemas.openxmlformats.org/drawingml/2006/compatibility" xmlns:p14="http://schemas.microsoft.com/office/powerpoint/2010/main" xmlns:p15="http://schemas.microsoft.com/office/powerpoint/2012/main" xmlns:ahyp="http://schemas.microsoft.com/office/drawing/2018/hyperlinkcolor" showMasterPhAnim="0" showMasterSp="0">
+<p:notes xmlns:a="http://schemas.openxmlformats.org/drawingml/2006/main" xmlns:r="http://schemas.openxmlformats.org/officeDocument/2006/relationships" xmlns:p="http://schemas.openxmlformats.org/presentationml/2006/main" showMasterSp="0" showMasterPhAnim="0">
   <p:cSld>
     <p:spTree>
       <p:nvGrpSpPr>
-        <p:cNvPr id="70" name="Shape 70"/>
+        <p:cNvPr id="1" name="Shape 70"/>
         <p:cNvGrpSpPr/>
         <p:nvPr/>
       </p:nvGrpSpPr>
@@ -1881,9 +1954,11 @@
       <p:sp>
         <p:nvSpPr>
           <p:cNvPr id="71" name="Google Shape;71;p2:notes"/>
-          <p:cNvSpPr txBox="1"/>
+          <p:cNvSpPr txBox="1">
+            <a:spLocks noGrp="1"/>
+          </p:cNvSpPr>
           <p:nvPr>
-            <p:ph idx="1" type="body"/>
+            <p:ph type="body" idx="1"/>
           </p:nvPr>
         </p:nvSpPr>
         <p:spPr>
@@ -1896,12 +1971,12 @@
           </a:prstGeom>
         </p:spPr>
         <p:txBody>
-          <a:bodyPr anchorCtr="0" anchor="t" bIns="91425" lIns="91425" spcFirstLastPara="1" rIns="91425" wrap="square" tIns="91425">
+          <a:bodyPr spcFirstLastPara="1" wrap="square" lIns="91425" tIns="91425" rIns="91425" bIns="91425" anchor="t" anchorCtr="0">
             <a:noAutofit/>
           </a:bodyPr>
           <a:lstStyle/>
           <a:p>
-            <a:pPr indent="0" lvl="0" marL="0" rtl="0" algn="l">
+            <a:pPr marL="0" lvl="0" indent="0" algn="l" rtl="0">
               <a:spcBef>
                 <a:spcPts val="0"/>
               </a:spcBef>
@@ -1910,9 +1985,6 @@
               </a:spcAft>
               <a:buNone/>
             </a:pPr>
-            <a:r>
-              <a:t/>
-            </a:r>
             <a:endParaRPr/>
           </a:p>
         </p:txBody>
@@ -1920,9 +1992,11 @@
       <p:sp>
         <p:nvSpPr>
           <p:cNvPr id="72" name="Google Shape;72;p2:notes"/>
-          <p:cNvSpPr/>
+          <p:cNvSpPr>
+            <a:spLocks noGrp="1" noRot="1" noChangeAspect="1"/>
+          </p:cNvSpPr>
           <p:nvPr>
-            <p:ph idx="2" type="sldImg"/>
+            <p:ph type="sldImg" idx="2"/>
           </p:nvPr>
         </p:nvSpPr>
         <p:spPr>
@@ -1931,9 +2005,13 @@
             <a:ext cx="4572225" cy="3429000"/>
           </a:xfrm>
           <a:custGeom>
-            <a:rect b="b" l="l" r="r" t="t"/>
+            <a:avLst/>
+            <a:gdLst/>
+            <a:ahLst/>
+            <a:cxnLst/>
+            <a:rect l="l" t="t" r="r" b="b"/>
             <a:pathLst>
-              <a:path extrusionOk="0" h="120000" w="120000">
+              <a:path w="120000" h="120000" extrusionOk="0">
                 <a:moveTo>
                   <a:pt x="0" y="0"/>
                 </a:moveTo>
@@ -1961,11 +2039,11 @@
 </file>
 
 <file path=ppt/notesSlides/notesSlide20.xml><?xml version="1.0" encoding="utf-8"?>
-<p:notes xmlns:a="http://schemas.openxmlformats.org/drawingml/2006/main" xmlns:r="http://schemas.openxmlformats.org/officeDocument/2006/relationships" xmlns:mc="http://schemas.openxmlformats.org/markup-compatibility/2006" xmlns:mv="urn:schemas-microsoft-com:mac:vml" xmlns:p="http://schemas.openxmlformats.org/presentationml/2006/main" xmlns:c="http://schemas.openxmlformats.org/drawingml/2006/chart" xmlns:dgm="http://schemas.openxmlformats.org/drawingml/2006/diagram" xmlns:o="urn:schemas-microsoft-com:office:office" xmlns:v="urn:schemas-microsoft-com:vml" xmlns:pvml="urn:schemas-microsoft-com:office:powerpoint" xmlns:com="http://schemas.openxmlformats.org/drawingml/2006/compatibility" xmlns:p14="http://schemas.microsoft.com/office/powerpoint/2010/main" xmlns:p15="http://schemas.microsoft.com/office/powerpoint/2012/main" xmlns:ahyp="http://schemas.microsoft.com/office/drawing/2018/hyperlinkcolor" showMasterPhAnim="0" showMasterSp="0">
+<p:notes xmlns:a="http://schemas.openxmlformats.org/drawingml/2006/main" xmlns:r="http://schemas.openxmlformats.org/officeDocument/2006/relationships" xmlns:p="http://schemas.openxmlformats.org/presentationml/2006/main" showMasterSp="0" showMasterPhAnim="0">
   <p:cSld>
     <p:spTree>
       <p:nvGrpSpPr>
-        <p:cNvPr id="185" name="Shape 185"/>
+        <p:cNvPr id="1" name="Shape 185"/>
         <p:cNvGrpSpPr/>
         <p:nvPr/>
       </p:nvGrpSpPr>
@@ -1980,9 +2058,11 @@
       <p:sp>
         <p:nvSpPr>
           <p:cNvPr id="186" name="Google Shape;186;g31dbdd1e1a3_0_68:notes"/>
-          <p:cNvSpPr/>
+          <p:cNvSpPr>
+            <a:spLocks noGrp="1" noRot="1" noChangeAspect="1"/>
+          </p:cNvSpPr>
           <p:nvPr>
-            <p:ph idx="2" type="sldImg"/>
+            <p:ph type="sldImg" idx="2"/>
           </p:nvPr>
         </p:nvSpPr>
         <p:spPr>
@@ -1991,9 +2071,13 @@
             <a:ext cx="4572300" cy="3429000"/>
           </a:xfrm>
           <a:custGeom>
-            <a:rect b="b" l="l" r="r" t="t"/>
+            <a:avLst/>
+            <a:gdLst/>
+            <a:ahLst/>
+            <a:cxnLst/>
+            <a:rect l="l" t="t" r="r" b="b"/>
             <a:pathLst>
-              <a:path extrusionOk="0" h="120000" w="120000">
+              <a:path w="120000" h="120000" extrusionOk="0">
                 <a:moveTo>
                   <a:pt x="0" y="0"/>
                 </a:moveTo>
@@ -2015,9 +2099,11 @@
       <p:sp>
         <p:nvSpPr>
           <p:cNvPr id="187" name="Google Shape;187;g31dbdd1e1a3_0_68:notes"/>
-          <p:cNvSpPr txBox="1"/>
+          <p:cNvSpPr txBox="1">
+            <a:spLocks noGrp="1"/>
+          </p:cNvSpPr>
           <p:nvPr>
-            <p:ph idx="1" type="body"/>
+            <p:ph type="body" idx="1"/>
           </p:nvPr>
         </p:nvSpPr>
         <p:spPr>
@@ -2030,12 +2116,12 @@
           </a:prstGeom>
         </p:spPr>
         <p:txBody>
-          <a:bodyPr anchorCtr="0" anchor="t" bIns="91425" lIns="91425" spcFirstLastPara="1" rIns="91425" wrap="square" tIns="91425">
+          <a:bodyPr spcFirstLastPara="1" wrap="square" lIns="91425" tIns="91425" rIns="91425" bIns="91425" anchor="t" anchorCtr="0">
             <a:noAutofit/>
           </a:bodyPr>
           <a:lstStyle/>
           <a:p>
-            <a:pPr indent="0" lvl="0" marL="0" rtl="0" algn="l">
+            <a:pPr marL="0" lvl="0" indent="0" algn="l" rtl="0">
               <a:spcBef>
                 <a:spcPts val="0"/>
               </a:spcBef>
@@ -2044,9 +2130,6 @@
               </a:spcAft>
               <a:buNone/>
             </a:pPr>
-            <a:r>
-              <a:t/>
-            </a:r>
             <a:endParaRPr/>
           </a:p>
         </p:txBody>
@@ -2060,11 +2143,11 @@
 </file>
 
 <file path=ppt/notesSlides/notesSlide3.xml><?xml version="1.0" encoding="utf-8"?>
-<p:notes xmlns:a="http://schemas.openxmlformats.org/drawingml/2006/main" xmlns:r="http://schemas.openxmlformats.org/officeDocument/2006/relationships" xmlns:mc="http://schemas.openxmlformats.org/markup-compatibility/2006" xmlns:mv="urn:schemas-microsoft-com:mac:vml" xmlns:p="http://schemas.openxmlformats.org/presentationml/2006/main" xmlns:c="http://schemas.openxmlformats.org/drawingml/2006/chart" xmlns:dgm="http://schemas.openxmlformats.org/drawingml/2006/diagram" xmlns:o="urn:schemas-microsoft-com:office:office" xmlns:v="urn:schemas-microsoft-com:vml" xmlns:pvml="urn:schemas-microsoft-com:office:powerpoint" xmlns:com="http://schemas.openxmlformats.org/drawingml/2006/compatibility" xmlns:p14="http://schemas.microsoft.com/office/powerpoint/2010/main" xmlns:p15="http://schemas.microsoft.com/office/powerpoint/2012/main" xmlns:ahyp="http://schemas.microsoft.com/office/drawing/2018/hyperlinkcolor" showMasterPhAnim="0" showMasterSp="0">
+<p:notes xmlns:a="http://schemas.openxmlformats.org/drawingml/2006/main" xmlns:r="http://schemas.openxmlformats.org/officeDocument/2006/relationships" xmlns:p="http://schemas.openxmlformats.org/presentationml/2006/main" showMasterSp="0" showMasterPhAnim="0">
   <p:cSld>
     <p:spTree>
       <p:nvGrpSpPr>
-        <p:cNvPr id="76" name="Shape 76"/>
+        <p:cNvPr id="1" name="Shape 76"/>
         <p:cNvGrpSpPr/>
         <p:nvPr/>
       </p:nvGrpSpPr>
@@ -2079,9 +2162,11 @@
       <p:sp>
         <p:nvSpPr>
           <p:cNvPr id="77" name="Google Shape;77;g31dbdd1e1a3_0_0:notes"/>
-          <p:cNvSpPr/>
+          <p:cNvSpPr>
+            <a:spLocks noGrp="1" noRot="1" noChangeAspect="1"/>
+          </p:cNvSpPr>
           <p:nvPr>
-            <p:ph idx="2" type="sldImg"/>
+            <p:ph type="sldImg" idx="2"/>
           </p:nvPr>
         </p:nvSpPr>
         <p:spPr>
@@ -2090,9 +2175,13 @@
             <a:ext cx="4572300" cy="3429000"/>
           </a:xfrm>
           <a:custGeom>
-            <a:rect b="b" l="l" r="r" t="t"/>
+            <a:avLst/>
+            <a:gdLst/>
+            <a:ahLst/>
+            <a:cxnLst/>
+            <a:rect l="l" t="t" r="r" b="b"/>
             <a:pathLst>
-              <a:path extrusionOk="0" h="120000" w="120000">
+              <a:path w="120000" h="120000" extrusionOk="0">
                 <a:moveTo>
                   <a:pt x="0" y="0"/>
                 </a:moveTo>
@@ -2114,9 +2203,11 @@
       <p:sp>
         <p:nvSpPr>
           <p:cNvPr id="78" name="Google Shape;78;g31dbdd1e1a3_0_0:notes"/>
-          <p:cNvSpPr txBox="1"/>
+          <p:cNvSpPr txBox="1">
+            <a:spLocks noGrp="1"/>
+          </p:cNvSpPr>
           <p:nvPr>
-            <p:ph idx="1" type="body"/>
+            <p:ph type="body" idx="1"/>
           </p:nvPr>
         </p:nvSpPr>
         <p:spPr>
@@ -2129,12 +2220,12 @@
           </a:prstGeom>
         </p:spPr>
         <p:txBody>
-          <a:bodyPr anchorCtr="0" anchor="t" bIns="91425" lIns="91425" spcFirstLastPara="1" rIns="91425" wrap="square" tIns="91425">
+          <a:bodyPr spcFirstLastPara="1" wrap="square" lIns="91425" tIns="91425" rIns="91425" bIns="91425" anchor="t" anchorCtr="0">
             <a:noAutofit/>
           </a:bodyPr>
           <a:lstStyle/>
           <a:p>
-            <a:pPr indent="0" lvl="0" marL="0" rtl="0" algn="l">
+            <a:pPr marL="0" lvl="0" indent="0" algn="l" rtl="0">
               <a:spcBef>
                 <a:spcPts val="0"/>
               </a:spcBef>
@@ -2143,9 +2234,6 @@
               </a:spcAft>
               <a:buNone/>
             </a:pPr>
-            <a:r>
-              <a:t/>
-            </a:r>
             <a:endParaRPr/>
           </a:p>
         </p:txBody>
@@ -2159,11 +2247,11 @@
 </file>
 
 <file path=ppt/notesSlides/notesSlide4.xml><?xml version="1.0" encoding="utf-8"?>
-<p:notes xmlns:a="http://schemas.openxmlformats.org/drawingml/2006/main" xmlns:r="http://schemas.openxmlformats.org/officeDocument/2006/relationships" xmlns:mc="http://schemas.openxmlformats.org/markup-compatibility/2006" xmlns:mv="urn:schemas-microsoft-com:mac:vml" xmlns:p="http://schemas.openxmlformats.org/presentationml/2006/main" xmlns:c="http://schemas.openxmlformats.org/drawingml/2006/chart" xmlns:dgm="http://schemas.openxmlformats.org/drawingml/2006/diagram" xmlns:o="urn:schemas-microsoft-com:office:office" xmlns:v="urn:schemas-microsoft-com:vml" xmlns:pvml="urn:schemas-microsoft-com:office:powerpoint" xmlns:com="http://schemas.openxmlformats.org/drawingml/2006/compatibility" xmlns:p14="http://schemas.microsoft.com/office/powerpoint/2010/main" xmlns:p15="http://schemas.microsoft.com/office/powerpoint/2012/main" xmlns:ahyp="http://schemas.microsoft.com/office/drawing/2018/hyperlinkcolor" showMasterPhAnim="0" showMasterSp="0">
+<p:notes xmlns:a="http://schemas.openxmlformats.org/drawingml/2006/main" xmlns:r="http://schemas.openxmlformats.org/officeDocument/2006/relationships" xmlns:p="http://schemas.openxmlformats.org/presentationml/2006/main" showMasterSp="0" showMasterPhAnim="0">
   <p:cSld>
     <p:spTree>
       <p:nvGrpSpPr>
-        <p:cNvPr id="83" name="Shape 83"/>
+        <p:cNvPr id="1" name="Shape 83"/>
         <p:cNvGrpSpPr/>
         <p:nvPr/>
       </p:nvGrpSpPr>
@@ -2178,9 +2266,11 @@
       <p:sp>
         <p:nvSpPr>
           <p:cNvPr id="84" name="Google Shape;84;g2d6bcb803ff_0_16:notes"/>
-          <p:cNvSpPr/>
+          <p:cNvSpPr>
+            <a:spLocks noGrp="1" noRot="1" noChangeAspect="1"/>
+          </p:cNvSpPr>
           <p:nvPr>
-            <p:ph idx="2" type="sldImg"/>
+            <p:ph type="sldImg" idx="2"/>
           </p:nvPr>
         </p:nvSpPr>
         <p:spPr>
@@ -2189,9 +2279,13 @@
             <a:ext cx="4572300" cy="3429000"/>
           </a:xfrm>
           <a:custGeom>
-            <a:rect b="b" l="l" r="r" t="t"/>
+            <a:avLst/>
+            <a:gdLst/>
+            <a:ahLst/>
+            <a:cxnLst/>
+            <a:rect l="l" t="t" r="r" b="b"/>
             <a:pathLst>
-              <a:path extrusionOk="0" h="120000" w="120000">
+              <a:path w="120000" h="120000" extrusionOk="0">
                 <a:moveTo>
                   <a:pt x="0" y="0"/>
                 </a:moveTo>
@@ -2213,9 +2307,11 @@
       <p:sp>
         <p:nvSpPr>
           <p:cNvPr id="85" name="Google Shape;85;g2d6bcb803ff_0_16:notes"/>
-          <p:cNvSpPr txBox="1"/>
+          <p:cNvSpPr txBox="1">
+            <a:spLocks noGrp="1"/>
+          </p:cNvSpPr>
           <p:nvPr>
-            <p:ph idx="1" type="body"/>
+            <p:ph type="body" idx="1"/>
           </p:nvPr>
         </p:nvSpPr>
         <p:spPr>
@@ -2228,12 +2324,12 @@
           </a:prstGeom>
         </p:spPr>
         <p:txBody>
-          <a:bodyPr anchorCtr="0" anchor="t" bIns="91425" lIns="91425" spcFirstLastPara="1" rIns="91425" wrap="square" tIns="91425">
+          <a:bodyPr spcFirstLastPara="1" wrap="square" lIns="91425" tIns="91425" rIns="91425" bIns="91425" anchor="t" anchorCtr="0">
             <a:noAutofit/>
           </a:bodyPr>
           <a:lstStyle/>
           <a:p>
-            <a:pPr indent="0" lvl="0" marL="0" rtl="0" algn="l">
+            <a:pPr marL="0" lvl="0" indent="0" algn="l" rtl="0">
               <a:spcBef>
                 <a:spcPts val="0"/>
               </a:spcBef>
@@ -2242,9 +2338,6 @@
               </a:spcAft>
               <a:buNone/>
             </a:pPr>
-            <a:r>
-              <a:t/>
-            </a:r>
             <a:endParaRPr/>
           </a:p>
         </p:txBody>
@@ -2258,11 +2351,11 @@
 </file>
 
 <file path=ppt/notesSlides/notesSlide5.xml><?xml version="1.0" encoding="utf-8"?>
-<p:notes xmlns:a="http://schemas.openxmlformats.org/drawingml/2006/main" xmlns:r="http://schemas.openxmlformats.org/officeDocument/2006/relationships" xmlns:mc="http://schemas.openxmlformats.org/markup-compatibility/2006" xmlns:mv="urn:schemas-microsoft-com:mac:vml" xmlns:p="http://schemas.openxmlformats.org/presentationml/2006/main" xmlns:c="http://schemas.openxmlformats.org/drawingml/2006/chart" xmlns:dgm="http://schemas.openxmlformats.org/drawingml/2006/diagram" xmlns:o="urn:schemas-microsoft-com:office:office" xmlns:v="urn:schemas-microsoft-com:vml" xmlns:pvml="urn:schemas-microsoft-com:office:powerpoint" xmlns:com="http://schemas.openxmlformats.org/drawingml/2006/compatibility" xmlns:p14="http://schemas.microsoft.com/office/powerpoint/2010/main" xmlns:p15="http://schemas.microsoft.com/office/powerpoint/2012/main" xmlns:ahyp="http://schemas.microsoft.com/office/drawing/2018/hyperlinkcolor" showMasterPhAnim="0" showMasterSp="0">
+<p:notes xmlns:a="http://schemas.openxmlformats.org/drawingml/2006/main" xmlns:r="http://schemas.openxmlformats.org/officeDocument/2006/relationships" xmlns:p="http://schemas.openxmlformats.org/presentationml/2006/main" showMasterSp="0" showMasterPhAnim="0">
   <p:cSld>
     <p:spTree>
       <p:nvGrpSpPr>
-        <p:cNvPr id="89" name="Shape 89"/>
+        <p:cNvPr id="1" name="Shape 89"/>
         <p:cNvGrpSpPr/>
         <p:nvPr/>
       </p:nvGrpSpPr>
@@ -2277,9 +2370,11 @@
       <p:sp>
         <p:nvSpPr>
           <p:cNvPr id="90" name="Google Shape;90;p3:notes"/>
-          <p:cNvSpPr txBox="1"/>
+          <p:cNvSpPr txBox="1">
+            <a:spLocks noGrp="1"/>
+          </p:cNvSpPr>
           <p:nvPr>
-            <p:ph idx="1" type="body"/>
+            <p:ph type="body" idx="1"/>
           </p:nvPr>
         </p:nvSpPr>
         <p:spPr>
@@ -2292,12 +2387,12 @@
           </a:prstGeom>
         </p:spPr>
         <p:txBody>
-          <a:bodyPr anchorCtr="0" anchor="t" bIns="91425" lIns="91425" spcFirstLastPara="1" rIns="91425" wrap="square" tIns="91425">
+          <a:bodyPr spcFirstLastPara="1" wrap="square" lIns="91425" tIns="91425" rIns="91425" bIns="91425" anchor="t" anchorCtr="0">
             <a:noAutofit/>
           </a:bodyPr>
           <a:lstStyle/>
           <a:p>
-            <a:pPr indent="0" lvl="0" marL="0" rtl="0" algn="l">
+            <a:pPr marL="0" lvl="0" indent="0" algn="l" rtl="0">
               <a:spcBef>
                 <a:spcPts val="0"/>
               </a:spcBef>
@@ -2306,9 +2401,6 @@
               </a:spcAft>
               <a:buNone/>
             </a:pPr>
-            <a:r>
-              <a:t/>
-            </a:r>
             <a:endParaRPr/>
           </a:p>
         </p:txBody>
@@ -2316,9 +2408,11 @@
       <p:sp>
         <p:nvSpPr>
           <p:cNvPr id="91" name="Google Shape;91;p3:notes"/>
-          <p:cNvSpPr/>
+          <p:cNvSpPr>
+            <a:spLocks noGrp="1" noRot="1" noChangeAspect="1"/>
+          </p:cNvSpPr>
           <p:nvPr>
-            <p:ph idx="2" type="sldImg"/>
+            <p:ph type="sldImg" idx="2"/>
           </p:nvPr>
         </p:nvSpPr>
         <p:spPr>
@@ -2327,9 +2421,13 @@
             <a:ext cx="4572225" cy="3429000"/>
           </a:xfrm>
           <a:custGeom>
-            <a:rect b="b" l="l" r="r" t="t"/>
+            <a:avLst/>
+            <a:gdLst/>
+            <a:ahLst/>
+            <a:cxnLst/>
+            <a:rect l="l" t="t" r="r" b="b"/>
             <a:pathLst>
-              <a:path extrusionOk="0" h="120000" w="120000">
+              <a:path w="120000" h="120000" extrusionOk="0">
                 <a:moveTo>
                   <a:pt x="0" y="0"/>
                 </a:moveTo>
@@ -2357,11 +2455,11 @@
 </file>
 
 <file path=ppt/notesSlides/notesSlide6.xml><?xml version="1.0" encoding="utf-8"?>
-<p:notes xmlns:a="http://schemas.openxmlformats.org/drawingml/2006/main" xmlns:r="http://schemas.openxmlformats.org/officeDocument/2006/relationships" xmlns:mc="http://schemas.openxmlformats.org/markup-compatibility/2006" xmlns:mv="urn:schemas-microsoft-com:mac:vml" xmlns:p="http://schemas.openxmlformats.org/presentationml/2006/main" xmlns:c="http://schemas.openxmlformats.org/drawingml/2006/chart" xmlns:dgm="http://schemas.openxmlformats.org/drawingml/2006/diagram" xmlns:o="urn:schemas-microsoft-com:office:office" xmlns:v="urn:schemas-microsoft-com:vml" xmlns:pvml="urn:schemas-microsoft-com:office:powerpoint" xmlns:com="http://schemas.openxmlformats.org/drawingml/2006/compatibility" xmlns:p14="http://schemas.microsoft.com/office/powerpoint/2010/main" xmlns:p15="http://schemas.microsoft.com/office/powerpoint/2012/main" xmlns:ahyp="http://schemas.microsoft.com/office/drawing/2018/hyperlinkcolor" showMasterPhAnim="0" showMasterSp="0">
+<p:notes xmlns:a="http://schemas.openxmlformats.org/drawingml/2006/main" xmlns:r="http://schemas.openxmlformats.org/officeDocument/2006/relationships" xmlns:p="http://schemas.openxmlformats.org/presentationml/2006/main" showMasterSp="0" showMasterPhAnim="0">
   <p:cSld>
     <p:spTree>
       <p:nvGrpSpPr>
-        <p:cNvPr id="96" name="Shape 96"/>
+        <p:cNvPr id="1" name="Shape 96"/>
         <p:cNvGrpSpPr/>
         <p:nvPr/>
       </p:nvGrpSpPr>
@@ -2376,9 +2474,11 @@
       <p:sp>
         <p:nvSpPr>
           <p:cNvPr id="97" name="Google Shape;97;g2d6bcb803ff_0_0:notes"/>
-          <p:cNvSpPr/>
+          <p:cNvSpPr>
+            <a:spLocks noGrp="1" noRot="1" noChangeAspect="1"/>
+          </p:cNvSpPr>
           <p:nvPr>
-            <p:ph idx="2" type="sldImg"/>
+            <p:ph type="sldImg" idx="2"/>
           </p:nvPr>
         </p:nvSpPr>
         <p:spPr>
@@ -2387,9 +2487,13 @@
             <a:ext cx="4572300" cy="3429000"/>
           </a:xfrm>
           <a:custGeom>
-            <a:rect b="b" l="l" r="r" t="t"/>
+            <a:avLst/>
+            <a:gdLst/>
+            <a:ahLst/>
+            <a:cxnLst/>
+            <a:rect l="l" t="t" r="r" b="b"/>
             <a:pathLst>
-              <a:path extrusionOk="0" h="120000" w="120000">
+              <a:path w="120000" h="120000" extrusionOk="0">
                 <a:moveTo>
                   <a:pt x="0" y="0"/>
                 </a:moveTo>
@@ -2411,9 +2515,11 @@
       <p:sp>
         <p:nvSpPr>
           <p:cNvPr id="98" name="Google Shape;98;g2d6bcb803ff_0_0:notes"/>
-          <p:cNvSpPr txBox="1"/>
+          <p:cNvSpPr txBox="1">
+            <a:spLocks noGrp="1"/>
+          </p:cNvSpPr>
           <p:nvPr>
-            <p:ph idx="1" type="body"/>
+            <p:ph type="body" idx="1"/>
           </p:nvPr>
         </p:nvSpPr>
         <p:spPr>
@@ -2426,12 +2532,12 @@
           </a:prstGeom>
         </p:spPr>
         <p:txBody>
-          <a:bodyPr anchorCtr="0" anchor="t" bIns="91425" lIns="91425" spcFirstLastPara="1" rIns="91425" wrap="square" tIns="91425">
+          <a:bodyPr spcFirstLastPara="1" wrap="square" lIns="91425" tIns="91425" rIns="91425" bIns="91425" anchor="t" anchorCtr="0">
             <a:noAutofit/>
           </a:bodyPr>
           <a:lstStyle/>
           <a:p>
-            <a:pPr indent="0" lvl="0" marL="0" rtl="0" algn="l">
+            <a:pPr marL="0" lvl="0" indent="0" algn="l" rtl="0">
               <a:spcBef>
                 <a:spcPts val="0"/>
               </a:spcBef>
@@ -2440,9 +2546,6 @@
               </a:spcAft>
               <a:buNone/>
             </a:pPr>
-            <a:r>
-              <a:t/>
-            </a:r>
             <a:endParaRPr/>
           </a:p>
         </p:txBody>
@@ -2456,11 +2559,11 @@
 </file>
 
 <file path=ppt/notesSlides/notesSlide7.xml><?xml version="1.0" encoding="utf-8"?>
-<p:notes xmlns:a="http://schemas.openxmlformats.org/drawingml/2006/main" xmlns:r="http://schemas.openxmlformats.org/officeDocument/2006/relationships" xmlns:mc="http://schemas.openxmlformats.org/markup-compatibility/2006" xmlns:mv="urn:schemas-microsoft-com:mac:vml" xmlns:p="http://schemas.openxmlformats.org/presentationml/2006/main" xmlns:c="http://schemas.openxmlformats.org/drawingml/2006/chart" xmlns:dgm="http://schemas.openxmlformats.org/drawingml/2006/diagram" xmlns:o="urn:schemas-microsoft-com:office:office" xmlns:v="urn:schemas-microsoft-com:vml" xmlns:pvml="urn:schemas-microsoft-com:office:powerpoint" xmlns:com="http://schemas.openxmlformats.org/drawingml/2006/compatibility" xmlns:p14="http://schemas.microsoft.com/office/powerpoint/2010/main" xmlns:p15="http://schemas.microsoft.com/office/powerpoint/2012/main" xmlns:ahyp="http://schemas.microsoft.com/office/drawing/2018/hyperlinkcolor" showMasterPhAnim="0" showMasterSp="0">
+<p:notes xmlns:a="http://schemas.openxmlformats.org/drawingml/2006/main" xmlns:r="http://schemas.openxmlformats.org/officeDocument/2006/relationships" xmlns:p="http://schemas.openxmlformats.org/presentationml/2006/main" showMasterSp="0" showMasterPhAnim="0">
   <p:cSld>
     <p:spTree>
       <p:nvGrpSpPr>
-        <p:cNvPr id="104" name="Shape 104"/>
+        <p:cNvPr id="1" name="Shape 104"/>
         <p:cNvGrpSpPr/>
         <p:nvPr/>
       </p:nvGrpSpPr>
@@ -2475,9 +2578,11 @@
       <p:sp>
         <p:nvSpPr>
           <p:cNvPr id="105" name="Google Shape;105;p4:notes"/>
-          <p:cNvSpPr txBox="1"/>
+          <p:cNvSpPr txBox="1">
+            <a:spLocks noGrp="1"/>
+          </p:cNvSpPr>
           <p:nvPr>
-            <p:ph idx="1" type="body"/>
+            <p:ph type="body" idx="1"/>
           </p:nvPr>
         </p:nvSpPr>
         <p:spPr>
@@ -2490,12 +2595,12 @@
           </a:prstGeom>
         </p:spPr>
         <p:txBody>
-          <a:bodyPr anchorCtr="0" anchor="t" bIns="91425" lIns="91425" spcFirstLastPara="1" rIns="91425" wrap="square" tIns="91425">
+          <a:bodyPr spcFirstLastPara="1" wrap="square" lIns="91425" tIns="91425" rIns="91425" bIns="91425" anchor="t" anchorCtr="0">
             <a:noAutofit/>
           </a:bodyPr>
           <a:lstStyle/>
           <a:p>
-            <a:pPr indent="0" lvl="0" marL="0" rtl="0" algn="l">
+            <a:pPr marL="0" lvl="0" indent="0" algn="l" rtl="0">
               <a:spcBef>
                 <a:spcPts val="0"/>
               </a:spcBef>
@@ -2504,9 +2609,6 @@
               </a:spcAft>
               <a:buNone/>
             </a:pPr>
-            <a:r>
-              <a:t/>
-            </a:r>
             <a:endParaRPr/>
           </a:p>
         </p:txBody>
@@ -2514,9 +2616,11 @@
       <p:sp>
         <p:nvSpPr>
           <p:cNvPr id="106" name="Google Shape;106;p4:notes"/>
-          <p:cNvSpPr/>
+          <p:cNvSpPr>
+            <a:spLocks noGrp="1" noRot="1" noChangeAspect="1"/>
+          </p:cNvSpPr>
           <p:nvPr>
-            <p:ph idx="2" type="sldImg"/>
+            <p:ph type="sldImg" idx="2"/>
           </p:nvPr>
         </p:nvSpPr>
         <p:spPr>
@@ -2525,9 +2629,13 @@
             <a:ext cx="4572225" cy="3429000"/>
           </a:xfrm>
           <a:custGeom>
-            <a:rect b="b" l="l" r="r" t="t"/>
+            <a:avLst/>
+            <a:gdLst/>
+            <a:ahLst/>
+            <a:cxnLst/>
+            <a:rect l="l" t="t" r="r" b="b"/>
             <a:pathLst>
-              <a:path extrusionOk="0" h="120000" w="120000">
+              <a:path w="120000" h="120000" extrusionOk="0">
                 <a:moveTo>
                   <a:pt x="0" y="0"/>
                 </a:moveTo>
@@ -2555,11 +2663,11 @@
 </file>
 
 <file path=ppt/notesSlides/notesSlide8.xml><?xml version="1.0" encoding="utf-8"?>
-<p:notes xmlns:a="http://schemas.openxmlformats.org/drawingml/2006/main" xmlns:r="http://schemas.openxmlformats.org/officeDocument/2006/relationships" xmlns:mc="http://schemas.openxmlformats.org/markup-compatibility/2006" xmlns:mv="urn:schemas-microsoft-com:mac:vml" xmlns:p="http://schemas.openxmlformats.org/presentationml/2006/main" xmlns:c="http://schemas.openxmlformats.org/drawingml/2006/chart" xmlns:dgm="http://schemas.openxmlformats.org/drawingml/2006/diagram" xmlns:o="urn:schemas-microsoft-com:office:office" xmlns:v="urn:schemas-microsoft-com:vml" xmlns:pvml="urn:schemas-microsoft-com:office:powerpoint" xmlns:com="http://schemas.openxmlformats.org/drawingml/2006/compatibility" xmlns:p14="http://schemas.microsoft.com/office/powerpoint/2010/main" xmlns:p15="http://schemas.microsoft.com/office/powerpoint/2012/main" xmlns:ahyp="http://schemas.microsoft.com/office/drawing/2018/hyperlinkcolor" showMasterPhAnim="0" showMasterSp="0">
+<p:notes xmlns:a="http://schemas.openxmlformats.org/drawingml/2006/main" xmlns:r="http://schemas.openxmlformats.org/officeDocument/2006/relationships" xmlns:p="http://schemas.openxmlformats.org/presentationml/2006/main" showMasterSp="0" showMasterPhAnim="0">
   <p:cSld>
     <p:spTree>
       <p:nvGrpSpPr>
-        <p:cNvPr id="111" name="Shape 111"/>
+        <p:cNvPr id="1" name="Shape 111"/>
         <p:cNvGrpSpPr/>
         <p:nvPr/>
       </p:nvGrpSpPr>
@@ -2574,9 +2682,11 @@
       <p:sp>
         <p:nvSpPr>
           <p:cNvPr id="112" name="Google Shape;112;p5:notes"/>
-          <p:cNvSpPr txBox="1"/>
+          <p:cNvSpPr txBox="1">
+            <a:spLocks noGrp="1"/>
+          </p:cNvSpPr>
           <p:nvPr>
-            <p:ph idx="1" type="body"/>
+            <p:ph type="body" idx="1"/>
           </p:nvPr>
         </p:nvSpPr>
         <p:spPr>
@@ -2589,12 +2699,12 @@
           </a:prstGeom>
         </p:spPr>
         <p:txBody>
-          <a:bodyPr anchorCtr="0" anchor="t" bIns="91425" lIns="91425" spcFirstLastPara="1" rIns="91425" wrap="square" tIns="91425">
+          <a:bodyPr spcFirstLastPara="1" wrap="square" lIns="91425" tIns="91425" rIns="91425" bIns="91425" anchor="t" anchorCtr="0">
             <a:noAutofit/>
           </a:bodyPr>
           <a:lstStyle/>
           <a:p>
-            <a:pPr indent="0" lvl="0" marL="0" rtl="0" algn="l">
+            <a:pPr marL="0" lvl="0" indent="0" algn="l" rtl="0">
               <a:spcBef>
                 <a:spcPts val="0"/>
               </a:spcBef>
@@ -2603,9 +2713,6 @@
               </a:spcAft>
               <a:buNone/>
             </a:pPr>
-            <a:r>
-              <a:t/>
-            </a:r>
             <a:endParaRPr/>
           </a:p>
         </p:txBody>
@@ -2613,9 +2720,11 @@
       <p:sp>
         <p:nvSpPr>
           <p:cNvPr id="113" name="Google Shape;113;p5:notes"/>
-          <p:cNvSpPr/>
+          <p:cNvSpPr>
+            <a:spLocks noGrp="1" noRot="1" noChangeAspect="1"/>
+          </p:cNvSpPr>
           <p:nvPr>
-            <p:ph idx="2" type="sldImg"/>
+            <p:ph type="sldImg" idx="2"/>
           </p:nvPr>
         </p:nvSpPr>
         <p:spPr>
@@ -2624,9 +2733,13 @@
             <a:ext cx="4572225" cy="3429000"/>
           </a:xfrm>
           <a:custGeom>
-            <a:rect b="b" l="l" r="r" t="t"/>
+            <a:avLst/>
+            <a:gdLst/>
+            <a:ahLst/>
+            <a:cxnLst/>
+            <a:rect l="l" t="t" r="r" b="b"/>
             <a:pathLst>
-              <a:path extrusionOk="0" h="120000" w="120000">
+              <a:path w="120000" h="120000" extrusionOk="0">
                 <a:moveTo>
                   <a:pt x="0" y="0"/>
                 </a:moveTo>
@@ -2654,11 +2767,11 @@
 </file>
 
 <file path=ppt/notesSlides/notesSlide9.xml><?xml version="1.0" encoding="utf-8"?>
-<p:notes xmlns:a="http://schemas.openxmlformats.org/drawingml/2006/main" xmlns:r="http://schemas.openxmlformats.org/officeDocument/2006/relationships" xmlns:mc="http://schemas.openxmlformats.org/markup-compatibility/2006" xmlns:mv="urn:schemas-microsoft-com:mac:vml" xmlns:p="http://schemas.openxmlformats.org/presentationml/2006/main" xmlns:c="http://schemas.openxmlformats.org/drawingml/2006/chart" xmlns:dgm="http://schemas.openxmlformats.org/drawingml/2006/diagram" xmlns:o="urn:schemas-microsoft-com:office:office" xmlns:v="urn:schemas-microsoft-com:vml" xmlns:pvml="urn:schemas-microsoft-com:office:powerpoint" xmlns:com="http://schemas.openxmlformats.org/drawingml/2006/compatibility" xmlns:p14="http://schemas.microsoft.com/office/powerpoint/2010/main" xmlns:p15="http://schemas.microsoft.com/office/powerpoint/2012/main" xmlns:ahyp="http://schemas.microsoft.com/office/drawing/2018/hyperlinkcolor" showMasterPhAnim="0" showMasterSp="0">
+<p:notes xmlns:a="http://schemas.openxmlformats.org/drawingml/2006/main" xmlns:r="http://schemas.openxmlformats.org/officeDocument/2006/relationships" xmlns:p="http://schemas.openxmlformats.org/presentationml/2006/main" showMasterSp="0" showMasterPhAnim="0">
   <p:cSld>
     <p:spTree>
       <p:nvGrpSpPr>
-        <p:cNvPr id="117" name="Shape 117"/>
+        <p:cNvPr id="1" name="Shape 117"/>
         <p:cNvGrpSpPr/>
         <p:nvPr/>
       </p:nvGrpSpPr>
@@ -2673,9 +2786,11 @@
       <p:sp>
         <p:nvSpPr>
           <p:cNvPr id="118" name="Google Shape;118;g2d6bcb803ff_0_28:notes"/>
-          <p:cNvSpPr/>
+          <p:cNvSpPr>
+            <a:spLocks noGrp="1" noRot="1" noChangeAspect="1"/>
+          </p:cNvSpPr>
           <p:nvPr>
-            <p:ph idx="2" type="sldImg"/>
+            <p:ph type="sldImg" idx="2"/>
           </p:nvPr>
         </p:nvSpPr>
         <p:spPr>
@@ -2684,9 +2799,13 @@
             <a:ext cx="4572300" cy="3429000"/>
           </a:xfrm>
           <a:custGeom>
-            <a:rect b="b" l="l" r="r" t="t"/>
+            <a:avLst/>
+            <a:gdLst/>
+            <a:ahLst/>
+            <a:cxnLst/>
+            <a:rect l="l" t="t" r="r" b="b"/>
             <a:pathLst>
-              <a:path extrusionOk="0" h="120000" w="120000">
+              <a:path w="120000" h="120000" extrusionOk="0">
                 <a:moveTo>
                   <a:pt x="0" y="0"/>
                 </a:moveTo>
@@ -2708,9 +2827,11 @@
       <p:sp>
         <p:nvSpPr>
           <p:cNvPr id="119" name="Google Shape;119;g2d6bcb803ff_0_28:notes"/>
-          <p:cNvSpPr txBox="1"/>
+          <p:cNvSpPr txBox="1">
+            <a:spLocks noGrp="1"/>
+          </p:cNvSpPr>
           <p:nvPr>
-            <p:ph idx="1" type="body"/>
+            <p:ph type="body" idx="1"/>
           </p:nvPr>
         </p:nvSpPr>
         <p:spPr>
@@ -2723,12 +2844,12 @@
           </a:prstGeom>
         </p:spPr>
         <p:txBody>
-          <a:bodyPr anchorCtr="0" anchor="t" bIns="91425" lIns="91425" spcFirstLastPara="1" rIns="91425" wrap="square" tIns="91425">
+          <a:bodyPr spcFirstLastPara="1" wrap="square" lIns="91425" tIns="91425" rIns="91425" bIns="91425" anchor="t" anchorCtr="0">
             <a:noAutofit/>
           </a:bodyPr>
           <a:lstStyle/>
           <a:p>
-            <a:pPr indent="0" lvl="0" marL="0" rtl="0" algn="l">
+            <a:pPr marL="0" lvl="0" indent="0" algn="l" rtl="0">
               <a:spcBef>
                 <a:spcPts val="0"/>
               </a:spcBef>
@@ -2737,9 +2858,6 @@
               </a:spcAft>
               <a:buNone/>
             </a:pPr>
-            <a:r>
-              <a:t/>
-            </a:r>
             <a:endParaRPr/>
           </a:p>
         </p:txBody>
@@ -2753,11 +2871,11 @@
 </file>
 
 <file path=ppt/slideLayouts/slideLayout1.xml><?xml version="1.0" encoding="utf-8"?>
-<p:sldLayout xmlns:a="http://schemas.openxmlformats.org/drawingml/2006/main" xmlns:r="http://schemas.openxmlformats.org/officeDocument/2006/relationships" xmlns:mc="http://schemas.openxmlformats.org/markup-compatibility/2006" xmlns:mv="urn:schemas-microsoft-com:mac:vml" xmlns:p="http://schemas.openxmlformats.org/presentationml/2006/main" xmlns:c="http://schemas.openxmlformats.org/drawingml/2006/chart" xmlns:dgm="http://schemas.openxmlformats.org/drawingml/2006/diagram" xmlns:o="urn:schemas-microsoft-com:office:office" xmlns:v="urn:schemas-microsoft-com:vml" xmlns:pvml="urn:schemas-microsoft-com:office:powerpoint" xmlns:com="http://schemas.openxmlformats.org/drawingml/2006/compatibility" xmlns:p14="http://schemas.microsoft.com/office/powerpoint/2010/main" xmlns:p15="http://schemas.microsoft.com/office/powerpoint/2012/main" xmlns:ahyp="http://schemas.microsoft.com/office/drawing/2018/hyperlinkcolor" matchingName="Title slide" type="title">
+<p:sldLayout xmlns:a="http://schemas.openxmlformats.org/drawingml/2006/main" xmlns:r="http://schemas.openxmlformats.org/officeDocument/2006/relationships" xmlns:p="http://schemas.openxmlformats.org/presentationml/2006/main" matchingName="Title slide" type="title">
   <p:cSld name="TITLE">
     <p:spTree>
       <p:nvGrpSpPr>
-        <p:cNvPr id="9" name="Shape 9"/>
+        <p:cNvPr id="1" name="Shape 9"/>
         <p:cNvGrpSpPr/>
         <p:nvPr/>
       </p:nvGrpSpPr>
@@ -2781,9 +2899,13 @@
             <a:ext cx="1081625" cy="1499896"/>
           </a:xfrm>
           <a:custGeom>
-            <a:rect b="b" l="l" r="r" t="t"/>
+            <a:avLst/>
+            <a:gdLst/>
+            <a:ahLst/>
+            <a:cxnLst/>
+            <a:rect l="l" t="t" r="r" b="b"/>
             <a:pathLst>
-              <a:path extrusionOk="0" h="44998" w="43265">
+              <a:path w="43265" h="44998" extrusionOk="0">
                 <a:moveTo>
                   <a:pt x="0" y="44998"/>
                 </a:moveTo>
@@ -2797,14 +2919,14 @@
             </a:pathLst>
           </a:custGeom>
           <a:noFill/>
-          <a:ln cap="flat" cmpd="sng" w="28575">
+          <a:ln w="28575" cap="flat" cmpd="sng">
             <a:solidFill>
               <a:schemeClr val="lt2"/>
             </a:solidFill>
             <a:prstDash val="solid"/>
             <a:miter lim="8000"/>
-            <a:headEnd len="sm" w="sm" type="none"/>
-            <a:tailEnd len="sm" w="sm" type="none"/>
+            <a:headEnd type="none" w="sm" len="sm"/>
+            <a:tailEnd type="none" w="sm" len="sm"/>
           </a:ln>
         </p:spPr>
       </p:sp>
@@ -2820,9 +2942,13 @@
             <a:ext cx="1081625" cy="1499896"/>
           </a:xfrm>
           <a:custGeom>
-            <a:rect b="b" l="l" r="r" t="t"/>
+            <a:avLst/>
+            <a:gdLst/>
+            <a:ahLst/>
+            <a:cxnLst/>
+            <a:rect l="l" t="t" r="r" b="b"/>
             <a:pathLst>
-              <a:path extrusionOk="0" h="44998" w="43265">
+              <a:path w="43265" h="44998" extrusionOk="0">
                 <a:moveTo>
                   <a:pt x="0" y="44998"/>
                 </a:moveTo>
@@ -2836,21 +2962,23 @@
             </a:pathLst>
           </a:custGeom>
           <a:noFill/>
-          <a:ln cap="flat" cmpd="sng" w="28575">
+          <a:ln w="28575" cap="flat" cmpd="sng">
             <a:solidFill>
               <a:schemeClr val="lt2"/>
             </a:solidFill>
             <a:prstDash val="solid"/>
             <a:miter lim="8000"/>
-            <a:headEnd len="sm" w="sm" type="none"/>
-            <a:tailEnd len="sm" w="sm" type="none"/>
+            <a:headEnd type="none" w="sm" len="sm"/>
+            <a:tailEnd type="none" w="sm" len="sm"/>
           </a:ln>
         </p:spPr>
       </p:sp>
       <p:sp>
         <p:nvSpPr>
           <p:cNvPr id="12" name="Google Shape;12;g31dd249a56a_0_182"/>
-          <p:cNvSpPr txBox="1"/>
+          <p:cNvSpPr txBox="1">
+            <a:spLocks noGrp="1"/>
+          </p:cNvSpPr>
           <p:nvPr>
             <p:ph type="ctrTitle"/>
           </p:nvPr>
@@ -2865,7 +2993,7 @@
           </a:prstGeom>
         </p:spPr>
         <p:txBody>
-          <a:bodyPr anchorCtr="0" anchor="b" bIns="91425" lIns="91425" spcFirstLastPara="1" rIns="91425" wrap="square" tIns="91425">
+          <a:bodyPr spcFirstLastPara="1" wrap="square" lIns="91425" tIns="91425" rIns="91425" bIns="91425" anchor="b" anchorCtr="0">
             <a:normAutofit/>
           </a:bodyPr>
           <a:lstStyle>
@@ -2969,15 +3097,19 @@
               <a:defRPr/>
             </a:lvl9pPr>
           </a:lstStyle>
-          <a:p/>
+          <a:p>
+            <a:endParaRPr/>
+          </a:p>
         </p:txBody>
       </p:sp>
       <p:sp>
         <p:nvSpPr>
           <p:cNvPr id="13" name="Google Shape;13;g31dd249a56a_0_182"/>
-          <p:cNvSpPr txBox="1"/>
+          <p:cNvSpPr txBox="1">
+            <a:spLocks noGrp="1"/>
+          </p:cNvSpPr>
           <p:nvPr>
-            <p:ph idx="1" type="subTitle"/>
+            <p:ph type="subTitle" idx="1"/>
           </p:nvPr>
         </p:nvSpPr>
         <p:spPr>
@@ -2990,7 +3122,7 @@
           </a:prstGeom>
         </p:spPr>
         <p:txBody>
-          <a:bodyPr anchorCtr="0" anchor="t" bIns="91425" lIns="91425" spcFirstLastPara="1" rIns="91425" wrap="square" tIns="91425">
+          <a:bodyPr spcFirstLastPara="1" wrap="square" lIns="91425" tIns="91425" rIns="91425" bIns="91425" anchor="t" anchorCtr="0">
             <a:normAutofit/>
           </a:bodyPr>
           <a:lstStyle>
@@ -3175,15 +3307,19 @@
               </a:defRPr>
             </a:lvl9pPr>
           </a:lstStyle>
-          <a:p/>
+          <a:p>
+            <a:endParaRPr/>
+          </a:p>
         </p:txBody>
       </p:sp>
       <p:sp>
         <p:nvSpPr>
           <p:cNvPr id="14" name="Google Shape;14;g31dd249a56a_0_182"/>
-          <p:cNvSpPr txBox="1"/>
+          <p:cNvSpPr txBox="1">
+            <a:spLocks noGrp="1"/>
+          </p:cNvSpPr>
           <p:nvPr>
-            <p:ph idx="12" type="sldNum"/>
+            <p:ph type="sldNum" idx="12"/>
           </p:nvPr>
         </p:nvSpPr>
         <p:spPr>
@@ -3196,7 +3332,7 @@
           </a:prstGeom>
         </p:spPr>
         <p:txBody>
-          <a:bodyPr anchorCtr="0" anchor="ctr" bIns="91425" lIns="91425" spcFirstLastPara="1" rIns="91425" wrap="square" tIns="91425">
+          <a:bodyPr spcFirstLastPara="1" wrap="square" lIns="91425" tIns="91425" rIns="91425" bIns="91425" anchor="ctr" anchorCtr="0">
             <a:normAutofit/>
           </a:bodyPr>
           <a:lstStyle>
@@ -3238,7 +3374,7 @@
             </a:lvl9pPr>
           </a:lstStyle>
           <a:p>
-            <a:pPr indent="0" lvl="0" marL="0" rtl="0" algn="r">
+            <a:pPr marL="0" lvl="0" indent="0" algn="r" rtl="0">
               <a:spcBef>
                 <a:spcPts val="0"/>
               </a:spcBef>
@@ -3264,11 +3400,11 @@
 </file>
 
 <file path=ppt/slideLayouts/slideLayout10.xml><?xml version="1.0" encoding="utf-8"?>
-<p:sldLayout xmlns:a="http://schemas.openxmlformats.org/drawingml/2006/main" xmlns:r="http://schemas.openxmlformats.org/officeDocument/2006/relationships" xmlns:mc="http://schemas.openxmlformats.org/markup-compatibility/2006" xmlns:mv="urn:schemas-microsoft-com:mac:vml" xmlns:p="http://schemas.openxmlformats.org/presentationml/2006/main" xmlns:c="http://schemas.openxmlformats.org/drawingml/2006/chart" xmlns:dgm="http://schemas.openxmlformats.org/drawingml/2006/diagram" xmlns:o="urn:schemas-microsoft-com:office:office" xmlns:v="urn:schemas-microsoft-com:vml" xmlns:pvml="urn:schemas-microsoft-com:office:powerpoint" xmlns:com="http://schemas.openxmlformats.org/drawingml/2006/compatibility" xmlns:p14="http://schemas.microsoft.com/office/powerpoint/2010/main" xmlns:p15="http://schemas.microsoft.com/office/powerpoint/2012/main" xmlns:ahyp="http://schemas.microsoft.com/office/drawing/2018/hyperlinkcolor" matchingName="Big number">
+<p:sldLayout xmlns:a="http://schemas.openxmlformats.org/drawingml/2006/main" xmlns:r="http://schemas.openxmlformats.org/officeDocument/2006/relationships" xmlns:p="http://schemas.openxmlformats.org/presentationml/2006/main" matchingName="Big number">
   <p:cSld name="BIG_NUMBER">
     <p:spTree>
       <p:nvGrpSpPr>
-        <p:cNvPr id="51" name="Shape 51"/>
+        <p:cNvPr id="1" name="Shape 51"/>
         <p:cNvGrpSpPr/>
         <p:nvPr/>
       </p:nvGrpSpPr>
@@ -3302,12 +3438,12 @@
           </a:ln>
         </p:spPr>
         <p:txBody>
-          <a:bodyPr anchorCtr="0" anchor="ctr" bIns="91425" lIns="91425" spcFirstLastPara="1" rIns="91425" wrap="square" tIns="91425">
+          <a:bodyPr spcFirstLastPara="1" wrap="square" lIns="91425" tIns="91425" rIns="91425" bIns="91425" anchor="ctr" anchorCtr="0">
             <a:noAutofit/>
           </a:bodyPr>
           <a:lstStyle/>
           <a:p>
-            <a:pPr indent="0" lvl="0" marL="0" rtl="0" algn="l">
+            <a:pPr marL="0" lvl="0" indent="0" algn="l" rtl="0">
               <a:spcBef>
                 <a:spcPts val="0"/>
               </a:spcBef>
@@ -3316,9 +3452,6 @@
               </a:spcAft>
               <a:buNone/>
             </a:pPr>
-            <a:r>
-              <a:t/>
-            </a:r>
             <a:endParaRPr/>
           </a:p>
         </p:txBody>
@@ -3326,9 +3459,11 @@
       <p:sp>
         <p:nvSpPr>
           <p:cNvPr id="53" name="Google Shape;53;g31dd249a56a_0_224"/>
-          <p:cNvSpPr txBox="1"/>
+          <p:cNvSpPr txBox="1">
+            <a:spLocks noGrp="1"/>
+          </p:cNvSpPr>
           <p:nvPr>
-            <p:ph hasCustomPrompt="1" type="title"/>
+            <p:ph type="title" hasCustomPrompt="1"/>
           </p:nvPr>
         </p:nvSpPr>
         <p:spPr>
@@ -3341,7 +3476,7 @@
           </a:prstGeom>
         </p:spPr>
         <p:txBody>
-          <a:bodyPr anchorCtr="0" anchor="ctr" bIns="91425" lIns="91425" spcFirstLastPara="1" rIns="91425" wrap="square" tIns="91425">
+          <a:bodyPr spcFirstLastPara="1" wrap="square" lIns="91425" tIns="91425" rIns="91425" bIns="91425" anchor="ctr" anchorCtr="0">
             <a:normAutofit/>
           </a:bodyPr>
           <a:lstStyle>
@@ -3518,9 +3653,11 @@
       <p:sp>
         <p:nvSpPr>
           <p:cNvPr id="54" name="Google Shape;54;g31dd249a56a_0_224"/>
-          <p:cNvSpPr txBox="1"/>
+          <p:cNvSpPr txBox="1">
+            <a:spLocks noGrp="1"/>
+          </p:cNvSpPr>
           <p:nvPr>
-            <p:ph idx="1" type="body"/>
+            <p:ph type="body" idx="1"/>
           </p:nvPr>
         </p:nvSpPr>
         <p:spPr>
@@ -3533,11 +3670,11 @@
           </a:prstGeom>
         </p:spPr>
         <p:txBody>
-          <a:bodyPr anchorCtr="0" anchor="t" bIns="91425" lIns="91425" spcFirstLastPara="1" rIns="91425" wrap="square" tIns="91425">
+          <a:bodyPr spcFirstLastPara="1" wrap="square" lIns="91425" tIns="91425" rIns="91425" bIns="91425" anchor="t" anchorCtr="0">
             <a:normAutofit/>
           </a:bodyPr>
           <a:lstStyle>
-            <a:lvl1pPr indent="-342900" lvl="0" marL="457200" algn="ctr">
+            <a:lvl1pPr marL="457200" lvl="0" indent="-342900" algn="ctr">
               <a:spcBef>
                 <a:spcPts val="0"/>
               </a:spcBef>
@@ -3548,7 +3685,7 @@
               <a:buChar char="●"/>
               <a:defRPr/>
             </a:lvl1pPr>
-            <a:lvl2pPr indent="-317500" lvl="1" marL="914400" algn="ctr">
+            <a:lvl2pPr marL="914400" lvl="1" indent="-317500" algn="ctr">
               <a:spcBef>
                 <a:spcPts val="0"/>
               </a:spcBef>
@@ -3559,7 +3696,7 @@
               <a:buChar char="○"/>
               <a:defRPr/>
             </a:lvl2pPr>
-            <a:lvl3pPr indent="-317500" lvl="2" marL="1371600" algn="ctr">
+            <a:lvl3pPr marL="1371600" lvl="2" indent="-317500" algn="ctr">
               <a:spcBef>
                 <a:spcPts val="0"/>
               </a:spcBef>
@@ -3570,7 +3707,7 @@
               <a:buChar char="■"/>
               <a:defRPr/>
             </a:lvl3pPr>
-            <a:lvl4pPr indent="-317500" lvl="3" marL="1828800" algn="ctr">
+            <a:lvl4pPr marL="1828800" lvl="3" indent="-317500" algn="ctr">
               <a:spcBef>
                 <a:spcPts val="0"/>
               </a:spcBef>
@@ -3581,7 +3718,7 @@
               <a:buChar char="●"/>
               <a:defRPr/>
             </a:lvl4pPr>
-            <a:lvl5pPr indent="-317500" lvl="4" marL="2286000" algn="ctr">
+            <a:lvl5pPr marL="2286000" lvl="4" indent="-317500" algn="ctr">
               <a:spcBef>
                 <a:spcPts val="0"/>
               </a:spcBef>
@@ -3592,7 +3729,7 @@
               <a:buChar char="○"/>
               <a:defRPr/>
             </a:lvl5pPr>
-            <a:lvl6pPr indent="-317500" lvl="5" marL="2743200" algn="ctr">
+            <a:lvl6pPr marL="2743200" lvl="5" indent="-317500" algn="ctr">
               <a:spcBef>
                 <a:spcPts val="0"/>
               </a:spcBef>
@@ -3603,7 +3740,7 @@
               <a:buChar char="■"/>
               <a:defRPr/>
             </a:lvl6pPr>
-            <a:lvl7pPr indent="-317500" lvl="6" marL="3200400" algn="ctr">
+            <a:lvl7pPr marL="3200400" lvl="6" indent="-317500" algn="ctr">
               <a:spcBef>
                 <a:spcPts val="0"/>
               </a:spcBef>
@@ -3614,7 +3751,7 @@
               <a:buChar char="●"/>
               <a:defRPr/>
             </a:lvl7pPr>
-            <a:lvl8pPr indent="-317500" lvl="7" marL="3657600" algn="ctr">
+            <a:lvl8pPr marL="3657600" lvl="7" indent="-317500" algn="ctr">
               <a:spcBef>
                 <a:spcPts val="0"/>
               </a:spcBef>
@@ -3625,7 +3762,7 @@
               <a:buChar char="○"/>
               <a:defRPr/>
             </a:lvl8pPr>
-            <a:lvl9pPr indent="-317500" lvl="8" marL="4114800" algn="ctr">
+            <a:lvl9pPr marL="4114800" lvl="8" indent="-317500" algn="ctr">
               <a:spcBef>
                 <a:spcPts val="0"/>
               </a:spcBef>
@@ -3637,15 +3774,19 @@
               <a:defRPr/>
             </a:lvl9pPr>
           </a:lstStyle>
-          <a:p/>
+          <a:p>
+            <a:endParaRPr/>
+          </a:p>
         </p:txBody>
       </p:sp>
       <p:sp>
         <p:nvSpPr>
           <p:cNvPr id="55" name="Google Shape;55;g31dd249a56a_0_224"/>
-          <p:cNvSpPr txBox="1"/>
+          <p:cNvSpPr txBox="1">
+            <a:spLocks noGrp="1"/>
+          </p:cNvSpPr>
           <p:nvPr>
-            <p:ph idx="12" type="sldNum"/>
+            <p:ph type="sldNum" idx="12"/>
           </p:nvPr>
         </p:nvSpPr>
         <p:spPr>
@@ -3658,7 +3799,7 @@
           </a:prstGeom>
         </p:spPr>
         <p:txBody>
-          <a:bodyPr anchorCtr="0" anchor="ctr" bIns="91425" lIns="91425" spcFirstLastPara="1" rIns="91425" wrap="square" tIns="91425">
+          <a:bodyPr spcFirstLastPara="1" wrap="square" lIns="91425" tIns="91425" rIns="91425" bIns="91425" anchor="ctr" anchorCtr="0">
             <a:normAutofit/>
           </a:bodyPr>
           <a:lstStyle>
@@ -3700,7 +3841,7 @@
             </a:lvl9pPr>
           </a:lstStyle>
           <a:p>
-            <a:pPr indent="0" lvl="0" marL="0" rtl="0" algn="r">
+            <a:pPr marL="0" lvl="0" indent="0" algn="r" rtl="0">
               <a:spcBef>
                 <a:spcPts val="0"/>
               </a:spcBef>
@@ -3726,11 +3867,11 @@
 </file>
 
 <file path=ppt/slideLayouts/slideLayout11.xml><?xml version="1.0" encoding="utf-8"?>
-<p:sldLayout xmlns:a="http://schemas.openxmlformats.org/drawingml/2006/main" xmlns:r="http://schemas.openxmlformats.org/officeDocument/2006/relationships" xmlns:mc="http://schemas.openxmlformats.org/markup-compatibility/2006" xmlns:mv="urn:schemas-microsoft-com:mac:vml" xmlns:p="http://schemas.openxmlformats.org/presentationml/2006/main" xmlns:c="http://schemas.openxmlformats.org/drawingml/2006/chart" xmlns:dgm="http://schemas.openxmlformats.org/drawingml/2006/diagram" xmlns:o="urn:schemas-microsoft-com:office:office" xmlns:v="urn:schemas-microsoft-com:vml" xmlns:pvml="urn:schemas-microsoft-com:office:powerpoint" xmlns:com="http://schemas.openxmlformats.org/drawingml/2006/compatibility" xmlns:p14="http://schemas.microsoft.com/office/powerpoint/2010/main" xmlns:p15="http://schemas.microsoft.com/office/powerpoint/2012/main" xmlns:ahyp="http://schemas.microsoft.com/office/drawing/2018/hyperlinkcolor" matchingName="Blank" type="blank">
+<p:sldLayout xmlns:a="http://schemas.openxmlformats.org/drawingml/2006/main" xmlns:r="http://schemas.openxmlformats.org/officeDocument/2006/relationships" xmlns:p="http://schemas.openxmlformats.org/presentationml/2006/main" matchingName="Blank" type="blank">
   <p:cSld name="BLANK">
     <p:spTree>
       <p:nvGrpSpPr>
-        <p:cNvPr id="56" name="Shape 56"/>
+        <p:cNvPr id="1" name="Shape 56"/>
         <p:cNvGrpSpPr/>
         <p:nvPr/>
       </p:nvGrpSpPr>
@@ -3745,9 +3886,11 @@
       <p:sp>
         <p:nvSpPr>
           <p:cNvPr id="57" name="Google Shape;57;g31dd249a56a_0_229"/>
-          <p:cNvSpPr txBox="1"/>
+          <p:cNvSpPr txBox="1">
+            <a:spLocks noGrp="1"/>
+          </p:cNvSpPr>
           <p:nvPr>
-            <p:ph idx="12" type="sldNum"/>
+            <p:ph type="sldNum" idx="12"/>
           </p:nvPr>
         </p:nvSpPr>
         <p:spPr>
@@ -3760,7 +3903,7 @@
           </a:prstGeom>
         </p:spPr>
         <p:txBody>
-          <a:bodyPr anchorCtr="0" anchor="ctr" bIns="91425" lIns="91425" spcFirstLastPara="1" rIns="91425" wrap="square" tIns="91425">
+          <a:bodyPr spcFirstLastPara="1" wrap="square" lIns="91425" tIns="91425" rIns="91425" bIns="91425" anchor="ctr" anchorCtr="0">
             <a:normAutofit/>
           </a:bodyPr>
           <a:lstStyle>
@@ -3802,7 +3945,7 @@
             </a:lvl9pPr>
           </a:lstStyle>
           <a:p>
-            <a:pPr indent="0" lvl="0" marL="0" rtl="0" algn="r">
+            <a:pPr marL="0" lvl="0" indent="0" algn="r" rtl="0">
               <a:spcBef>
                 <a:spcPts val="0"/>
               </a:spcBef>
@@ -3828,11 +3971,11 @@
 </file>
 
 <file path=ppt/slideLayouts/slideLayout12.xml><?xml version="1.0" encoding="utf-8"?>
-<p:sldLayout xmlns:a="http://schemas.openxmlformats.org/drawingml/2006/main" xmlns:r="http://schemas.openxmlformats.org/officeDocument/2006/relationships" xmlns:mc="http://schemas.openxmlformats.org/markup-compatibility/2006" xmlns:mv="urn:schemas-microsoft-com:mac:vml" xmlns:p="http://schemas.openxmlformats.org/presentationml/2006/main" xmlns:c="http://schemas.openxmlformats.org/drawingml/2006/chart" xmlns:dgm="http://schemas.openxmlformats.org/drawingml/2006/diagram" xmlns:o="urn:schemas-microsoft-com:office:office" xmlns:v="urn:schemas-microsoft-com:vml" xmlns:pvml="urn:schemas-microsoft-com:office:powerpoint" xmlns:com="http://schemas.openxmlformats.org/drawingml/2006/compatibility" xmlns:p14="http://schemas.microsoft.com/office/powerpoint/2010/main" xmlns:p15="http://schemas.microsoft.com/office/powerpoint/2012/main" xmlns:ahyp="http://schemas.microsoft.com/office/drawing/2018/hyperlinkcolor" matchingName="Title and Content" type="obj">
+<p:sldLayout xmlns:a="http://schemas.openxmlformats.org/drawingml/2006/main" xmlns:r="http://schemas.openxmlformats.org/officeDocument/2006/relationships" xmlns:p="http://schemas.openxmlformats.org/presentationml/2006/main" matchingName="Title and Content" type="obj">
   <p:cSld name="OBJECT">
     <p:spTree>
       <p:nvGrpSpPr>
-        <p:cNvPr id="58" name="Shape 58"/>
+        <p:cNvPr id="1" name="Shape 58"/>
         <p:cNvGrpSpPr/>
         <p:nvPr/>
       </p:nvGrpSpPr>
@@ -3847,7 +3990,9 @@
       <p:sp>
         <p:nvSpPr>
           <p:cNvPr id="59" name="Google Shape;59;g31dd249a56a_0_231"/>
-          <p:cNvSpPr txBox="1"/>
+          <p:cNvSpPr txBox="1">
+            <a:spLocks noGrp="1"/>
+          </p:cNvSpPr>
           <p:nvPr>
             <p:ph type="title"/>
           </p:nvPr>
@@ -3866,7 +4011,7 @@
           </a:ln>
         </p:spPr>
         <p:txBody>
-          <a:bodyPr anchorCtr="0" anchor="ctr" bIns="45700" lIns="91425" spcFirstLastPara="1" rIns="91425" wrap="square" tIns="45700">
+          <a:bodyPr spcFirstLastPara="1" wrap="square" lIns="91425" tIns="45700" rIns="91425" bIns="45700" anchor="ctr" anchorCtr="0">
             <a:normAutofit/>
           </a:bodyPr>
           <a:lstStyle>
@@ -3973,15 +4118,19 @@
               <a:defRPr/>
             </a:lvl9pPr>
           </a:lstStyle>
-          <a:p/>
+          <a:p>
+            <a:endParaRPr/>
+          </a:p>
         </p:txBody>
       </p:sp>
       <p:sp>
         <p:nvSpPr>
           <p:cNvPr id="60" name="Google Shape;60;g31dd249a56a_0_231"/>
-          <p:cNvSpPr txBox="1"/>
+          <p:cNvSpPr txBox="1">
+            <a:spLocks noGrp="1"/>
+          </p:cNvSpPr>
           <p:nvPr>
-            <p:ph idx="1" type="body"/>
+            <p:ph type="body" idx="1"/>
           </p:nvPr>
         </p:nvSpPr>
         <p:spPr>
@@ -3998,11 +4147,11 @@
           </a:ln>
         </p:spPr>
         <p:txBody>
-          <a:bodyPr anchorCtr="0" anchor="t" bIns="45700" lIns="91425" spcFirstLastPara="1" rIns="91425" wrap="square" tIns="45700">
+          <a:bodyPr spcFirstLastPara="1" wrap="square" lIns="91425" tIns="45700" rIns="91425" bIns="45700" anchor="t" anchorCtr="0">
             <a:normAutofit/>
           </a:bodyPr>
           <a:lstStyle>
-            <a:lvl1pPr indent="-342900" lvl="0" marL="457200" algn="l">
+            <a:lvl1pPr marL="457200" lvl="0" indent="-342900" algn="l">
               <a:spcBef>
                 <a:spcPts val="360"/>
               </a:spcBef>
@@ -4016,7 +4165,7 @@
               <a:buChar char="●"/>
               <a:defRPr/>
             </a:lvl1pPr>
-            <a:lvl2pPr indent="-342900" lvl="1" marL="914400" algn="l">
+            <a:lvl2pPr marL="914400" lvl="1" indent="-342900" algn="l">
               <a:spcBef>
                 <a:spcPts val="1200"/>
               </a:spcBef>
@@ -4030,7 +4179,7 @@
               <a:buChar char="○"/>
               <a:defRPr/>
             </a:lvl2pPr>
-            <a:lvl3pPr indent="-342900" lvl="2" marL="1371600" algn="l">
+            <a:lvl3pPr marL="1371600" lvl="2" indent="-342900" algn="l">
               <a:spcBef>
                 <a:spcPts val="1200"/>
               </a:spcBef>
@@ -4044,7 +4193,7 @@
               <a:buChar char="■"/>
               <a:defRPr/>
             </a:lvl3pPr>
-            <a:lvl4pPr indent="-342900" lvl="3" marL="1828800" algn="l">
+            <a:lvl4pPr marL="1828800" lvl="3" indent="-342900" algn="l">
               <a:spcBef>
                 <a:spcPts val="1200"/>
               </a:spcBef>
@@ -4058,7 +4207,7 @@
               <a:buChar char="●"/>
               <a:defRPr/>
             </a:lvl4pPr>
-            <a:lvl5pPr indent="-342900" lvl="4" marL="2286000" algn="l">
+            <a:lvl5pPr marL="2286000" lvl="4" indent="-342900" algn="l">
               <a:spcBef>
                 <a:spcPts val="1200"/>
               </a:spcBef>
@@ -4072,7 +4221,7 @@
               <a:buChar char="○"/>
               <a:defRPr/>
             </a:lvl5pPr>
-            <a:lvl6pPr indent="-342900" lvl="5" marL="2743200" algn="l">
+            <a:lvl6pPr marL="2743200" lvl="5" indent="-342900" algn="l">
               <a:spcBef>
                 <a:spcPts val="1200"/>
               </a:spcBef>
@@ -4086,7 +4235,7 @@
               <a:buChar char="■"/>
               <a:defRPr/>
             </a:lvl6pPr>
-            <a:lvl7pPr indent="-342900" lvl="6" marL="3200400" algn="l">
+            <a:lvl7pPr marL="3200400" lvl="6" indent="-342900" algn="l">
               <a:spcBef>
                 <a:spcPts val="1200"/>
               </a:spcBef>
@@ -4100,7 +4249,7 @@
               <a:buChar char="●"/>
               <a:defRPr/>
             </a:lvl7pPr>
-            <a:lvl8pPr indent="-342900" lvl="7" marL="3657600" algn="l">
+            <a:lvl8pPr marL="3657600" lvl="7" indent="-342900" algn="l">
               <a:spcBef>
                 <a:spcPts val="1200"/>
               </a:spcBef>
@@ -4114,7 +4263,7 @@
               <a:buChar char="○"/>
               <a:defRPr/>
             </a:lvl8pPr>
-            <a:lvl9pPr indent="-342900" lvl="8" marL="4114800" algn="l">
+            <a:lvl9pPr marL="4114800" lvl="8" indent="-342900" algn="l">
               <a:spcBef>
                 <a:spcPts val="1200"/>
               </a:spcBef>
@@ -4129,15 +4278,19 @@
               <a:defRPr/>
             </a:lvl9pPr>
           </a:lstStyle>
-          <a:p/>
+          <a:p>
+            <a:endParaRPr/>
+          </a:p>
         </p:txBody>
       </p:sp>
       <p:sp>
         <p:nvSpPr>
           <p:cNvPr id="61" name="Google Shape;61;g31dd249a56a_0_231"/>
-          <p:cNvSpPr txBox="1"/>
+          <p:cNvSpPr txBox="1">
+            <a:spLocks noGrp="1"/>
+          </p:cNvSpPr>
           <p:nvPr>
-            <p:ph idx="10" type="dt"/>
+            <p:ph type="dt" idx="10"/>
           </p:nvPr>
         </p:nvSpPr>
         <p:spPr>
@@ -4154,7 +4307,7 @@
           </a:ln>
         </p:spPr>
         <p:txBody>
-          <a:bodyPr anchorCtr="0" anchor="ctr" bIns="45700" lIns="91425" spcFirstLastPara="1" rIns="91425" wrap="square" tIns="45700">
+          <a:bodyPr spcFirstLastPara="1" wrap="square" lIns="91425" tIns="45700" rIns="91425" bIns="45700" anchor="ctr" anchorCtr="0">
             <a:noAutofit/>
           </a:bodyPr>
           <a:lstStyle>
@@ -4258,15 +4411,19 @@
               <a:defRPr/>
             </a:lvl9pPr>
           </a:lstStyle>
-          <a:p/>
+          <a:p>
+            <a:endParaRPr/>
+          </a:p>
         </p:txBody>
       </p:sp>
       <p:sp>
         <p:nvSpPr>
           <p:cNvPr id="62" name="Google Shape;62;g31dd249a56a_0_231"/>
-          <p:cNvSpPr txBox="1"/>
+          <p:cNvSpPr txBox="1">
+            <a:spLocks noGrp="1"/>
+          </p:cNvSpPr>
           <p:nvPr>
-            <p:ph idx="11" type="ftr"/>
+            <p:ph type="ftr" idx="11"/>
           </p:nvPr>
         </p:nvSpPr>
         <p:spPr>
@@ -4283,7 +4440,7 @@
           </a:ln>
         </p:spPr>
         <p:txBody>
-          <a:bodyPr anchorCtr="0" anchor="ctr" bIns="45700" lIns="91425" spcFirstLastPara="1" rIns="91425" wrap="square" tIns="45700">
+          <a:bodyPr spcFirstLastPara="1" wrap="square" lIns="91425" tIns="45700" rIns="91425" bIns="45700" anchor="ctr" anchorCtr="0">
             <a:noAutofit/>
           </a:bodyPr>
           <a:lstStyle>
@@ -4387,15 +4544,19 @@
               <a:defRPr/>
             </a:lvl9pPr>
           </a:lstStyle>
-          <a:p/>
+          <a:p>
+            <a:endParaRPr/>
+          </a:p>
         </p:txBody>
       </p:sp>
       <p:sp>
         <p:nvSpPr>
           <p:cNvPr id="63" name="Google Shape;63;g31dd249a56a_0_231"/>
-          <p:cNvSpPr txBox="1"/>
+          <p:cNvSpPr txBox="1">
+            <a:spLocks noGrp="1"/>
+          </p:cNvSpPr>
           <p:nvPr>
-            <p:ph idx="12" type="sldNum"/>
+            <p:ph type="sldNum" idx="12"/>
           </p:nvPr>
         </p:nvSpPr>
         <p:spPr>
@@ -4412,67 +4573,67 @@
           </a:ln>
         </p:spPr>
         <p:txBody>
-          <a:bodyPr anchorCtr="0" anchor="ctr" bIns="45700" lIns="91425" spcFirstLastPara="1" rIns="91425" wrap="square" tIns="45700">
+          <a:bodyPr spcFirstLastPara="1" wrap="square" lIns="91425" tIns="45700" rIns="91425" bIns="45700" anchor="ctr" anchorCtr="0">
             <a:normAutofit/>
           </a:bodyPr>
           <a:lstStyle>
-            <a:lvl1pPr indent="0" lvl="0" marL="0" algn="r">
+            <a:lvl1pPr marL="0" lvl="0" indent="0" algn="r">
               <a:spcBef>
                 <a:spcPts val="0"/>
               </a:spcBef>
               <a:buNone/>
               <a:defRPr/>
             </a:lvl1pPr>
-            <a:lvl2pPr indent="0" lvl="1" marL="0" algn="r">
+            <a:lvl2pPr marL="0" lvl="1" indent="0" algn="r">
               <a:spcBef>
                 <a:spcPts val="0"/>
               </a:spcBef>
               <a:buNone/>
               <a:defRPr/>
             </a:lvl2pPr>
-            <a:lvl3pPr indent="0" lvl="2" marL="0" algn="r">
+            <a:lvl3pPr marL="0" lvl="2" indent="0" algn="r">
               <a:spcBef>
                 <a:spcPts val="0"/>
               </a:spcBef>
               <a:buNone/>
               <a:defRPr/>
             </a:lvl3pPr>
-            <a:lvl4pPr indent="0" lvl="3" marL="0" algn="r">
+            <a:lvl4pPr marL="0" lvl="3" indent="0" algn="r">
               <a:spcBef>
                 <a:spcPts val="0"/>
               </a:spcBef>
               <a:buNone/>
               <a:defRPr/>
             </a:lvl4pPr>
-            <a:lvl5pPr indent="0" lvl="4" marL="0" algn="r">
+            <a:lvl5pPr marL="0" lvl="4" indent="0" algn="r">
               <a:spcBef>
                 <a:spcPts val="0"/>
               </a:spcBef>
               <a:buNone/>
               <a:defRPr/>
             </a:lvl5pPr>
-            <a:lvl6pPr indent="0" lvl="5" marL="0" algn="r">
+            <a:lvl6pPr marL="0" lvl="5" indent="0" algn="r">
               <a:spcBef>
                 <a:spcPts val="0"/>
               </a:spcBef>
               <a:buNone/>
               <a:defRPr/>
             </a:lvl6pPr>
-            <a:lvl7pPr indent="0" lvl="6" marL="0" algn="r">
+            <a:lvl7pPr marL="0" lvl="6" indent="0" algn="r">
               <a:spcBef>
                 <a:spcPts val="0"/>
               </a:spcBef>
               <a:buNone/>
               <a:defRPr/>
             </a:lvl7pPr>
-            <a:lvl8pPr indent="0" lvl="7" marL="0" algn="r">
+            <a:lvl8pPr marL="0" lvl="7" indent="0" algn="r">
               <a:spcBef>
                 <a:spcPts val="0"/>
               </a:spcBef>
               <a:buNone/>
               <a:defRPr/>
             </a:lvl8pPr>
-            <a:lvl9pPr indent="0" lvl="8" marL="0" algn="r">
+            <a:lvl9pPr marL="0" lvl="8" indent="0" algn="r">
               <a:spcBef>
                 <a:spcPts val="0"/>
               </a:spcBef>
@@ -4481,7 +4642,7 @@
             </a:lvl9pPr>
           </a:lstStyle>
           <a:p>
-            <a:pPr indent="0" lvl="0" marL="0" rtl="0" algn="r">
+            <a:pPr marL="0" lvl="0" indent="0" algn="r" rtl="0">
               <a:spcBef>
                 <a:spcPts val="0"/>
               </a:spcBef>
@@ -4507,11 +4668,11 @@
 </file>
 
 <file path=ppt/slideLayouts/slideLayout2.xml><?xml version="1.0" encoding="utf-8"?>
-<p:sldLayout xmlns:a="http://schemas.openxmlformats.org/drawingml/2006/main" xmlns:r="http://schemas.openxmlformats.org/officeDocument/2006/relationships" xmlns:mc="http://schemas.openxmlformats.org/markup-compatibility/2006" xmlns:mv="urn:schemas-microsoft-com:mac:vml" xmlns:p="http://schemas.openxmlformats.org/presentationml/2006/main" xmlns:c="http://schemas.openxmlformats.org/drawingml/2006/chart" xmlns:dgm="http://schemas.openxmlformats.org/drawingml/2006/diagram" xmlns:o="urn:schemas-microsoft-com:office:office" xmlns:v="urn:schemas-microsoft-com:vml" xmlns:pvml="urn:schemas-microsoft-com:office:powerpoint" xmlns:com="http://schemas.openxmlformats.org/drawingml/2006/compatibility" xmlns:p14="http://schemas.microsoft.com/office/powerpoint/2010/main" xmlns:p15="http://schemas.microsoft.com/office/powerpoint/2012/main" xmlns:ahyp="http://schemas.microsoft.com/office/drawing/2018/hyperlinkcolor" matchingName="Section header" type="secHead">
+<p:sldLayout xmlns:a="http://schemas.openxmlformats.org/drawingml/2006/main" xmlns:r="http://schemas.openxmlformats.org/officeDocument/2006/relationships" xmlns:p="http://schemas.openxmlformats.org/presentationml/2006/main" matchingName="Section header" type="secHead">
   <p:cSld name="SECTION_HEADER">
     <p:spTree>
       <p:nvGrpSpPr>
-        <p:cNvPr id="15" name="Shape 15"/>
+        <p:cNvPr id="1" name="Shape 15"/>
         <p:cNvGrpSpPr/>
         <p:nvPr/>
       </p:nvGrpSpPr>
@@ -4535,9 +4696,13 @@
             <a:ext cx="1081625" cy="1499896"/>
           </a:xfrm>
           <a:custGeom>
-            <a:rect b="b" l="l" r="r" t="t"/>
+            <a:avLst/>
+            <a:gdLst/>
+            <a:ahLst/>
+            <a:cxnLst/>
+            <a:rect l="l" t="t" r="r" b="b"/>
             <a:pathLst>
-              <a:path extrusionOk="0" h="44998" w="43265">
+              <a:path w="43265" h="44998" extrusionOk="0">
                 <a:moveTo>
                   <a:pt x="0" y="44998"/>
                 </a:moveTo>
@@ -4551,14 +4716,14 @@
             </a:pathLst>
           </a:custGeom>
           <a:noFill/>
-          <a:ln cap="flat" cmpd="sng" w="28575">
+          <a:ln w="28575" cap="flat" cmpd="sng">
             <a:solidFill>
               <a:schemeClr val="lt2"/>
             </a:solidFill>
             <a:prstDash val="solid"/>
             <a:miter lim="8000"/>
-            <a:headEnd len="sm" w="sm" type="none"/>
-            <a:tailEnd len="sm" w="sm" type="none"/>
+            <a:headEnd type="none" w="sm" len="sm"/>
+            <a:tailEnd type="none" w="sm" len="sm"/>
           </a:ln>
         </p:spPr>
       </p:sp>
@@ -4569,14 +4734,18 @@
           <p:nvPr/>
         </p:nvSpPr>
         <p:spPr>
-          <a:xfrm flipH="1" rot="10800000">
+          <a:xfrm rot="10800000" flipH="1">
             <a:off x="466425" y="4744471"/>
             <a:ext cx="1081625" cy="1499896"/>
           </a:xfrm>
           <a:custGeom>
-            <a:rect b="b" l="l" r="r" t="t"/>
+            <a:avLst/>
+            <a:gdLst/>
+            <a:ahLst/>
+            <a:cxnLst/>
+            <a:rect l="l" t="t" r="r" b="b"/>
             <a:pathLst>
-              <a:path extrusionOk="0" h="44998" w="43265">
+              <a:path w="43265" h="44998" extrusionOk="0">
                 <a:moveTo>
                   <a:pt x="0" y="44998"/>
                 </a:moveTo>
@@ -4590,21 +4759,23 @@
             </a:pathLst>
           </a:custGeom>
           <a:noFill/>
-          <a:ln cap="flat" cmpd="sng" w="28575">
+          <a:ln w="28575" cap="flat" cmpd="sng">
             <a:solidFill>
               <a:schemeClr val="lt2"/>
             </a:solidFill>
             <a:prstDash val="solid"/>
             <a:miter lim="8000"/>
-            <a:headEnd len="sm" w="sm" type="none"/>
-            <a:tailEnd len="sm" w="sm" type="none"/>
+            <a:headEnd type="none" w="sm" len="sm"/>
+            <a:tailEnd type="none" w="sm" len="sm"/>
           </a:ln>
         </p:spPr>
       </p:sp>
       <p:sp>
         <p:nvSpPr>
           <p:cNvPr id="18" name="Google Shape;18;g31dd249a56a_0_188"/>
-          <p:cNvSpPr txBox="1"/>
+          <p:cNvSpPr txBox="1">
+            <a:spLocks noGrp="1"/>
+          </p:cNvSpPr>
           <p:nvPr>
             <p:ph type="title"/>
           </p:nvPr>
@@ -4619,7 +4790,7 @@
           </a:prstGeom>
         </p:spPr>
         <p:txBody>
-          <a:bodyPr anchorCtr="0" anchor="ctr" bIns="91425" lIns="91425" spcFirstLastPara="1" rIns="91425" wrap="square" tIns="91425">
+          <a:bodyPr spcFirstLastPara="1" wrap="square" lIns="91425" tIns="91425" rIns="91425" bIns="91425" anchor="ctr" anchorCtr="0">
             <a:normAutofit/>
           </a:bodyPr>
           <a:lstStyle>
@@ -4723,15 +4894,19 @@
               <a:defRPr/>
             </a:lvl9pPr>
           </a:lstStyle>
-          <a:p/>
+          <a:p>
+            <a:endParaRPr/>
+          </a:p>
         </p:txBody>
       </p:sp>
       <p:sp>
         <p:nvSpPr>
           <p:cNvPr id="19" name="Google Shape;19;g31dd249a56a_0_188"/>
-          <p:cNvSpPr txBox="1"/>
+          <p:cNvSpPr txBox="1">
+            <a:spLocks noGrp="1"/>
+          </p:cNvSpPr>
           <p:nvPr>
-            <p:ph idx="12" type="sldNum"/>
+            <p:ph type="sldNum" idx="12"/>
           </p:nvPr>
         </p:nvSpPr>
         <p:spPr>
@@ -4744,7 +4919,7 @@
           </a:prstGeom>
         </p:spPr>
         <p:txBody>
-          <a:bodyPr anchorCtr="0" anchor="ctr" bIns="91425" lIns="91425" spcFirstLastPara="1" rIns="91425" wrap="square" tIns="91425">
+          <a:bodyPr spcFirstLastPara="1" wrap="square" lIns="91425" tIns="91425" rIns="91425" bIns="91425" anchor="ctr" anchorCtr="0">
             <a:normAutofit/>
           </a:bodyPr>
           <a:lstStyle>
@@ -4786,7 +4961,7 @@
             </a:lvl9pPr>
           </a:lstStyle>
           <a:p>
-            <a:pPr indent="0" lvl="0" marL="0" rtl="0" algn="r">
+            <a:pPr marL="0" lvl="0" indent="0" algn="r" rtl="0">
               <a:spcBef>
                 <a:spcPts val="0"/>
               </a:spcBef>
@@ -4812,11 +4987,11 @@
 </file>
 
 <file path=ppt/slideLayouts/slideLayout3.xml><?xml version="1.0" encoding="utf-8"?>
-<p:sldLayout xmlns:a="http://schemas.openxmlformats.org/drawingml/2006/main" xmlns:r="http://schemas.openxmlformats.org/officeDocument/2006/relationships" xmlns:mc="http://schemas.openxmlformats.org/markup-compatibility/2006" xmlns:mv="urn:schemas-microsoft-com:mac:vml" xmlns:p="http://schemas.openxmlformats.org/presentationml/2006/main" xmlns:c="http://schemas.openxmlformats.org/drawingml/2006/chart" xmlns:dgm="http://schemas.openxmlformats.org/drawingml/2006/diagram" xmlns:o="urn:schemas-microsoft-com:office:office" xmlns:v="urn:schemas-microsoft-com:vml" xmlns:pvml="urn:schemas-microsoft-com:office:powerpoint" xmlns:com="http://schemas.openxmlformats.org/drawingml/2006/compatibility" xmlns:p14="http://schemas.microsoft.com/office/powerpoint/2010/main" xmlns:p15="http://schemas.microsoft.com/office/powerpoint/2012/main" xmlns:ahyp="http://schemas.microsoft.com/office/drawing/2018/hyperlinkcolor" matchingName="Title and body" type="tx">
+<p:sldLayout xmlns:a="http://schemas.openxmlformats.org/drawingml/2006/main" xmlns:r="http://schemas.openxmlformats.org/officeDocument/2006/relationships" xmlns:p="http://schemas.openxmlformats.org/presentationml/2006/main" matchingName="Title and body" type="tx">
   <p:cSld name="TITLE_AND_BODY">
     <p:spTree>
       <p:nvGrpSpPr>
-        <p:cNvPr id="20" name="Shape 20"/>
+        <p:cNvPr id="1" name="Shape 20"/>
         <p:cNvGrpSpPr/>
         <p:nvPr/>
       </p:nvGrpSpPr>
@@ -4850,12 +5025,12 @@
           </a:ln>
         </p:spPr>
         <p:txBody>
-          <a:bodyPr anchorCtr="0" anchor="ctr" bIns="91425" lIns="91425" spcFirstLastPara="1" rIns="91425" wrap="square" tIns="91425">
+          <a:bodyPr spcFirstLastPara="1" wrap="square" lIns="91425" tIns="91425" rIns="91425" bIns="91425" anchor="ctr" anchorCtr="0">
             <a:noAutofit/>
           </a:bodyPr>
           <a:lstStyle/>
           <a:p>
-            <a:pPr indent="0" lvl="0" marL="0" rtl="0" algn="l">
+            <a:pPr marL="0" lvl="0" indent="0" algn="l" rtl="0">
               <a:spcBef>
                 <a:spcPts val="0"/>
               </a:spcBef>
@@ -4864,9 +5039,6 @@
               </a:spcAft>
               <a:buNone/>
             </a:pPr>
-            <a:r>
-              <a:t/>
-            </a:r>
             <a:endParaRPr/>
           </a:p>
         </p:txBody>
@@ -4874,7 +5046,9 @@
       <p:sp>
         <p:nvSpPr>
           <p:cNvPr id="22" name="Google Shape;22;g31dd249a56a_0_193"/>
-          <p:cNvSpPr txBox="1"/>
+          <p:cNvSpPr txBox="1">
+            <a:spLocks noGrp="1"/>
+          </p:cNvSpPr>
           <p:nvPr>
             <p:ph type="title"/>
           </p:nvPr>
@@ -4889,7 +5063,7 @@
           </a:prstGeom>
         </p:spPr>
         <p:txBody>
-          <a:bodyPr anchorCtr="0" anchor="b" bIns="91425" lIns="91425" spcFirstLastPara="1" rIns="91425" wrap="square" tIns="91425">
+          <a:bodyPr spcFirstLastPara="1" wrap="square" lIns="91425" tIns="91425" rIns="91425" bIns="91425" anchor="b" anchorCtr="0">
             <a:normAutofit/>
           </a:bodyPr>
           <a:lstStyle>
@@ -4993,15 +5167,19 @@
               <a:defRPr/>
             </a:lvl9pPr>
           </a:lstStyle>
-          <a:p/>
+          <a:p>
+            <a:endParaRPr/>
+          </a:p>
         </p:txBody>
       </p:sp>
       <p:sp>
         <p:nvSpPr>
           <p:cNvPr id="23" name="Google Shape;23;g31dd249a56a_0_193"/>
-          <p:cNvSpPr txBox="1"/>
+          <p:cNvSpPr txBox="1">
+            <a:spLocks noGrp="1"/>
+          </p:cNvSpPr>
           <p:nvPr>
-            <p:ph idx="1" type="body"/>
+            <p:ph type="body" idx="1"/>
           </p:nvPr>
         </p:nvSpPr>
         <p:spPr>
@@ -5014,11 +5192,11 @@
           </a:prstGeom>
         </p:spPr>
         <p:txBody>
-          <a:bodyPr anchorCtr="0" anchor="t" bIns="91425" lIns="91425" spcFirstLastPara="1" rIns="91425" wrap="square" tIns="91425">
+          <a:bodyPr spcFirstLastPara="1" wrap="square" lIns="91425" tIns="91425" rIns="91425" bIns="91425" anchor="t" anchorCtr="0">
             <a:normAutofit/>
           </a:bodyPr>
           <a:lstStyle>
-            <a:lvl1pPr indent="-342900" lvl="0" marL="457200">
+            <a:lvl1pPr marL="457200" lvl="0" indent="-342900">
               <a:spcBef>
                 <a:spcPts val="0"/>
               </a:spcBef>
@@ -5029,7 +5207,7 @@
               <a:buChar char="●"/>
               <a:defRPr/>
             </a:lvl1pPr>
-            <a:lvl2pPr indent="-317500" lvl="1" marL="914400">
+            <a:lvl2pPr marL="914400" lvl="1" indent="-317500">
               <a:spcBef>
                 <a:spcPts val="0"/>
               </a:spcBef>
@@ -5040,7 +5218,7 @@
               <a:buChar char="○"/>
               <a:defRPr/>
             </a:lvl2pPr>
-            <a:lvl3pPr indent="-317500" lvl="2" marL="1371600">
+            <a:lvl3pPr marL="1371600" lvl="2" indent="-317500">
               <a:spcBef>
                 <a:spcPts val="0"/>
               </a:spcBef>
@@ -5051,7 +5229,7 @@
               <a:buChar char="■"/>
               <a:defRPr/>
             </a:lvl3pPr>
-            <a:lvl4pPr indent="-317500" lvl="3" marL="1828800">
+            <a:lvl4pPr marL="1828800" lvl="3" indent="-317500">
               <a:spcBef>
                 <a:spcPts val="0"/>
               </a:spcBef>
@@ -5062,7 +5240,7 @@
               <a:buChar char="●"/>
               <a:defRPr/>
             </a:lvl4pPr>
-            <a:lvl5pPr indent="-317500" lvl="4" marL="2286000">
+            <a:lvl5pPr marL="2286000" lvl="4" indent="-317500">
               <a:spcBef>
                 <a:spcPts val="0"/>
               </a:spcBef>
@@ -5073,7 +5251,7 @@
               <a:buChar char="○"/>
               <a:defRPr/>
             </a:lvl5pPr>
-            <a:lvl6pPr indent="-317500" lvl="5" marL="2743200">
+            <a:lvl6pPr marL="2743200" lvl="5" indent="-317500">
               <a:spcBef>
                 <a:spcPts val="0"/>
               </a:spcBef>
@@ -5084,7 +5262,7 @@
               <a:buChar char="■"/>
               <a:defRPr/>
             </a:lvl6pPr>
-            <a:lvl7pPr indent="-317500" lvl="6" marL="3200400">
+            <a:lvl7pPr marL="3200400" lvl="6" indent="-317500">
               <a:spcBef>
                 <a:spcPts val="0"/>
               </a:spcBef>
@@ -5095,7 +5273,7 @@
               <a:buChar char="●"/>
               <a:defRPr/>
             </a:lvl7pPr>
-            <a:lvl8pPr indent="-317500" lvl="7" marL="3657600">
+            <a:lvl8pPr marL="3657600" lvl="7" indent="-317500">
               <a:spcBef>
                 <a:spcPts val="0"/>
               </a:spcBef>
@@ -5106,7 +5284,7 @@
               <a:buChar char="○"/>
               <a:defRPr/>
             </a:lvl8pPr>
-            <a:lvl9pPr indent="-317500" lvl="8" marL="4114800">
+            <a:lvl9pPr marL="4114800" lvl="8" indent="-317500">
               <a:spcBef>
                 <a:spcPts val="0"/>
               </a:spcBef>
@@ -5118,15 +5296,19 @@
               <a:defRPr/>
             </a:lvl9pPr>
           </a:lstStyle>
-          <a:p/>
+          <a:p>
+            <a:endParaRPr/>
+          </a:p>
         </p:txBody>
       </p:sp>
       <p:sp>
         <p:nvSpPr>
           <p:cNvPr id="24" name="Google Shape;24;g31dd249a56a_0_193"/>
-          <p:cNvSpPr txBox="1"/>
+          <p:cNvSpPr txBox="1">
+            <a:spLocks noGrp="1"/>
+          </p:cNvSpPr>
           <p:nvPr>
-            <p:ph idx="12" type="sldNum"/>
+            <p:ph type="sldNum" idx="12"/>
           </p:nvPr>
         </p:nvSpPr>
         <p:spPr>
@@ -5139,7 +5321,7 @@
           </a:prstGeom>
         </p:spPr>
         <p:txBody>
-          <a:bodyPr anchorCtr="0" anchor="ctr" bIns="91425" lIns="91425" spcFirstLastPara="1" rIns="91425" wrap="square" tIns="91425">
+          <a:bodyPr spcFirstLastPara="1" wrap="square" lIns="91425" tIns="91425" rIns="91425" bIns="91425" anchor="ctr" anchorCtr="0">
             <a:normAutofit/>
           </a:bodyPr>
           <a:lstStyle>
@@ -5181,7 +5363,7 @@
             </a:lvl9pPr>
           </a:lstStyle>
           <a:p>
-            <a:pPr indent="0" lvl="0" marL="0" rtl="0" algn="r">
+            <a:pPr marL="0" lvl="0" indent="0" algn="r" rtl="0">
               <a:spcBef>
                 <a:spcPts val="0"/>
               </a:spcBef>
@@ -5207,11 +5389,11 @@
 </file>
 
 <file path=ppt/slideLayouts/slideLayout4.xml><?xml version="1.0" encoding="utf-8"?>
-<p:sldLayout xmlns:a="http://schemas.openxmlformats.org/drawingml/2006/main" xmlns:r="http://schemas.openxmlformats.org/officeDocument/2006/relationships" xmlns:mc="http://schemas.openxmlformats.org/markup-compatibility/2006" xmlns:mv="urn:schemas-microsoft-com:mac:vml" xmlns:p="http://schemas.openxmlformats.org/presentationml/2006/main" xmlns:c="http://schemas.openxmlformats.org/drawingml/2006/chart" xmlns:dgm="http://schemas.openxmlformats.org/drawingml/2006/diagram" xmlns:o="urn:schemas-microsoft-com:office:office" xmlns:v="urn:schemas-microsoft-com:vml" xmlns:pvml="urn:schemas-microsoft-com:office:powerpoint" xmlns:com="http://schemas.openxmlformats.org/drawingml/2006/compatibility" xmlns:p14="http://schemas.microsoft.com/office/powerpoint/2010/main" xmlns:p15="http://schemas.microsoft.com/office/powerpoint/2012/main" xmlns:ahyp="http://schemas.microsoft.com/office/drawing/2018/hyperlinkcolor" matchingName="Title and two columns" type="twoColTx">
+<p:sldLayout xmlns:a="http://schemas.openxmlformats.org/drawingml/2006/main" xmlns:r="http://schemas.openxmlformats.org/officeDocument/2006/relationships" xmlns:p="http://schemas.openxmlformats.org/presentationml/2006/main" matchingName="Title and two columns" type="twoColTx">
   <p:cSld name="TITLE_AND_TWO_COLUMNS">
     <p:spTree>
       <p:nvGrpSpPr>
-        <p:cNvPr id="25" name="Shape 25"/>
+        <p:cNvPr id="1" name="Shape 25"/>
         <p:cNvGrpSpPr/>
         <p:nvPr/>
       </p:nvGrpSpPr>
@@ -5226,7 +5408,9 @@
       <p:sp>
         <p:nvSpPr>
           <p:cNvPr id="26" name="Google Shape;26;g31dd249a56a_0_198"/>
-          <p:cNvSpPr txBox="1"/>
+          <p:cNvSpPr txBox="1">
+            <a:spLocks noGrp="1"/>
+          </p:cNvSpPr>
           <p:nvPr>
             <p:ph type="title"/>
           </p:nvPr>
@@ -5241,7 +5425,7 @@
           </a:prstGeom>
         </p:spPr>
         <p:txBody>
-          <a:bodyPr anchorCtr="0" anchor="b" bIns="91425" lIns="91425" spcFirstLastPara="1" rIns="91425" wrap="square" tIns="91425">
+          <a:bodyPr spcFirstLastPara="1" wrap="square" lIns="91425" tIns="91425" rIns="91425" bIns="91425" anchor="b" anchorCtr="0">
             <a:normAutofit/>
           </a:bodyPr>
           <a:lstStyle>
@@ -5345,15 +5529,19 @@
               <a:defRPr/>
             </a:lvl9pPr>
           </a:lstStyle>
-          <a:p/>
+          <a:p>
+            <a:endParaRPr/>
+          </a:p>
         </p:txBody>
       </p:sp>
       <p:sp>
         <p:nvSpPr>
           <p:cNvPr id="27" name="Google Shape;27;g31dd249a56a_0_198"/>
-          <p:cNvSpPr txBox="1"/>
+          <p:cNvSpPr txBox="1">
+            <a:spLocks noGrp="1"/>
+          </p:cNvSpPr>
           <p:nvPr>
-            <p:ph idx="1" type="body"/>
+            <p:ph type="body" idx="1"/>
           </p:nvPr>
         </p:nvSpPr>
         <p:spPr>
@@ -5366,11 +5554,11 @@
           </a:prstGeom>
         </p:spPr>
         <p:txBody>
-          <a:bodyPr anchorCtr="0" anchor="t" bIns="91425" lIns="91425" spcFirstLastPara="1" rIns="91425" wrap="square" tIns="91425">
+          <a:bodyPr spcFirstLastPara="1" wrap="square" lIns="91425" tIns="91425" rIns="91425" bIns="91425" anchor="t" anchorCtr="0">
             <a:normAutofit/>
           </a:bodyPr>
           <a:lstStyle>
-            <a:lvl1pPr indent="-317500" lvl="0" marL="457200">
+            <a:lvl1pPr marL="457200" lvl="0" indent="-317500">
               <a:spcBef>
                 <a:spcPts val="0"/>
               </a:spcBef>
@@ -5381,7 +5569,7 @@
               <a:buChar char="●"/>
               <a:defRPr sz="1400"/>
             </a:lvl1pPr>
-            <a:lvl2pPr indent="-304800" lvl="1" marL="914400">
+            <a:lvl2pPr marL="914400" lvl="1" indent="-304800">
               <a:spcBef>
                 <a:spcPts val="0"/>
               </a:spcBef>
@@ -5392,7 +5580,7 @@
               <a:buChar char="○"/>
               <a:defRPr sz="1200"/>
             </a:lvl2pPr>
-            <a:lvl3pPr indent="-304800" lvl="2" marL="1371600">
+            <a:lvl3pPr marL="1371600" lvl="2" indent="-304800">
               <a:spcBef>
                 <a:spcPts val="0"/>
               </a:spcBef>
@@ -5403,7 +5591,7 @@
               <a:buChar char="■"/>
               <a:defRPr sz="1200"/>
             </a:lvl3pPr>
-            <a:lvl4pPr indent="-304800" lvl="3" marL="1828800">
+            <a:lvl4pPr marL="1828800" lvl="3" indent="-304800">
               <a:spcBef>
                 <a:spcPts val="0"/>
               </a:spcBef>
@@ -5414,7 +5602,7 @@
               <a:buChar char="●"/>
               <a:defRPr sz="1200"/>
             </a:lvl4pPr>
-            <a:lvl5pPr indent="-304800" lvl="4" marL="2286000">
+            <a:lvl5pPr marL="2286000" lvl="4" indent="-304800">
               <a:spcBef>
                 <a:spcPts val="0"/>
               </a:spcBef>
@@ -5425,7 +5613,7 @@
               <a:buChar char="○"/>
               <a:defRPr sz="1200"/>
             </a:lvl5pPr>
-            <a:lvl6pPr indent="-304800" lvl="5" marL="2743200">
+            <a:lvl6pPr marL="2743200" lvl="5" indent="-304800">
               <a:spcBef>
                 <a:spcPts val="0"/>
               </a:spcBef>
@@ -5436,7 +5624,7 @@
               <a:buChar char="■"/>
               <a:defRPr sz="1200"/>
             </a:lvl6pPr>
-            <a:lvl7pPr indent="-304800" lvl="6" marL="3200400">
+            <a:lvl7pPr marL="3200400" lvl="6" indent="-304800">
               <a:spcBef>
                 <a:spcPts val="0"/>
               </a:spcBef>
@@ -5447,7 +5635,7 @@
               <a:buChar char="●"/>
               <a:defRPr sz="1200"/>
             </a:lvl7pPr>
-            <a:lvl8pPr indent="-304800" lvl="7" marL="3657600">
+            <a:lvl8pPr marL="3657600" lvl="7" indent="-304800">
               <a:spcBef>
                 <a:spcPts val="0"/>
               </a:spcBef>
@@ -5458,7 +5646,7 @@
               <a:buChar char="○"/>
               <a:defRPr sz="1200"/>
             </a:lvl8pPr>
-            <a:lvl9pPr indent="-304800" lvl="8" marL="4114800">
+            <a:lvl9pPr marL="4114800" lvl="8" indent="-304800">
               <a:spcBef>
                 <a:spcPts val="0"/>
               </a:spcBef>
@@ -5470,15 +5658,19 @@
               <a:defRPr sz="1200"/>
             </a:lvl9pPr>
           </a:lstStyle>
-          <a:p/>
+          <a:p>
+            <a:endParaRPr/>
+          </a:p>
         </p:txBody>
       </p:sp>
       <p:sp>
         <p:nvSpPr>
           <p:cNvPr id="28" name="Google Shape;28;g31dd249a56a_0_198"/>
-          <p:cNvSpPr txBox="1"/>
+          <p:cNvSpPr txBox="1">
+            <a:spLocks noGrp="1"/>
+          </p:cNvSpPr>
           <p:nvPr>
-            <p:ph idx="2" type="body"/>
+            <p:ph type="body" idx="2"/>
           </p:nvPr>
         </p:nvSpPr>
         <p:spPr>
@@ -5491,11 +5683,11 @@
           </a:prstGeom>
         </p:spPr>
         <p:txBody>
-          <a:bodyPr anchorCtr="0" anchor="t" bIns="91425" lIns="91425" spcFirstLastPara="1" rIns="91425" wrap="square" tIns="91425">
+          <a:bodyPr spcFirstLastPara="1" wrap="square" lIns="91425" tIns="91425" rIns="91425" bIns="91425" anchor="t" anchorCtr="0">
             <a:normAutofit/>
           </a:bodyPr>
           <a:lstStyle>
-            <a:lvl1pPr indent="-317500" lvl="0" marL="457200">
+            <a:lvl1pPr marL="457200" lvl="0" indent="-317500">
               <a:spcBef>
                 <a:spcPts val="0"/>
               </a:spcBef>
@@ -5506,7 +5698,7 @@
               <a:buChar char="●"/>
               <a:defRPr sz="1400"/>
             </a:lvl1pPr>
-            <a:lvl2pPr indent="-304800" lvl="1" marL="914400">
+            <a:lvl2pPr marL="914400" lvl="1" indent="-304800">
               <a:spcBef>
                 <a:spcPts val="0"/>
               </a:spcBef>
@@ -5517,7 +5709,7 @@
               <a:buChar char="○"/>
               <a:defRPr sz="1200"/>
             </a:lvl2pPr>
-            <a:lvl3pPr indent="-304800" lvl="2" marL="1371600">
+            <a:lvl3pPr marL="1371600" lvl="2" indent="-304800">
               <a:spcBef>
                 <a:spcPts val="0"/>
               </a:spcBef>
@@ -5528,7 +5720,7 @@
               <a:buChar char="■"/>
               <a:defRPr sz="1200"/>
             </a:lvl3pPr>
-            <a:lvl4pPr indent="-304800" lvl="3" marL="1828800">
+            <a:lvl4pPr marL="1828800" lvl="3" indent="-304800">
               <a:spcBef>
                 <a:spcPts val="0"/>
               </a:spcBef>
@@ -5539,7 +5731,7 @@
               <a:buChar char="●"/>
               <a:defRPr sz="1200"/>
             </a:lvl4pPr>
-            <a:lvl5pPr indent="-304800" lvl="4" marL="2286000">
+            <a:lvl5pPr marL="2286000" lvl="4" indent="-304800">
               <a:spcBef>
                 <a:spcPts val="0"/>
               </a:spcBef>
@@ -5550,7 +5742,7 @@
               <a:buChar char="○"/>
               <a:defRPr sz="1200"/>
             </a:lvl5pPr>
-            <a:lvl6pPr indent="-304800" lvl="5" marL="2743200">
+            <a:lvl6pPr marL="2743200" lvl="5" indent="-304800">
               <a:spcBef>
                 <a:spcPts val="0"/>
               </a:spcBef>
@@ -5561,7 +5753,7 @@
               <a:buChar char="■"/>
               <a:defRPr sz="1200"/>
             </a:lvl6pPr>
-            <a:lvl7pPr indent="-304800" lvl="6" marL="3200400">
+            <a:lvl7pPr marL="3200400" lvl="6" indent="-304800">
               <a:spcBef>
                 <a:spcPts val="0"/>
               </a:spcBef>
@@ -5572,7 +5764,7 @@
               <a:buChar char="●"/>
               <a:defRPr sz="1200"/>
             </a:lvl7pPr>
-            <a:lvl8pPr indent="-304800" lvl="7" marL="3657600">
+            <a:lvl8pPr marL="3657600" lvl="7" indent="-304800">
               <a:spcBef>
                 <a:spcPts val="0"/>
               </a:spcBef>
@@ -5583,7 +5775,7 @@
               <a:buChar char="○"/>
               <a:defRPr sz="1200"/>
             </a:lvl8pPr>
-            <a:lvl9pPr indent="-304800" lvl="8" marL="4114800">
+            <a:lvl9pPr marL="4114800" lvl="8" indent="-304800">
               <a:spcBef>
                 <a:spcPts val="0"/>
               </a:spcBef>
@@ -5595,15 +5787,19 @@
               <a:defRPr sz="1200"/>
             </a:lvl9pPr>
           </a:lstStyle>
-          <a:p/>
+          <a:p>
+            <a:endParaRPr/>
+          </a:p>
         </p:txBody>
       </p:sp>
       <p:sp>
         <p:nvSpPr>
           <p:cNvPr id="29" name="Google Shape;29;g31dd249a56a_0_198"/>
-          <p:cNvSpPr txBox="1"/>
+          <p:cNvSpPr txBox="1">
+            <a:spLocks noGrp="1"/>
+          </p:cNvSpPr>
           <p:nvPr>
-            <p:ph idx="12" type="sldNum"/>
+            <p:ph type="sldNum" idx="12"/>
           </p:nvPr>
         </p:nvSpPr>
         <p:spPr>
@@ -5616,7 +5812,7 @@
           </a:prstGeom>
         </p:spPr>
         <p:txBody>
-          <a:bodyPr anchorCtr="0" anchor="ctr" bIns="91425" lIns="91425" spcFirstLastPara="1" rIns="91425" wrap="square" tIns="91425">
+          <a:bodyPr spcFirstLastPara="1" wrap="square" lIns="91425" tIns="91425" rIns="91425" bIns="91425" anchor="ctr" anchorCtr="0">
             <a:normAutofit/>
           </a:bodyPr>
           <a:lstStyle>
@@ -5658,7 +5854,7 @@
             </a:lvl9pPr>
           </a:lstStyle>
           <a:p>
-            <a:pPr indent="0" lvl="0" marL="0" rtl="0" algn="r">
+            <a:pPr marL="0" lvl="0" indent="0" algn="r" rtl="0">
               <a:spcBef>
                 <a:spcPts val="0"/>
               </a:spcBef>
@@ -5684,11 +5880,11 @@
 </file>
 
 <file path=ppt/slideLayouts/slideLayout5.xml><?xml version="1.0" encoding="utf-8"?>
-<p:sldLayout xmlns:a="http://schemas.openxmlformats.org/drawingml/2006/main" xmlns:r="http://schemas.openxmlformats.org/officeDocument/2006/relationships" xmlns:mc="http://schemas.openxmlformats.org/markup-compatibility/2006" xmlns:mv="urn:schemas-microsoft-com:mac:vml" xmlns:p="http://schemas.openxmlformats.org/presentationml/2006/main" xmlns:c="http://schemas.openxmlformats.org/drawingml/2006/chart" xmlns:dgm="http://schemas.openxmlformats.org/drawingml/2006/diagram" xmlns:o="urn:schemas-microsoft-com:office:office" xmlns:v="urn:schemas-microsoft-com:vml" xmlns:pvml="urn:schemas-microsoft-com:office:powerpoint" xmlns:com="http://schemas.openxmlformats.org/drawingml/2006/compatibility" xmlns:p14="http://schemas.microsoft.com/office/powerpoint/2010/main" xmlns:p15="http://schemas.microsoft.com/office/powerpoint/2012/main" xmlns:ahyp="http://schemas.microsoft.com/office/drawing/2018/hyperlinkcolor" matchingName="Title only" type="titleOnly">
+<p:sldLayout xmlns:a="http://schemas.openxmlformats.org/drawingml/2006/main" xmlns:r="http://schemas.openxmlformats.org/officeDocument/2006/relationships" xmlns:p="http://schemas.openxmlformats.org/presentationml/2006/main" matchingName="Title only" type="titleOnly">
   <p:cSld name="TITLE_ONLY">
     <p:spTree>
       <p:nvGrpSpPr>
-        <p:cNvPr id="30" name="Shape 30"/>
+        <p:cNvPr id="1" name="Shape 30"/>
         <p:cNvGrpSpPr/>
         <p:nvPr/>
       </p:nvGrpSpPr>
@@ -5703,7 +5899,9 @@
       <p:sp>
         <p:nvSpPr>
           <p:cNvPr id="31" name="Google Shape;31;g31dd249a56a_0_203"/>
-          <p:cNvSpPr txBox="1"/>
+          <p:cNvSpPr txBox="1">
+            <a:spLocks noGrp="1"/>
+          </p:cNvSpPr>
           <p:nvPr>
             <p:ph type="title"/>
           </p:nvPr>
@@ -5718,7 +5916,7 @@
           </a:prstGeom>
         </p:spPr>
         <p:txBody>
-          <a:bodyPr anchorCtr="0" anchor="b" bIns="91425" lIns="91425" spcFirstLastPara="1" rIns="91425" wrap="square" tIns="91425">
+          <a:bodyPr spcFirstLastPara="1" wrap="square" lIns="91425" tIns="91425" rIns="91425" bIns="91425" anchor="b" anchorCtr="0">
             <a:normAutofit/>
           </a:bodyPr>
           <a:lstStyle>
@@ -5822,15 +6020,19 @@
               <a:defRPr/>
             </a:lvl9pPr>
           </a:lstStyle>
-          <a:p/>
+          <a:p>
+            <a:endParaRPr/>
+          </a:p>
         </p:txBody>
       </p:sp>
       <p:sp>
         <p:nvSpPr>
           <p:cNvPr id="32" name="Google Shape;32;g31dd249a56a_0_203"/>
-          <p:cNvSpPr txBox="1"/>
+          <p:cNvSpPr txBox="1">
+            <a:spLocks noGrp="1"/>
+          </p:cNvSpPr>
           <p:nvPr>
-            <p:ph idx="12" type="sldNum"/>
+            <p:ph type="sldNum" idx="12"/>
           </p:nvPr>
         </p:nvSpPr>
         <p:spPr>
@@ -5843,7 +6045,7 @@
           </a:prstGeom>
         </p:spPr>
         <p:txBody>
-          <a:bodyPr anchorCtr="0" anchor="ctr" bIns="91425" lIns="91425" spcFirstLastPara="1" rIns="91425" wrap="square" tIns="91425">
+          <a:bodyPr spcFirstLastPara="1" wrap="square" lIns="91425" tIns="91425" rIns="91425" bIns="91425" anchor="ctr" anchorCtr="0">
             <a:normAutofit/>
           </a:bodyPr>
           <a:lstStyle>
@@ -5885,7 +6087,7 @@
             </a:lvl9pPr>
           </a:lstStyle>
           <a:p>
-            <a:pPr indent="0" lvl="0" marL="0" rtl="0" algn="r">
+            <a:pPr marL="0" lvl="0" indent="0" algn="r" rtl="0">
               <a:spcBef>
                 <a:spcPts val="0"/>
               </a:spcBef>
@@ -5911,11 +6113,11 @@
 </file>
 
 <file path=ppt/slideLayouts/slideLayout6.xml><?xml version="1.0" encoding="utf-8"?>
-<p:sldLayout xmlns:a="http://schemas.openxmlformats.org/drawingml/2006/main" xmlns:r="http://schemas.openxmlformats.org/officeDocument/2006/relationships" xmlns:mc="http://schemas.openxmlformats.org/markup-compatibility/2006" xmlns:mv="urn:schemas-microsoft-com:mac:vml" xmlns:p="http://schemas.openxmlformats.org/presentationml/2006/main" xmlns:c="http://schemas.openxmlformats.org/drawingml/2006/chart" xmlns:dgm="http://schemas.openxmlformats.org/drawingml/2006/diagram" xmlns:o="urn:schemas-microsoft-com:office:office" xmlns:v="urn:schemas-microsoft-com:vml" xmlns:pvml="urn:schemas-microsoft-com:office:powerpoint" xmlns:com="http://schemas.openxmlformats.org/drawingml/2006/compatibility" xmlns:p14="http://schemas.microsoft.com/office/powerpoint/2010/main" xmlns:p15="http://schemas.microsoft.com/office/powerpoint/2012/main" xmlns:ahyp="http://schemas.microsoft.com/office/drawing/2018/hyperlinkcolor" matchingName="One column text">
+<p:sldLayout xmlns:a="http://schemas.openxmlformats.org/drawingml/2006/main" xmlns:r="http://schemas.openxmlformats.org/officeDocument/2006/relationships" xmlns:p="http://schemas.openxmlformats.org/presentationml/2006/main" matchingName="One column text">
   <p:cSld name="ONE_COLUMN_TEXT">
     <p:spTree>
       <p:nvGrpSpPr>
-        <p:cNvPr id="33" name="Shape 33"/>
+        <p:cNvPr id="1" name="Shape 33"/>
         <p:cNvGrpSpPr/>
         <p:nvPr/>
       </p:nvGrpSpPr>
@@ -5930,7 +6132,9 @@
       <p:sp>
         <p:nvSpPr>
           <p:cNvPr id="34" name="Google Shape;34;g31dd249a56a_0_206"/>
-          <p:cNvSpPr txBox="1"/>
+          <p:cNvSpPr txBox="1">
+            <a:spLocks noGrp="1"/>
+          </p:cNvSpPr>
           <p:nvPr>
             <p:ph type="title"/>
           </p:nvPr>
@@ -5945,7 +6149,7 @@
           </a:prstGeom>
         </p:spPr>
         <p:txBody>
-          <a:bodyPr anchorCtr="0" anchor="b" bIns="91425" lIns="91425" spcFirstLastPara="1" rIns="91425" wrap="square" tIns="91425">
+          <a:bodyPr spcFirstLastPara="1" wrap="square" lIns="91425" tIns="91425" rIns="91425" bIns="91425" anchor="b" anchorCtr="0">
             <a:normAutofit/>
           </a:bodyPr>
           <a:lstStyle>
@@ -6049,15 +6253,19 @@
               <a:defRPr sz="3000"/>
             </a:lvl9pPr>
           </a:lstStyle>
-          <a:p/>
+          <a:p>
+            <a:endParaRPr/>
+          </a:p>
         </p:txBody>
       </p:sp>
       <p:sp>
         <p:nvSpPr>
           <p:cNvPr id="35" name="Google Shape;35;g31dd249a56a_0_206"/>
-          <p:cNvSpPr txBox="1"/>
+          <p:cNvSpPr txBox="1">
+            <a:spLocks noGrp="1"/>
+          </p:cNvSpPr>
           <p:nvPr>
-            <p:ph idx="1" type="body"/>
+            <p:ph type="body" idx="1"/>
           </p:nvPr>
         </p:nvSpPr>
         <p:spPr>
@@ -6070,11 +6278,11 @@
           </a:prstGeom>
         </p:spPr>
         <p:txBody>
-          <a:bodyPr anchorCtr="0" anchor="t" bIns="91425" lIns="91425" spcFirstLastPara="1" rIns="91425" wrap="square" tIns="91425">
+          <a:bodyPr spcFirstLastPara="1" wrap="square" lIns="91425" tIns="91425" rIns="91425" bIns="91425" anchor="t" anchorCtr="0">
             <a:normAutofit/>
           </a:bodyPr>
           <a:lstStyle>
-            <a:lvl1pPr indent="-304800" lvl="0" marL="457200">
+            <a:lvl1pPr marL="457200" lvl="0" indent="-304800">
               <a:spcBef>
                 <a:spcPts val="0"/>
               </a:spcBef>
@@ -6085,7 +6293,7 @@
               <a:buChar char="●"/>
               <a:defRPr sz="1200"/>
             </a:lvl1pPr>
-            <a:lvl2pPr indent="-304800" lvl="1" marL="914400">
+            <a:lvl2pPr marL="914400" lvl="1" indent="-304800">
               <a:spcBef>
                 <a:spcPts val="0"/>
               </a:spcBef>
@@ -6096,7 +6304,7 @@
               <a:buChar char="○"/>
               <a:defRPr sz="1200"/>
             </a:lvl2pPr>
-            <a:lvl3pPr indent="-304800" lvl="2" marL="1371600">
+            <a:lvl3pPr marL="1371600" lvl="2" indent="-304800">
               <a:spcBef>
                 <a:spcPts val="0"/>
               </a:spcBef>
@@ -6107,7 +6315,7 @@
               <a:buChar char="■"/>
               <a:defRPr sz="1200"/>
             </a:lvl3pPr>
-            <a:lvl4pPr indent="-304800" lvl="3" marL="1828800">
+            <a:lvl4pPr marL="1828800" lvl="3" indent="-304800">
               <a:spcBef>
                 <a:spcPts val="0"/>
               </a:spcBef>
@@ -6118,7 +6326,7 @@
               <a:buChar char="●"/>
               <a:defRPr sz="1200"/>
             </a:lvl4pPr>
-            <a:lvl5pPr indent="-304800" lvl="4" marL="2286000">
+            <a:lvl5pPr marL="2286000" lvl="4" indent="-304800">
               <a:spcBef>
                 <a:spcPts val="0"/>
               </a:spcBef>
@@ -6129,7 +6337,7 @@
               <a:buChar char="○"/>
               <a:defRPr sz="1200"/>
             </a:lvl5pPr>
-            <a:lvl6pPr indent="-304800" lvl="5" marL="2743200">
+            <a:lvl6pPr marL="2743200" lvl="5" indent="-304800">
               <a:spcBef>
                 <a:spcPts val="0"/>
               </a:spcBef>
@@ -6140,7 +6348,7 @@
               <a:buChar char="■"/>
               <a:defRPr sz="1200"/>
             </a:lvl6pPr>
-            <a:lvl7pPr indent="-304800" lvl="6" marL="3200400">
+            <a:lvl7pPr marL="3200400" lvl="6" indent="-304800">
               <a:spcBef>
                 <a:spcPts val="0"/>
               </a:spcBef>
@@ -6151,7 +6359,7 @@
               <a:buChar char="●"/>
               <a:defRPr sz="1200"/>
             </a:lvl7pPr>
-            <a:lvl8pPr indent="-304800" lvl="7" marL="3657600">
+            <a:lvl8pPr marL="3657600" lvl="7" indent="-304800">
               <a:spcBef>
                 <a:spcPts val="0"/>
               </a:spcBef>
@@ -6162,7 +6370,7 @@
               <a:buChar char="○"/>
               <a:defRPr sz="1200"/>
             </a:lvl8pPr>
-            <a:lvl9pPr indent="-304800" lvl="8" marL="4114800">
+            <a:lvl9pPr marL="4114800" lvl="8" indent="-304800">
               <a:spcBef>
                 <a:spcPts val="0"/>
               </a:spcBef>
@@ -6174,15 +6382,19 @@
               <a:defRPr sz="1200"/>
             </a:lvl9pPr>
           </a:lstStyle>
-          <a:p/>
+          <a:p>
+            <a:endParaRPr/>
+          </a:p>
         </p:txBody>
       </p:sp>
       <p:sp>
         <p:nvSpPr>
           <p:cNvPr id="36" name="Google Shape;36;g31dd249a56a_0_206"/>
-          <p:cNvSpPr txBox="1"/>
+          <p:cNvSpPr txBox="1">
+            <a:spLocks noGrp="1"/>
+          </p:cNvSpPr>
           <p:nvPr>
-            <p:ph idx="12" type="sldNum"/>
+            <p:ph type="sldNum" idx="12"/>
           </p:nvPr>
         </p:nvSpPr>
         <p:spPr>
@@ -6195,7 +6407,7 @@
           </a:prstGeom>
         </p:spPr>
         <p:txBody>
-          <a:bodyPr anchorCtr="0" anchor="ctr" bIns="91425" lIns="91425" spcFirstLastPara="1" rIns="91425" wrap="square" tIns="91425">
+          <a:bodyPr spcFirstLastPara="1" wrap="square" lIns="91425" tIns="91425" rIns="91425" bIns="91425" anchor="ctr" anchorCtr="0">
             <a:normAutofit/>
           </a:bodyPr>
           <a:lstStyle>
@@ -6237,7 +6449,7 @@
             </a:lvl9pPr>
           </a:lstStyle>
           <a:p>
-            <a:pPr indent="0" lvl="0" marL="0" rtl="0" algn="r">
+            <a:pPr marL="0" lvl="0" indent="0" algn="r" rtl="0">
               <a:spcBef>
                 <a:spcPts val="0"/>
               </a:spcBef>
@@ -6263,11 +6475,11 @@
 </file>
 
 <file path=ppt/slideLayouts/slideLayout7.xml><?xml version="1.0" encoding="utf-8"?>
-<p:sldLayout xmlns:a="http://schemas.openxmlformats.org/drawingml/2006/main" xmlns:r="http://schemas.openxmlformats.org/officeDocument/2006/relationships" xmlns:mc="http://schemas.openxmlformats.org/markup-compatibility/2006" xmlns:mv="urn:schemas-microsoft-com:mac:vml" xmlns:p="http://schemas.openxmlformats.org/presentationml/2006/main" xmlns:c="http://schemas.openxmlformats.org/drawingml/2006/chart" xmlns:dgm="http://schemas.openxmlformats.org/drawingml/2006/diagram" xmlns:o="urn:schemas-microsoft-com:office:office" xmlns:v="urn:schemas-microsoft-com:vml" xmlns:pvml="urn:schemas-microsoft-com:office:powerpoint" xmlns:com="http://schemas.openxmlformats.org/drawingml/2006/compatibility" xmlns:p14="http://schemas.microsoft.com/office/powerpoint/2010/main" xmlns:p15="http://schemas.microsoft.com/office/powerpoint/2012/main" xmlns:ahyp="http://schemas.microsoft.com/office/drawing/2018/hyperlinkcolor" matchingName="Main point">
+<p:sldLayout xmlns:a="http://schemas.openxmlformats.org/drawingml/2006/main" xmlns:r="http://schemas.openxmlformats.org/officeDocument/2006/relationships" xmlns:p="http://schemas.openxmlformats.org/presentationml/2006/main" matchingName="Main point">
   <p:cSld name="MAIN_POINT">
     <p:spTree>
       <p:nvGrpSpPr>
-        <p:cNvPr id="37" name="Shape 37"/>
+        <p:cNvPr id="1" name="Shape 37"/>
         <p:cNvGrpSpPr/>
         <p:nvPr/>
       </p:nvGrpSpPr>
@@ -6301,12 +6513,12 @@
           </a:ln>
         </p:spPr>
         <p:txBody>
-          <a:bodyPr anchorCtr="0" anchor="ctr" bIns="91425" lIns="91425" spcFirstLastPara="1" rIns="91425" wrap="square" tIns="91425">
+          <a:bodyPr spcFirstLastPara="1" wrap="square" lIns="91425" tIns="91425" rIns="91425" bIns="91425" anchor="ctr" anchorCtr="0">
             <a:noAutofit/>
           </a:bodyPr>
           <a:lstStyle/>
           <a:p>
-            <a:pPr indent="0" lvl="0" marL="0" rtl="0" algn="l">
+            <a:pPr marL="0" lvl="0" indent="0" algn="l" rtl="0">
               <a:spcBef>
                 <a:spcPts val="0"/>
               </a:spcBef>
@@ -6315,9 +6527,6 @@
               </a:spcAft>
               <a:buNone/>
             </a:pPr>
-            <a:r>
-              <a:t/>
-            </a:r>
             <a:endParaRPr/>
           </a:p>
         </p:txBody>
@@ -6325,7 +6534,9 @@
       <p:sp>
         <p:nvSpPr>
           <p:cNvPr id="39" name="Google Shape;39;g31dd249a56a_0_210"/>
-          <p:cNvSpPr txBox="1"/>
+          <p:cNvSpPr txBox="1">
+            <a:spLocks noGrp="1"/>
+          </p:cNvSpPr>
           <p:nvPr>
             <p:ph type="title"/>
           </p:nvPr>
@@ -6340,7 +6551,7 @@
           </a:prstGeom>
         </p:spPr>
         <p:txBody>
-          <a:bodyPr anchorCtr="0" anchor="ctr" bIns="91425" lIns="91425" spcFirstLastPara="1" rIns="91425" wrap="square" tIns="91425">
+          <a:bodyPr spcFirstLastPara="1" wrap="square" lIns="91425" tIns="91425" rIns="91425" bIns="91425" anchor="ctr" anchorCtr="0">
             <a:normAutofit/>
           </a:bodyPr>
           <a:lstStyle>
@@ -6444,15 +6655,19 @@
               <a:defRPr sz="4800"/>
             </a:lvl9pPr>
           </a:lstStyle>
-          <a:p/>
+          <a:p>
+            <a:endParaRPr/>
+          </a:p>
         </p:txBody>
       </p:sp>
       <p:sp>
         <p:nvSpPr>
           <p:cNvPr id="40" name="Google Shape;40;g31dd249a56a_0_210"/>
-          <p:cNvSpPr txBox="1"/>
+          <p:cNvSpPr txBox="1">
+            <a:spLocks noGrp="1"/>
+          </p:cNvSpPr>
           <p:nvPr>
-            <p:ph idx="12" type="sldNum"/>
+            <p:ph type="sldNum" idx="12"/>
           </p:nvPr>
         </p:nvSpPr>
         <p:spPr>
@@ -6465,7 +6680,7 @@
           </a:prstGeom>
         </p:spPr>
         <p:txBody>
-          <a:bodyPr anchorCtr="0" anchor="ctr" bIns="91425" lIns="91425" spcFirstLastPara="1" rIns="91425" wrap="square" tIns="91425">
+          <a:bodyPr spcFirstLastPara="1" wrap="square" lIns="91425" tIns="91425" rIns="91425" bIns="91425" anchor="ctr" anchorCtr="0">
             <a:normAutofit/>
           </a:bodyPr>
           <a:lstStyle>
@@ -6507,7 +6722,7 @@
             </a:lvl9pPr>
           </a:lstStyle>
           <a:p>
-            <a:pPr indent="0" lvl="0" marL="0" rtl="0" algn="r">
+            <a:pPr marL="0" lvl="0" indent="0" algn="r" rtl="0">
               <a:spcBef>
                 <a:spcPts val="0"/>
               </a:spcBef>
@@ -6533,11 +6748,11 @@
 </file>
 
 <file path=ppt/slideLayouts/slideLayout8.xml><?xml version="1.0" encoding="utf-8"?>
-<p:sldLayout xmlns:a="http://schemas.openxmlformats.org/drawingml/2006/main" xmlns:r="http://schemas.openxmlformats.org/officeDocument/2006/relationships" xmlns:mc="http://schemas.openxmlformats.org/markup-compatibility/2006" xmlns:mv="urn:schemas-microsoft-com:mac:vml" xmlns:p="http://schemas.openxmlformats.org/presentationml/2006/main" xmlns:c="http://schemas.openxmlformats.org/drawingml/2006/chart" xmlns:dgm="http://schemas.openxmlformats.org/drawingml/2006/diagram" xmlns:o="urn:schemas-microsoft-com:office:office" xmlns:v="urn:schemas-microsoft-com:vml" xmlns:pvml="urn:schemas-microsoft-com:office:powerpoint" xmlns:com="http://schemas.openxmlformats.org/drawingml/2006/compatibility" xmlns:p14="http://schemas.microsoft.com/office/powerpoint/2010/main" xmlns:p15="http://schemas.microsoft.com/office/powerpoint/2012/main" xmlns:ahyp="http://schemas.microsoft.com/office/drawing/2018/hyperlinkcolor" matchingName="Section title and description">
+<p:sldLayout xmlns:a="http://schemas.openxmlformats.org/drawingml/2006/main" xmlns:r="http://schemas.openxmlformats.org/officeDocument/2006/relationships" xmlns:p="http://schemas.openxmlformats.org/presentationml/2006/main" matchingName="Section title and description">
   <p:cSld name="SECTION_TITLE_AND_DESCRIPTION">
     <p:spTree>
       <p:nvGrpSpPr>
-        <p:cNvPr id="41" name="Shape 41"/>
+        <p:cNvPr id="1" name="Shape 41"/>
         <p:cNvGrpSpPr/>
         <p:nvPr/>
       </p:nvGrpSpPr>
@@ -6571,12 +6786,12 @@
           </a:ln>
         </p:spPr>
         <p:txBody>
-          <a:bodyPr anchorCtr="0" anchor="ctr" bIns="91425" lIns="91425" spcFirstLastPara="1" rIns="91425" wrap="square" tIns="91425">
+          <a:bodyPr spcFirstLastPara="1" wrap="square" lIns="91425" tIns="91425" rIns="91425" bIns="91425" anchor="ctr" anchorCtr="0">
             <a:noAutofit/>
           </a:bodyPr>
           <a:lstStyle/>
           <a:p>
-            <a:pPr indent="0" lvl="0" marL="0" rtl="0" algn="l">
+            <a:pPr marL="0" lvl="0" indent="0" algn="l" rtl="0">
               <a:spcBef>
                 <a:spcPts val="0"/>
               </a:spcBef>
@@ -6585,9 +6800,6 @@
               </a:spcAft>
               <a:buNone/>
             </a:pPr>
-            <a:r>
-              <a:t/>
-            </a:r>
             <a:endParaRPr/>
           </a:p>
         </p:txBody>
@@ -6607,21 +6819,23 @@
             <a:avLst/>
           </a:prstGeom>
           <a:noFill/>
-          <a:ln cap="flat" cmpd="sng" w="19050">
+          <a:ln w="19050" cap="flat" cmpd="sng">
             <a:solidFill>
               <a:schemeClr val="lt1"/>
             </a:solidFill>
             <a:prstDash val="solid"/>
             <a:round/>
-            <a:headEnd len="sm" w="sm" type="none"/>
-            <a:tailEnd len="sm" w="sm" type="none"/>
+            <a:headEnd type="none" w="sm" len="sm"/>
+            <a:tailEnd type="none" w="sm" len="sm"/>
           </a:ln>
         </p:spPr>
       </p:cxnSp>
       <p:sp>
         <p:nvSpPr>
           <p:cNvPr id="44" name="Google Shape;44;g31dd249a56a_0_214"/>
-          <p:cNvSpPr txBox="1"/>
+          <p:cNvSpPr txBox="1">
+            <a:spLocks noGrp="1"/>
+          </p:cNvSpPr>
           <p:nvPr>
             <p:ph type="title"/>
           </p:nvPr>
@@ -6636,7 +6850,7 @@
           </a:prstGeom>
         </p:spPr>
         <p:txBody>
-          <a:bodyPr anchorCtr="0" anchor="b" bIns="91425" lIns="91425" spcFirstLastPara="1" rIns="91425" wrap="square" tIns="91425">
+          <a:bodyPr spcFirstLastPara="1" wrap="square" lIns="91425" tIns="91425" rIns="91425" bIns="91425" anchor="b" anchorCtr="0">
             <a:normAutofit/>
           </a:bodyPr>
           <a:lstStyle>
@@ -6803,15 +7017,19 @@
               </a:defRPr>
             </a:lvl9pPr>
           </a:lstStyle>
-          <a:p/>
+          <a:p>
+            <a:endParaRPr/>
+          </a:p>
         </p:txBody>
       </p:sp>
       <p:sp>
         <p:nvSpPr>
           <p:cNvPr id="45" name="Google Shape;45;g31dd249a56a_0_214"/>
-          <p:cNvSpPr txBox="1"/>
+          <p:cNvSpPr txBox="1">
+            <a:spLocks noGrp="1"/>
+          </p:cNvSpPr>
           <p:nvPr>
-            <p:ph idx="1" type="subTitle"/>
+            <p:ph type="subTitle" idx="1"/>
           </p:nvPr>
         </p:nvSpPr>
         <p:spPr>
@@ -6824,7 +7042,7 @@
           </a:prstGeom>
         </p:spPr>
         <p:txBody>
-          <a:bodyPr anchorCtr="0" anchor="t" bIns="91425" lIns="91425" spcFirstLastPara="1" rIns="91425" wrap="square" tIns="91425">
+          <a:bodyPr spcFirstLastPara="1" wrap="square" lIns="91425" tIns="91425" rIns="91425" bIns="91425" anchor="t" anchorCtr="0">
             <a:normAutofit/>
           </a:bodyPr>
           <a:lstStyle>
@@ -7009,15 +7227,19 @@
               </a:defRPr>
             </a:lvl9pPr>
           </a:lstStyle>
-          <a:p/>
+          <a:p>
+            <a:endParaRPr/>
+          </a:p>
         </p:txBody>
       </p:sp>
       <p:sp>
         <p:nvSpPr>
           <p:cNvPr id="46" name="Google Shape;46;g31dd249a56a_0_214"/>
-          <p:cNvSpPr txBox="1"/>
+          <p:cNvSpPr txBox="1">
+            <a:spLocks noGrp="1"/>
+          </p:cNvSpPr>
           <p:nvPr>
-            <p:ph idx="2" type="body"/>
+            <p:ph type="body" idx="2"/>
           </p:nvPr>
         </p:nvSpPr>
         <p:spPr>
@@ -7030,11 +7252,11 @@
           </a:prstGeom>
         </p:spPr>
         <p:txBody>
-          <a:bodyPr anchorCtr="0" anchor="ctr" bIns="91425" lIns="91425" spcFirstLastPara="1" rIns="91425" wrap="square" tIns="91425">
+          <a:bodyPr spcFirstLastPara="1" wrap="square" lIns="91425" tIns="91425" rIns="91425" bIns="91425" anchor="ctr" anchorCtr="0">
             <a:normAutofit/>
           </a:bodyPr>
           <a:lstStyle>
-            <a:lvl1pPr indent="-342900" lvl="0" marL="457200">
+            <a:lvl1pPr marL="457200" lvl="0" indent="-342900">
               <a:spcBef>
                 <a:spcPts val="0"/>
               </a:spcBef>
@@ -7052,7 +7274,7 @@
                 </a:solidFill>
               </a:defRPr>
             </a:lvl1pPr>
-            <a:lvl2pPr indent="-317500" lvl="1" marL="914400">
+            <a:lvl2pPr marL="914400" lvl="1" indent="-317500">
               <a:spcBef>
                 <a:spcPts val="0"/>
               </a:spcBef>
@@ -7070,7 +7292,7 @@
                 </a:solidFill>
               </a:defRPr>
             </a:lvl2pPr>
-            <a:lvl3pPr indent="-317500" lvl="2" marL="1371600">
+            <a:lvl3pPr marL="1371600" lvl="2" indent="-317500">
               <a:spcBef>
                 <a:spcPts val="0"/>
               </a:spcBef>
@@ -7088,7 +7310,7 @@
                 </a:solidFill>
               </a:defRPr>
             </a:lvl3pPr>
-            <a:lvl4pPr indent="-317500" lvl="3" marL="1828800">
+            <a:lvl4pPr marL="1828800" lvl="3" indent="-317500">
               <a:spcBef>
                 <a:spcPts val="0"/>
               </a:spcBef>
@@ -7106,7 +7328,7 @@
                 </a:solidFill>
               </a:defRPr>
             </a:lvl4pPr>
-            <a:lvl5pPr indent="-317500" lvl="4" marL="2286000">
+            <a:lvl5pPr marL="2286000" lvl="4" indent="-317500">
               <a:spcBef>
                 <a:spcPts val="0"/>
               </a:spcBef>
@@ -7124,7 +7346,7 @@
                 </a:solidFill>
               </a:defRPr>
             </a:lvl5pPr>
-            <a:lvl6pPr indent="-317500" lvl="5" marL="2743200">
+            <a:lvl6pPr marL="2743200" lvl="5" indent="-317500">
               <a:spcBef>
                 <a:spcPts val="0"/>
               </a:spcBef>
@@ -7142,7 +7364,7 @@
                 </a:solidFill>
               </a:defRPr>
             </a:lvl6pPr>
-            <a:lvl7pPr indent="-317500" lvl="6" marL="3200400">
+            <a:lvl7pPr marL="3200400" lvl="6" indent="-317500">
               <a:spcBef>
                 <a:spcPts val="0"/>
               </a:spcBef>
@@ -7160,7 +7382,7 @@
                 </a:solidFill>
               </a:defRPr>
             </a:lvl7pPr>
-            <a:lvl8pPr indent="-317500" lvl="7" marL="3657600">
+            <a:lvl8pPr marL="3657600" lvl="7" indent="-317500">
               <a:spcBef>
                 <a:spcPts val="0"/>
               </a:spcBef>
@@ -7178,7 +7400,7 @@
                 </a:solidFill>
               </a:defRPr>
             </a:lvl8pPr>
-            <a:lvl9pPr indent="-317500" lvl="8" marL="4114800">
+            <a:lvl9pPr marL="4114800" lvl="8" indent="-317500">
               <a:spcBef>
                 <a:spcPts val="0"/>
               </a:spcBef>
@@ -7197,15 +7419,19 @@
               </a:defRPr>
             </a:lvl9pPr>
           </a:lstStyle>
-          <a:p/>
+          <a:p>
+            <a:endParaRPr/>
+          </a:p>
         </p:txBody>
       </p:sp>
       <p:sp>
         <p:nvSpPr>
           <p:cNvPr id="47" name="Google Shape;47;g31dd249a56a_0_214"/>
-          <p:cNvSpPr txBox="1"/>
+          <p:cNvSpPr txBox="1">
+            <a:spLocks noGrp="1"/>
+          </p:cNvSpPr>
           <p:nvPr>
-            <p:ph idx="12" type="sldNum"/>
+            <p:ph type="sldNum" idx="12"/>
           </p:nvPr>
         </p:nvSpPr>
         <p:spPr>
@@ -7218,7 +7444,7 @@
           </a:prstGeom>
         </p:spPr>
         <p:txBody>
-          <a:bodyPr anchorCtr="0" anchor="ctr" bIns="91425" lIns="91425" spcFirstLastPara="1" rIns="91425" wrap="square" tIns="91425">
+          <a:bodyPr spcFirstLastPara="1" wrap="square" lIns="91425" tIns="91425" rIns="91425" bIns="91425" anchor="ctr" anchorCtr="0">
             <a:normAutofit/>
           </a:bodyPr>
           <a:lstStyle>
@@ -7296,7 +7522,7 @@
             </a:lvl9pPr>
           </a:lstStyle>
           <a:p>
-            <a:pPr indent="0" lvl="0" marL="0" rtl="0" algn="r">
+            <a:pPr marL="0" lvl="0" indent="0" algn="r" rtl="0">
               <a:spcBef>
                 <a:spcPts val="0"/>
               </a:spcBef>
@@ -7322,11 +7548,11 @@
 </file>
 
 <file path=ppt/slideLayouts/slideLayout9.xml><?xml version="1.0" encoding="utf-8"?>
-<p:sldLayout xmlns:a="http://schemas.openxmlformats.org/drawingml/2006/main" xmlns:r="http://schemas.openxmlformats.org/officeDocument/2006/relationships" xmlns:mc="http://schemas.openxmlformats.org/markup-compatibility/2006" xmlns:mv="urn:schemas-microsoft-com:mac:vml" xmlns:p="http://schemas.openxmlformats.org/presentationml/2006/main" xmlns:c="http://schemas.openxmlformats.org/drawingml/2006/chart" xmlns:dgm="http://schemas.openxmlformats.org/drawingml/2006/diagram" xmlns:o="urn:schemas-microsoft-com:office:office" xmlns:v="urn:schemas-microsoft-com:vml" xmlns:pvml="urn:schemas-microsoft-com:office:powerpoint" xmlns:com="http://schemas.openxmlformats.org/drawingml/2006/compatibility" xmlns:p14="http://schemas.microsoft.com/office/powerpoint/2010/main" xmlns:p15="http://schemas.microsoft.com/office/powerpoint/2012/main" xmlns:ahyp="http://schemas.microsoft.com/office/drawing/2018/hyperlinkcolor" matchingName="Caption">
+<p:sldLayout xmlns:a="http://schemas.openxmlformats.org/drawingml/2006/main" xmlns:r="http://schemas.openxmlformats.org/officeDocument/2006/relationships" xmlns:p="http://schemas.openxmlformats.org/presentationml/2006/main" matchingName="Caption">
   <p:cSld name="CAPTION_ONLY">
     <p:spTree>
       <p:nvGrpSpPr>
-        <p:cNvPr id="48" name="Shape 48"/>
+        <p:cNvPr id="1" name="Shape 48"/>
         <p:cNvGrpSpPr/>
         <p:nvPr/>
       </p:nvGrpSpPr>
@@ -7341,9 +7567,11 @@
       <p:sp>
         <p:nvSpPr>
           <p:cNvPr id="49" name="Google Shape;49;g31dd249a56a_0_221"/>
-          <p:cNvSpPr txBox="1"/>
+          <p:cNvSpPr txBox="1">
+            <a:spLocks noGrp="1"/>
+          </p:cNvSpPr>
           <p:nvPr>
-            <p:ph idx="1" type="body"/>
+            <p:ph type="body" idx="1"/>
           </p:nvPr>
         </p:nvSpPr>
         <p:spPr>
@@ -7356,11 +7584,11 @@
           </a:prstGeom>
         </p:spPr>
         <p:txBody>
-          <a:bodyPr anchorCtr="0" anchor="ctr" bIns="91425" lIns="91425" spcFirstLastPara="1" rIns="91425" wrap="square" tIns="91425">
+          <a:bodyPr spcFirstLastPara="1" wrap="square" lIns="91425" tIns="91425" rIns="91425" bIns="91425" anchor="ctr" anchorCtr="0">
             <a:normAutofit/>
           </a:bodyPr>
           <a:lstStyle>
-            <a:lvl1pPr indent="-228600" lvl="0" marL="457200">
+            <a:lvl1pPr marL="457200" lvl="0" indent="-228600">
               <a:lnSpc>
                 <a:spcPct val="100000"/>
               </a:lnSpc>
@@ -7381,15 +7609,19 @@
               </a:defRPr>
             </a:lvl1pPr>
           </a:lstStyle>
-          <a:p/>
+          <a:p>
+            <a:endParaRPr/>
+          </a:p>
         </p:txBody>
       </p:sp>
       <p:sp>
         <p:nvSpPr>
           <p:cNvPr id="50" name="Google Shape;50;g31dd249a56a_0_221"/>
-          <p:cNvSpPr txBox="1"/>
+          <p:cNvSpPr txBox="1">
+            <a:spLocks noGrp="1"/>
+          </p:cNvSpPr>
           <p:nvPr>
-            <p:ph idx="12" type="sldNum"/>
+            <p:ph type="sldNum" idx="12"/>
           </p:nvPr>
         </p:nvSpPr>
         <p:spPr>
@@ -7402,7 +7634,7 @@
           </a:prstGeom>
         </p:spPr>
         <p:txBody>
-          <a:bodyPr anchorCtr="0" anchor="ctr" bIns="91425" lIns="91425" spcFirstLastPara="1" rIns="91425" wrap="square" tIns="91425">
+          <a:bodyPr spcFirstLastPara="1" wrap="square" lIns="91425" tIns="91425" rIns="91425" bIns="91425" anchor="ctr" anchorCtr="0">
             <a:normAutofit/>
           </a:bodyPr>
           <a:lstStyle>
@@ -7444,7 +7676,7 @@
             </a:lvl9pPr>
           </a:lstStyle>
           <a:p>
-            <a:pPr indent="0" lvl="0" marL="0" rtl="0" algn="r">
+            <a:pPr marL="0" lvl="0" indent="0" algn="r" rtl="0">
               <a:spcBef>
                 <a:spcPts val="0"/>
               </a:spcBef>
@@ -7470,18 +7702,19 @@
 </file>
 
 <file path=ppt/slideMasters/slideMaster1.xml><?xml version="1.0" encoding="utf-8"?>
-<p:sldMaster xmlns:a="http://schemas.openxmlformats.org/drawingml/2006/main" xmlns:r="http://schemas.openxmlformats.org/officeDocument/2006/relationships" xmlns:mc="http://schemas.openxmlformats.org/markup-compatibility/2006" xmlns:mv="urn:schemas-microsoft-com:mac:vml" xmlns:p="http://schemas.openxmlformats.org/presentationml/2006/main" xmlns:c="http://schemas.openxmlformats.org/drawingml/2006/chart" xmlns:dgm="http://schemas.openxmlformats.org/drawingml/2006/diagram" xmlns:o="urn:schemas-microsoft-com:office:office" xmlns:v="urn:schemas-microsoft-com:vml" xmlns:pvml="urn:schemas-microsoft-com:office:powerpoint" xmlns:com="http://schemas.openxmlformats.org/drawingml/2006/compatibility" xmlns:p14="http://schemas.microsoft.com/office/powerpoint/2010/main" xmlns:p15="http://schemas.microsoft.com/office/powerpoint/2012/main" xmlns:ahyp="http://schemas.microsoft.com/office/drawing/2018/hyperlinkcolor">
+<p:sldMaster xmlns:a="http://schemas.openxmlformats.org/drawingml/2006/main" xmlns:r="http://schemas.openxmlformats.org/officeDocument/2006/relationships" xmlns:p="http://schemas.openxmlformats.org/presentationml/2006/main">
   <p:cSld name="luxe">
     <p:bg>
       <p:bgPr>
         <a:solidFill>
           <a:schemeClr val="lt1"/>
         </a:solidFill>
+        <a:effectLst/>
       </p:bgPr>
     </p:bg>
     <p:spTree>
       <p:nvGrpSpPr>
-        <p:cNvPr id="5" name="Shape 5"/>
+        <p:cNvPr id="1" name="Shape 5"/>
         <p:cNvGrpSpPr/>
         <p:nvPr/>
       </p:nvGrpSpPr>
@@ -7496,7 +7729,9 @@
       <p:sp>
         <p:nvSpPr>
           <p:cNvPr id="6" name="Google Shape;6;g31dd249a56a_0_178"/>
-          <p:cNvSpPr txBox="1"/>
+          <p:cNvSpPr txBox="1">
+            <a:spLocks noGrp="1"/>
+          </p:cNvSpPr>
           <p:nvPr>
             <p:ph type="title"/>
           </p:nvPr>
@@ -7515,7 +7750,7 @@
           </a:ln>
         </p:spPr>
         <p:txBody>
-          <a:bodyPr anchorCtr="0" anchor="b" bIns="91425" lIns="91425" spcFirstLastPara="1" rIns="91425" wrap="square" tIns="91425">
+          <a:bodyPr spcFirstLastPara="1" wrap="square" lIns="91425" tIns="91425" rIns="91425" bIns="91425" anchor="b" anchorCtr="0">
             <a:normAutofit/>
           </a:bodyPr>
           <a:lstStyle>
@@ -7727,15 +7962,19 @@
               </a:defRPr>
             </a:lvl9pPr>
           </a:lstStyle>
-          <a:p/>
+          <a:p>
+            <a:endParaRPr/>
+          </a:p>
         </p:txBody>
       </p:sp>
       <p:sp>
         <p:nvSpPr>
           <p:cNvPr id="7" name="Google Shape;7;g31dd249a56a_0_178"/>
-          <p:cNvSpPr txBox="1"/>
+          <p:cNvSpPr txBox="1">
+            <a:spLocks noGrp="1"/>
+          </p:cNvSpPr>
           <p:nvPr>
-            <p:ph idx="1" type="body"/>
+            <p:ph type="body" idx="1"/>
           </p:nvPr>
         </p:nvSpPr>
         <p:spPr>
@@ -7752,11 +7991,11 @@
           </a:ln>
         </p:spPr>
         <p:txBody>
-          <a:bodyPr anchorCtr="0" anchor="t" bIns="91425" lIns="91425" spcFirstLastPara="1" rIns="91425" wrap="square" tIns="91425">
+          <a:bodyPr spcFirstLastPara="1" wrap="square" lIns="91425" tIns="91425" rIns="91425" bIns="91425" anchor="t" anchorCtr="0">
             <a:normAutofit/>
           </a:bodyPr>
           <a:lstStyle>
-            <a:lvl1pPr indent="-342900" lvl="0" marL="457200">
+            <a:lvl1pPr marL="457200" lvl="0" indent="-342900">
               <a:lnSpc>
                 <a:spcPct val="115000"/>
               </a:lnSpc>
@@ -7782,7 +8021,7 @@
                 <a:sym typeface="Open Sans"/>
               </a:defRPr>
             </a:lvl1pPr>
-            <a:lvl2pPr indent="-317500" lvl="1" marL="914400">
+            <a:lvl2pPr marL="914400" lvl="1" indent="-317500">
               <a:lnSpc>
                 <a:spcPct val="115000"/>
               </a:lnSpc>
@@ -7808,7 +8047,7 @@
                 <a:sym typeface="Open Sans"/>
               </a:defRPr>
             </a:lvl2pPr>
-            <a:lvl3pPr indent="-317500" lvl="2" marL="1371600">
+            <a:lvl3pPr marL="1371600" lvl="2" indent="-317500">
               <a:lnSpc>
                 <a:spcPct val="115000"/>
               </a:lnSpc>
@@ -7834,7 +8073,7 @@
                 <a:sym typeface="Open Sans"/>
               </a:defRPr>
             </a:lvl3pPr>
-            <a:lvl4pPr indent="-317500" lvl="3" marL="1828800">
+            <a:lvl4pPr marL="1828800" lvl="3" indent="-317500">
               <a:lnSpc>
                 <a:spcPct val="115000"/>
               </a:lnSpc>
@@ -7860,7 +8099,7 @@
                 <a:sym typeface="Open Sans"/>
               </a:defRPr>
             </a:lvl4pPr>
-            <a:lvl5pPr indent="-317500" lvl="4" marL="2286000">
+            <a:lvl5pPr marL="2286000" lvl="4" indent="-317500">
               <a:lnSpc>
                 <a:spcPct val="115000"/>
               </a:lnSpc>
@@ -7886,7 +8125,7 @@
                 <a:sym typeface="Open Sans"/>
               </a:defRPr>
             </a:lvl5pPr>
-            <a:lvl6pPr indent="-317500" lvl="5" marL="2743200">
+            <a:lvl6pPr marL="2743200" lvl="5" indent="-317500">
               <a:lnSpc>
                 <a:spcPct val="115000"/>
               </a:lnSpc>
@@ -7912,7 +8151,7 @@
                 <a:sym typeface="Open Sans"/>
               </a:defRPr>
             </a:lvl6pPr>
-            <a:lvl7pPr indent="-317500" lvl="6" marL="3200400">
+            <a:lvl7pPr marL="3200400" lvl="6" indent="-317500">
               <a:lnSpc>
                 <a:spcPct val="115000"/>
               </a:lnSpc>
@@ -7938,7 +8177,7 @@
                 <a:sym typeface="Open Sans"/>
               </a:defRPr>
             </a:lvl7pPr>
-            <a:lvl8pPr indent="-317500" lvl="7" marL="3657600">
+            <a:lvl8pPr marL="3657600" lvl="7" indent="-317500">
               <a:lnSpc>
                 <a:spcPct val="115000"/>
               </a:lnSpc>
@@ -7964,7 +8203,7 @@
                 <a:sym typeface="Open Sans"/>
               </a:defRPr>
             </a:lvl8pPr>
-            <a:lvl9pPr indent="-317500" lvl="8" marL="4114800">
+            <a:lvl9pPr marL="4114800" lvl="8" indent="-317500">
               <a:lnSpc>
                 <a:spcPct val="115000"/>
               </a:lnSpc>
@@ -7991,15 +8230,19 @@
               </a:defRPr>
             </a:lvl9pPr>
           </a:lstStyle>
-          <a:p/>
+          <a:p>
+            <a:endParaRPr/>
+          </a:p>
         </p:txBody>
       </p:sp>
       <p:sp>
         <p:nvSpPr>
           <p:cNvPr id="8" name="Google Shape;8;g31dd249a56a_0_178"/>
-          <p:cNvSpPr txBox="1"/>
+          <p:cNvSpPr txBox="1">
+            <a:spLocks noGrp="1"/>
+          </p:cNvSpPr>
           <p:nvPr>
-            <p:ph idx="12" type="sldNum"/>
+            <p:ph type="sldNum" idx="12"/>
           </p:nvPr>
         </p:nvSpPr>
         <p:spPr>
@@ -8016,7 +8259,7 @@
           </a:ln>
         </p:spPr>
         <p:txBody>
-          <a:bodyPr anchorCtr="0" anchor="ctr" bIns="91425" lIns="91425" spcFirstLastPara="1" rIns="91425" wrap="square" tIns="91425">
+          <a:bodyPr spcFirstLastPara="1" wrap="square" lIns="91425" tIns="91425" rIns="91425" bIns="91425" anchor="ctr" anchorCtr="0">
             <a:normAutofit/>
           </a:bodyPr>
           <a:lstStyle>
@@ -8130,7 +8373,7 @@
             </a:lvl9pPr>
           </a:lstStyle>
           <a:p>
-            <a:pPr indent="0" lvl="0" marL="0" rtl="0" algn="r">
+            <a:pPr marL="0" lvl="0" indent="0" algn="r" rtl="0">
               <a:spcBef>
                 <a:spcPts val="0"/>
               </a:spcBef>
@@ -8149,7 +8392,7 @@
       </p:sp>
     </p:spTree>
   </p:cSld>
-  <p:clrMap accent1="accent1" accent2="accent2" accent3="accent3" accent4="accent4" accent5="accent5" accent6="accent6" bg1="lt1" bg2="dk2" tx1="dk1" tx2="lt2" folHlink="folHlink" hlink="hlink"/>
+  <p:clrMap bg1="lt1" tx1="dk1" bg2="dk2" tx2="lt2" accent1="accent1" accent2="accent2" accent3="accent3" accent4="accent4" accent5="accent5" accent6="accent6" hlink="hlink" folHlink="folHlink"/>
   <p:sldLayoutIdLst>
     <p:sldLayoutId id="2147483649" r:id="rId1"/>
     <p:sldLayoutId id="2147483650" r:id="rId2"/>
@@ -8164,10 +8407,10 @@
     <p:sldLayoutId id="2147483659" r:id="rId11"/>
     <p:sldLayoutId id="2147483660" r:id="rId12"/>
   </p:sldLayoutIdLst>
-  <p:hf dt="0" ftr="0" hdr="0" sldNum="0"/>
+  <p:hf sldNum="0" hdr="0" ftr="0" dt="0"/>
   <p:txStyles>
     <p:titleStyle>
-      <a:defPPr lvl="0" marR="0" rtl="0" algn="l">
+      <a:defPPr marR="0" lvl="0" algn="l" rtl="0">
         <a:lnSpc>
           <a:spcPct val="100000"/>
         </a:lnSpc>
@@ -8178,7 +8421,7 @@
           <a:spcPts val="0"/>
         </a:spcAft>
       </a:defPPr>
-      <a:lvl1pPr lvl="0" marR="0" rtl="0" algn="l">
+      <a:lvl1pPr marR="0" lvl="0" algn="l" rtl="0">
         <a:lnSpc>
           <a:spcPct val="100000"/>
         </a:lnSpc>
@@ -8192,7 +8435,7 @@
           <a:srgbClr val="000000"/>
         </a:buClr>
         <a:buFont typeface="Arial"/>
-        <a:defRPr b="0" i="0" sz="1400" u="none" cap="none" strike="noStrike">
+        <a:defRPr sz="1400" b="0" i="0" u="none" strike="noStrike" cap="none">
           <a:solidFill>
             <a:srgbClr val="000000"/>
           </a:solidFill>
@@ -8202,7 +8445,7 @@
           <a:sym typeface="Arial"/>
         </a:defRPr>
       </a:lvl1pPr>
-      <a:lvl2pPr lvl="1" marR="0" rtl="0" algn="l">
+      <a:lvl2pPr marR="0" lvl="1" algn="l" rtl="0">
         <a:lnSpc>
           <a:spcPct val="100000"/>
         </a:lnSpc>
@@ -8216,7 +8459,7 @@
           <a:srgbClr val="000000"/>
         </a:buClr>
         <a:buFont typeface="Arial"/>
-        <a:defRPr b="0" i="0" sz="1400" u="none" cap="none" strike="noStrike">
+        <a:defRPr sz="1400" b="0" i="0" u="none" strike="noStrike" cap="none">
           <a:solidFill>
             <a:srgbClr val="000000"/>
           </a:solidFill>
@@ -8226,7 +8469,7 @@
           <a:sym typeface="Arial"/>
         </a:defRPr>
       </a:lvl2pPr>
-      <a:lvl3pPr lvl="2" marR="0" rtl="0" algn="l">
+      <a:lvl3pPr marR="0" lvl="2" algn="l" rtl="0">
         <a:lnSpc>
           <a:spcPct val="100000"/>
         </a:lnSpc>
@@ -8240,7 +8483,7 @@
           <a:srgbClr val="000000"/>
         </a:buClr>
         <a:buFont typeface="Arial"/>
-        <a:defRPr b="0" i="0" sz="1400" u="none" cap="none" strike="noStrike">
+        <a:defRPr sz="1400" b="0" i="0" u="none" strike="noStrike" cap="none">
           <a:solidFill>
             <a:srgbClr val="000000"/>
           </a:solidFill>
@@ -8250,7 +8493,7 @@
           <a:sym typeface="Arial"/>
         </a:defRPr>
       </a:lvl3pPr>
-      <a:lvl4pPr lvl="3" marR="0" rtl="0" algn="l">
+      <a:lvl4pPr marR="0" lvl="3" algn="l" rtl="0">
         <a:lnSpc>
           <a:spcPct val="100000"/>
         </a:lnSpc>
@@ -8264,7 +8507,7 @@
           <a:srgbClr val="000000"/>
         </a:buClr>
         <a:buFont typeface="Arial"/>
-        <a:defRPr b="0" i="0" sz="1400" u="none" cap="none" strike="noStrike">
+        <a:defRPr sz="1400" b="0" i="0" u="none" strike="noStrike" cap="none">
           <a:solidFill>
             <a:srgbClr val="000000"/>
           </a:solidFill>
@@ -8274,7 +8517,7 @@
           <a:sym typeface="Arial"/>
         </a:defRPr>
       </a:lvl4pPr>
-      <a:lvl5pPr lvl="4" marR="0" rtl="0" algn="l">
+      <a:lvl5pPr marR="0" lvl="4" algn="l" rtl="0">
         <a:lnSpc>
           <a:spcPct val="100000"/>
         </a:lnSpc>
@@ -8288,7 +8531,7 @@
           <a:srgbClr val="000000"/>
         </a:buClr>
         <a:buFont typeface="Arial"/>
-        <a:defRPr b="0" i="0" sz="1400" u="none" cap="none" strike="noStrike">
+        <a:defRPr sz="1400" b="0" i="0" u="none" strike="noStrike" cap="none">
           <a:solidFill>
             <a:srgbClr val="000000"/>
           </a:solidFill>
@@ -8298,7 +8541,7 @@
           <a:sym typeface="Arial"/>
         </a:defRPr>
       </a:lvl5pPr>
-      <a:lvl6pPr lvl="5" marR="0" rtl="0" algn="l">
+      <a:lvl6pPr marR="0" lvl="5" algn="l" rtl="0">
         <a:lnSpc>
           <a:spcPct val="100000"/>
         </a:lnSpc>
@@ -8312,7 +8555,7 @@
           <a:srgbClr val="000000"/>
         </a:buClr>
         <a:buFont typeface="Arial"/>
-        <a:defRPr b="0" i="0" sz="1400" u="none" cap="none" strike="noStrike">
+        <a:defRPr sz="1400" b="0" i="0" u="none" strike="noStrike" cap="none">
           <a:solidFill>
             <a:srgbClr val="000000"/>
           </a:solidFill>
@@ -8322,7 +8565,7 @@
           <a:sym typeface="Arial"/>
         </a:defRPr>
       </a:lvl6pPr>
-      <a:lvl7pPr lvl="6" marR="0" rtl="0" algn="l">
+      <a:lvl7pPr marR="0" lvl="6" algn="l" rtl="0">
         <a:lnSpc>
           <a:spcPct val="100000"/>
         </a:lnSpc>
@@ -8336,7 +8579,7 @@
           <a:srgbClr val="000000"/>
         </a:buClr>
         <a:buFont typeface="Arial"/>
-        <a:defRPr b="0" i="0" sz="1400" u="none" cap="none" strike="noStrike">
+        <a:defRPr sz="1400" b="0" i="0" u="none" strike="noStrike" cap="none">
           <a:solidFill>
             <a:srgbClr val="000000"/>
           </a:solidFill>
@@ -8346,7 +8589,7 @@
           <a:sym typeface="Arial"/>
         </a:defRPr>
       </a:lvl7pPr>
-      <a:lvl8pPr lvl="7" marR="0" rtl="0" algn="l">
+      <a:lvl8pPr marR="0" lvl="7" algn="l" rtl="0">
         <a:lnSpc>
           <a:spcPct val="100000"/>
         </a:lnSpc>
@@ -8360,7 +8603,7 @@
           <a:srgbClr val="000000"/>
         </a:buClr>
         <a:buFont typeface="Arial"/>
-        <a:defRPr b="0" i="0" sz="1400" u="none" cap="none" strike="noStrike">
+        <a:defRPr sz="1400" b="0" i="0" u="none" strike="noStrike" cap="none">
           <a:solidFill>
             <a:srgbClr val="000000"/>
           </a:solidFill>
@@ -8370,7 +8613,7 @@
           <a:sym typeface="Arial"/>
         </a:defRPr>
       </a:lvl8pPr>
-      <a:lvl9pPr lvl="8" marR="0" rtl="0" algn="l">
+      <a:lvl9pPr marR="0" lvl="8" algn="l" rtl="0">
         <a:lnSpc>
           <a:spcPct val="100000"/>
         </a:lnSpc>
@@ -8384,7 +8627,7 @@
           <a:srgbClr val="000000"/>
         </a:buClr>
         <a:buFont typeface="Arial"/>
-        <a:defRPr b="0" i="0" sz="1400" u="none" cap="none" strike="noStrike">
+        <a:defRPr sz="1400" b="0" i="0" u="none" strike="noStrike" cap="none">
           <a:solidFill>
             <a:srgbClr val="000000"/>
           </a:solidFill>
@@ -8396,7 +8639,7 @@
       </a:lvl9pPr>
     </p:titleStyle>
     <p:bodyStyle>
-      <a:defPPr lvl="0" marR="0" rtl="0" algn="l">
+      <a:defPPr marR="0" lvl="0" algn="l" rtl="0">
         <a:lnSpc>
           <a:spcPct val="100000"/>
         </a:lnSpc>
@@ -8407,7 +8650,7 @@
           <a:spcPts val="0"/>
         </a:spcAft>
       </a:defPPr>
-      <a:lvl1pPr lvl="0" marR="0" rtl="0" algn="l">
+      <a:lvl1pPr marR="0" lvl="0" algn="l" rtl="0">
         <a:lnSpc>
           <a:spcPct val="100000"/>
         </a:lnSpc>
@@ -8421,7 +8664,7 @@
           <a:srgbClr val="000000"/>
         </a:buClr>
         <a:buFont typeface="Arial"/>
-        <a:defRPr b="0" i="0" sz="1400" u="none" cap="none" strike="noStrike">
+        <a:defRPr sz="1400" b="0" i="0" u="none" strike="noStrike" cap="none">
           <a:solidFill>
             <a:srgbClr val="000000"/>
           </a:solidFill>
@@ -8431,7 +8674,7 @@
           <a:sym typeface="Arial"/>
         </a:defRPr>
       </a:lvl1pPr>
-      <a:lvl2pPr lvl="1" marR="0" rtl="0" algn="l">
+      <a:lvl2pPr marR="0" lvl="1" algn="l" rtl="0">
         <a:lnSpc>
           <a:spcPct val="100000"/>
         </a:lnSpc>
@@ -8445,7 +8688,7 @@
           <a:srgbClr val="000000"/>
         </a:buClr>
         <a:buFont typeface="Arial"/>
-        <a:defRPr b="0" i="0" sz="1400" u="none" cap="none" strike="noStrike">
+        <a:defRPr sz="1400" b="0" i="0" u="none" strike="noStrike" cap="none">
           <a:solidFill>
             <a:srgbClr val="000000"/>
           </a:solidFill>
@@ -8455,7 +8698,7 @@
           <a:sym typeface="Arial"/>
         </a:defRPr>
       </a:lvl2pPr>
-      <a:lvl3pPr lvl="2" marR="0" rtl="0" algn="l">
+      <a:lvl3pPr marR="0" lvl="2" algn="l" rtl="0">
         <a:lnSpc>
           <a:spcPct val="100000"/>
         </a:lnSpc>
@@ -8469,7 +8712,7 @@
           <a:srgbClr val="000000"/>
         </a:buClr>
         <a:buFont typeface="Arial"/>
-        <a:defRPr b="0" i="0" sz="1400" u="none" cap="none" strike="noStrike">
+        <a:defRPr sz="1400" b="0" i="0" u="none" strike="noStrike" cap="none">
           <a:solidFill>
             <a:srgbClr val="000000"/>
           </a:solidFill>
@@ -8479,7 +8722,7 @@
           <a:sym typeface="Arial"/>
         </a:defRPr>
       </a:lvl3pPr>
-      <a:lvl4pPr lvl="3" marR="0" rtl="0" algn="l">
+      <a:lvl4pPr marR="0" lvl="3" algn="l" rtl="0">
         <a:lnSpc>
           <a:spcPct val="100000"/>
         </a:lnSpc>
@@ -8493,7 +8736,7 @@
           <a:srgbClr val="000000"/>
         </a:buClr>
         <a:buFont typeface="Arial"/>
-        <a:defRPr b="0" i="0" sz="1400" u="none" cap="none" strike="noStrike">
+        <a:defRPr sz="1400" b="0" i="0" u="none" strike="noStrike" cap="none">
           <a:solidFill>
             <a:srgbClr val="000000"/>
           </a:solidFill>
@@ -8503,7 +8746,7 @@
           <a:sym typeface="Arial"/>
         </a:defRPr>
       </a:lvl4pPr>
-      <a:lvl5pPr lvl="4" marR="0" rtl="0" algn="l">
+      <a:lvl5pPr marR="0" lvl="4" algn="l" rtl="0">
         <a:lnSpc>
           <a:spcPct val="100000"/>
         </a:lnSpc>
@@ -8517,7 +8760,7 @@
           <a:srgbClr val="000000"/>
         </a:buClr>
         <a:buFont typeface="Arial"/>
-        <a:defRPr b="0" i="0" sz="1400" u="none" cap="none" strike="noStrike">
+        <a:defRPr sz="1400" b="0" i="0" u="none" strike="noStrike" cap="none">
           <a:solidFill>
             <a:srgbClr val="000000"/>
           </a:solidFill>
@@ -8527,7 +8770,7 @@
           <a:sym typeface="Arial"/>
         </a:defRPr>
       </a:lvl5pPr>
-      <a:lvl6pPr lvl="5" marR="0" rtl="0" algn="l">
+      <a:lvl6pPr marR="0" lvl="5" algn="l" rtl="0">
         <a:lnSpc>
           <a:spcPct val="100000"/>
         </a:lnSpc>
@@ -8541,7 +8784,7 @@
           <a:srgbClr val="000000"/>
         </a:buClr>
         <a:buFont typeface="Arial"/>
-        <a:defRPr b="0" i="0" sz="1400" u="none" cap="none" strike="noStrike">
+        <a:defRPr sz="1400" b="0" i="0" u="none" strike="noStrike" cap="none">
           <a:solidFill>
             <a:srgbClr val="000000"/>
           </a:solidFill>
@@ -8551,7 +8794,7 @@
           <a:sym typeface="Arial"/>
         </a:defRPr>
       </a:lvl6pPr>
-      <a:lvl7pPr lvl="6" marR="0" rtl="0" algn="l">
+      <a:lvl7pPr marR="0" lvl="6" algn="l" rtl="0">
         <a:lnSpc>
           <a:spcPct val="100000"/>
         </a:lnSpc>
@@ -8565,7 +8808,7 @@
           <a:srgbClr val="000000"/>
         </a:buClr>
         <a:buFont typeface="Arial"/>
-        <a:defRPr b="0" i="0" sz="1400" u="none" cap="none" strike="noStrike">
+        <a:defRPr sz="1400" b="0" i="0" u="none" strike="noStrike" cap="none">
           <a:solidFill>
             <a:srgbClr val="000000"/>
           </a:solidFill>
@@ -8575,7 +8818,7 @@
           <a:sym typeface="Arial"/>
         </a:defRPr>
       </a:lvl7pPr>
-      <a:lvl8pPr lvl="7" marR="0" rtl="0" algn="l">
+      <a:lvl8pPr marR="0" lvl="7" algn="l" rtl="0">
         <a:lnSpc>
           <a:spcPct val="100000"/>
         </a:lnSpc>
@@ -8589,7 +8832,7 @@
           <a:srgbClr val="000000"/>
         </a:buClr>
         <a:buFont typeface="Arial"/>
-        <a:defRPr b="0" i="0" sz="1400" u="none" cap="none" strike="noStrike">
+        <a:defRPr sz="1400" b="0" i="0" u="none" strike="noStrike" cap="none">
           <a:solidFill>
             <a:srgbClr val="000000"/>
           </a:solidFill>
@@ -8599,7 +8842,7 @@
           <a:sym typeface="Arial"/>
         </a:defRPr>
       </a:lvl8pPr>
-      <a:lvl9pPr lvl="8" marR="0" rtl="0" algn="l">
+      <a:lvl9pPr marR="0" lvl="8" algn="l" rtl="0">
         <a:lnSpc>
           <a:spcPct val="100000"/>
         </a:lnSpc>
@@ -8613,7 +8856,7 @@
           <a:srgbClr val="000000"/>
         </a:buClr>
         <a:buFont typeface="Arial"/>
-        <a:defRPr b="0" i="0" sz="1400" u="none" cap="none" strike="noStrike">
+        <a:defRPr sz="1400" b="0" i="0" u="none" strike="noStrike" cap="none">
           <a:solidFill>
             <a:srgbClr val="000000"/>
           </a:solidFill>
@@ -8625,7 +8868,7 @@
       </a:lvl9pPr>
     </p:bodyStyle>
     <p:otherStyle>
-      <a:defPPr lvl="0" marR="0" rtl="0" algn="l">
+      <a:defPPr marR="0" lvl="0" algn="l" rtl="0">
         <a:lnSpc>
           <a:spcPct val="100000"/>
         </a:lnSpc>
@@ -8636,7 +8879,7 @@
           <a:spcPts val="0"/>
         </a:spcAft>
       </a:defPPr>
-      <a:lvl1pPr lvl="0" marR="0" rtl="0" algn="l">
+      <a:lvl1pPr marR="0" lvl="0" algn="l" rtl="0">
         <a:lnSpc>
           <a:spcPct val="100000"/>
         </a:lnSpc>
@@ -8650,7 +8893,7 @@
           <a:srgbClr val="000000"/>
         </a:buClr>
         <a:buFont typeface="Arial"/>
-        <a:defRPr b="0" i="0" sz="1400" u="none" cap="none" strike="noStrike">
+        <a:defRPr sz="1400" b="0" i="0" u="none" strike="noStrike" cap="none">
           <a:solidFill>
             <a:srgbClr val="000000"/>
           </a:solidFill>
@@ -8660,7 +8903,7 @@
           <a:sym typeface="Arial"/>
         </a:defRPr>
       </a:lvl1pPr>
-      <a:lvl2pPr lvl="1" marR="0" rtl="0" algn="l">
+      <a:lvl2pPr marR="0" lvl="1" algn="l" rtl="0">
         <a:lnSpc>
           <a:spcPct val="100000"/>
         </a:lnSpc>
@@ -8674,7 +8917,7 @@
           <a:srgbClr val="000000"/>
         </a:buClr>
         <a:buFont typeface="Arial"/>
-        <a:defRPr b="0" i="0" sz="1400" u="none" cap="none" strike="noStrike">
+        <a:defRPr sz="1400" b="0" i="0" u="none" strike="noStrike" cap="none">
           <a:solidFill>
             <a:srgbClr val="000000"/>
           </a:solidFill>
@@ -8684,7 +8927,7 @@
           <a:sym typeface="Arial"/>
         </a:defRPr>
       </a:lvl2pPr>
-      <a:lvl3pPr lvl="2" marR="0" rtl="0" algn="l">
+      <a:lvl3pPr marR="0" lvl="2" algn="l" rtl="0">
         <a:lnSpc>
           <a:spcPct val="100000"/>
         </a:lnSpc>
@@ -8698,7 +8941,7 @@
           <a:srgbClr val="000000"/>
         </a:buClr>
         <a:buFont typeface="Arial"/>
-        <a:defRPr b="0" i="0" sz="1400" u="none" cap="none" strike="noStrike">
+        <a:defRPr sz="1400" b="0" i="0" u="none" strike="noStrike" cap="none">
           <a:solidFill>
             <a:srgbClr val="000000"/>
           </a:solidFill>
@@ -8708,7 +8951,7 @@
           <a:sym typeface="Arial"/>
         </a:defRPr>
       </a:lvl3pPr>
-      <a:lvl4pPr lvl="3" marR="0" rtl="0" algn="l">
+      <a:lvl4pPr marR="0" lvl="3" algn="l" rtl="0">
         <a:lnSpc>
           <a:spcPct val="100000"/>
         </a:lnSpc>
@@ -8722,7 +8965,7 @@
           <a:srgbClr val="000000"/>
         </a:buClr>
         <a:buFont typeface="Arial"/>
-        <a:defRPr b="0" i="0" sz="1400" u="none" cap="none" strike="noStrike">
+        <a:defRPr sz="1400" b="0" i="0" u="none" strike="noStrike" cap="none">
           <a:solidFill>
             <a:srgbClr val="000000"/>
           </a:solidFill>
@@ -8732,7 +8975,7 @@
           <a:sym typeface="Arial"/>
         </a:defRPr>
       </a:lvl4pPr>
-      <a:lvl5pPr lvl="4" marR="0" rtl="0" algn="l">
+      <a:lvl5pPr marR="0" lvl="4" algn="l" rtl="0">
         <a:lnSpc>
           <a:spcPct val="100000"/>
         </a:lnSpc>
@@ -8746,7 +8989,7 @@
           <a:srgbClr val="000000"/>
         </a:buClr>
         <a:buFont typeface="Arial"/>
-        <a:defRPr b="0" i="0" sz="1400" u="none" cap="none" strike="noStrike">
+        <a:defRPr sz="1400" b="0" i="0" u="none" strike="noStrike" cap="none">
           <a:solidFill>
             <a:srgbClr val="000000"/>
           </a:solidFill>
@@ -8756,7 +8999,7 @@
           <a:sym typeface="Arial"/>
         </a:defRPr>
       </a:lvl5pPr>
-      <a:lvl6pPr lvl="5" marR="0" rtl="0" algn="l">
+      <a:lvl6pPr marR="0" lvl="5" algn="l" rtl="0">
         <a:lnSpc>
           <a:spcPct val="100000"/>
         </a:lnSpc>
@@ -8770,7 +9013,7 @@
           <a:srgbClr val="000000"/>
         </a:buClr>
         <a:buFont typeface="Arial"/>
-        <a:defRPr b="0" i="0" sz="1400" u="none" cap="none" strike="noStrike">
+        <a:defRPr sz="1400" b="0" i="0" u="none" strike="noStrike" cap="none">
           <a:solidFill>
             <a:srgbClr val="000000"/>
           </a:solidFill>
@@ -8780,7 +9023,7 @@
           <a:sym typeface="Arial"/>
         </a:defRPr>
       </a:lvl6pPr>
-      <a:lvl7pPr lvl="6" marR="0" rtl="0" algn="l">
+      <a:lvl7pPr marR="0" lvl="6" algn="l" rtl="0">
         <a:lnSpc>
           <a:spcPct val="100000"/>
         </a:lnSpc>
@@ -8794,7 +9037,7 @@
           <a:srgbClr val="000000"/>
         </a:buClr>
         <a:buFont typeface="Arial"/>
-        <a:defRPr b="0" i="0" sz="1400" u="none" cap="none" strike="noStrike">
+        <a:defRPr sz="1400" b="0" i="0" u="none" strike="noStrike" cap="none">
           <a:solidFill>
             <a:srgbClr val="000000"/>
           </a:solidFill>
@@ -8804,7 +9047,7 @@
           <a:sym typeface="Arial"/>
         </a:defRPr>
       </a:lvl7pPr>
-      <a:lvl8pPr lvl="7" marR="0" rtl="0" algn="l">
+      <a:lvl8pPr marR="0" lvl="7" algn="l" rtl="0">
         <a:lnSpc>
           <a:spcPct val="100000"/>
         </a:lnSpc>
@@ -8818,7 +9061,7 @@
           <a:srgbClr val="000000"/>
         </a:buClr>
         <a:buFont typeface="Arial"/>
-        <a:defRPr b="0" i="0" sz="1400" u="none" cap="none" strike="noStrike">
+        <a:defRPr sz="1400" b="0" i="0" u="none" strike="noStrike" cap="none">
           <a:solidFill>
             <a:srgbClr val="000000"/>
           </a:solidFill>
@@ -8828,7 +9071,7 @@
           <a:sym typeface="Arial"/>
         </a:defRPr>
       </a:lvl8pPr>
-      <a:lvl9pPr lvl="8" marR="0" rtl="0" algn="l">
+      <a:lvl9pPr marR="0" lvl="8" algn="l" rtl="0">
         <a:lnSpc>
           <a:spcPct val="100000"/>
         </a:lnSpc>
@@ -8842,7 +9085,7 @@
           <a:srgbClr val="000000"/>
         </a:buClr>
         <a:buFont typeface="Arial"/>
-        <a:defRPr b="0" i="0" sz="1400" u="none" cap="none" strike="noStrike">
+        <a:defRPr sz="1400" b="0" i="0" u="none" strike="noStrike" cap="none">
           <a:solidFill>
             <a:srgbClr val="000000"/>
           </a:solidFill>
@@ -8858,11 +9101,11 @@
 </file>
 
 <file path=ppt/slides/slide1.xml><?xml version="1.0" encoding="utf-8"?>
-<p:sld xmlns:a="http://schemas.openxmlformats.org/drawingml/2006/main" xmlns:r="http://schemas.openxmlformats.org/officeDocument/2006/relationships" xmlns:mc="http://schemas.openxmlformats.org/markup-compatibility/2006" xmlns:mv="urn:schemas-microsoft-com:mac:vml" xmlns:p="http://schemas.openxmlformats.org/presentationml/2006/main" xmlns:c="http://schemas.openxmlformats.org/drawingml/2006/chart" xmlns:dgm="http://schemas.openxmlformats.org/drawingml/2006/diagram" xmlns:o="urn:schemas-microsoft-com:office:office" xmlns:v="urn:schemas-microsoft-com:vml" xmlns:pvml="urn:schemas-microsoft-com:office:powerpoint" xmlns:com="http://schemas.openxmlformats.org/drawingml/2006/compatibility" xmlns:p14="http://schemas.microsoft.com/office/powerpoint/2010/main" xmlns:p15="http://schemas.microsoft.com/office/powerpoint/2012/main" xmlns:ahyp="http://schemas.microsoft.com/office/drawing/2018/hyperlinkcolor">
+<p:sld xmlns:a="http://schemas.openxmlformats.org/drawingml/2006/main" xmlns:r="http://schemas.openxmlformats.org/officeDocument/2006/relationships" xmlns:p="http://schemas.openxmlformats.org/presentationml/2006/main">
   <p:cSld>
     <p:spTree>
       <p:nvGrpSpPr>
-        <p:cNvPr id="67" name="Shape 67"/>
+        <p:cNvPr id="1" name="Shape 67"/>
         <p:cNvGrpSpPr/>
         <p:nvPr/>
       </p:nvGrpSpPr>
@@ -8877,7 +9120,9 @@
       <p:sp>
         <p:nvSpPr>
           <p:cNvPr id="68" name="Google Shape;68;p1"/>
-          <p:cNvSpPr txBox="1"/>
+          <p:cNvSpPr txBox="1">
+            <a:spLocks noGrp="1"/>
+          </p:cNvSpPr>
           <p:nvPr>
             <p:ph type="ctrTitle"/>
           </p:nvPr>
@@ -8896,12 +9141,12 @@
           </a:ln>
         </p:spPr>
         <p:txBody>
-          <a:bodyPr anchorCtr="0" anchor="ctr" bIns="45700" lIns="91425" spcFirstLastPara="1" rIns="91425" wrap="square" tIns="45700">
+          <a:bodyPr spcFirstLastPara="1" wrap="square" lIns="91425" tIns="45700" rIns="91425" bIns="45700" anchor="ctr" anchorCtr="0">
             <a:normAutofit fontScale="90000"/>
           </a:bodyPr>
           <a:lstStyle/>
           <a:p>
-            <a:pPr indent="0" lvl="0" marL="0" rtl="0" algn="ctr">
+            <a:pPr marL="0" lvl="0" indent="0" algn="ctr" rtl="0">
               <a:spcBef>
                 <a:spcPts val="0"/>
               </a:spcBef>
@@ -8934,9 +9179,11 @@
       <p:sp>
         <p:nvSpPr>
           <p:cNvPr id="69" name="Google Shape;69;p1"/>
-          <p:cNvSpPr txBox="1"/>
+          <p:cNvSpPr txBox="1">
+            <a:spLocks noGrp="1"/>
+          </p:cNvSpPr>
           <p:nvPr>
-            <p:ph idx="1" type="subTitle"/>
+            <p:ph type="subTitle" idx="1"/>
           </p:nvPr>
         </p:nvSpPr>
         <p:spPr>
@@ -8953,12 +9200,12 @@
           </a:ln>
         </p:spPr>
         <p:txBody>
-          <a:bodyPr anchorCtr="0" anchor="t" bIns="45700" lIns="91425" spcFirstLastPara="1" rIns="91425" wrap="square" tIns="45700">
-            <a:normAutofit fontScale="92500" lnSpcReduction="20000"/>
+          <a:bodyPr spcFirstLastPara="1" wrap="square" lIns="91425" tIns="45700" rIns="91425" bIns="45700" anchor="t" anchorCtr="0">
+            <a:normAutofit fontScale="92500" lnSpcReduction="10000"/>
           </a:bodyPr>
           <a:lstStyle/>
           <a:p>
-            <a:pPr indent="0" lvl="0" marL="0" rtl="0" algn="ctr">
+            <a:pPr marL="0" lvl="0" indent="0" algn="ctr" rtl="0">
               <a:spcBef>
                 <a:spcPts val="0"/>
               </a:spcBef>
@@ -8972,21 +9219,21 @@
               <a:buNone/>
             </a:pPr>
             <a:r>
-              <a:rPr lang="en-US">
+              <a:rPr lang="en-US" dirty="0">
                 <a:solidFill>
                   <a:srgbClr val="888888"/>
                 </a:solidFill>
               </a:rPr>
               <a:t>A comprehensive project analyzing sentiment and uncovering customer review themes</a:t>
             </a:r>
-            <a:endParaRPr>
+            <a:endParaRPr dirty="0">
               <a:solidFill>
                 <a:srgbClr val="888888"/>
               </a:solidFill>
             </a:endParaRPr>
           </a:p>
           <a:p>
-            <a:pPr indent="0" lvl="0" marL="0" rtl="0" algn="ctr">
+            <a:pPr marL="0" lvl="0" indent="0" algn="ctr" rtl="0">
               <a:spcBef>
                 <a:spcPts val="0"/>
               </a:spcBef>
@@ -8999,17 +9246,14 @@
               <a:buSzPct val="152380"/>
               <a:buNone/>
             </a:pPr>
-            <a:r>
-              <a:t/>
-            </a:r>
-            <a:endParaRPr>
+            <a:endParaRPr dirty="0">
               <a:solidFill>
                 <a:srgbClr val="888888"/>
               </a:solidFill>
             </a:endParaRPr>
           </a:p>
           <a:p>
-            <a:pPr indent="0" lvl="0" marL="0" rtl="0" algn="ctr">
+            <a:pPr marL="0" lvl="0" indent="0" algn="ctr" rtl="0">
               <a:spcBef>
                 <a:spcPts val="0"/>
               </a:spcBef>
@@ -9022,17 +9266,14 @@
               <a:buSzPct val="152380"/>
               <a:buNone/>
             </a:pPr>
-            <a:r>
-              <a:t/>
-            </a:r>
-            <a:endParaRPr>
+            <a:endParaRPr dirty="0">
               <a:solidFill>
                 <a:srgbClr val="888888"/>
               </a:solidFill>
             </a:endParaRPr>
           </a:p>
           <a:p>
-            <a:pPr indent="-351948" lvl="0" marL="457200" rtl="0" algn="ctr">
+            <a:pPr marL="457200" lvl="0" indent="-351948" algn="ctr" rtl="0">
               <a:spcBef>
                 <a:spcPts val="0"/>
               </a:spcBef>
@@ -9051,37 +9292,9 @@
                   <a:srgbClr val="888888"/>
                 </a:solidFill>
               </a:rPr>
-              <a:t>Shubham Patel </a:t>
+              <a:t>Parth Maniar</a:t>
             </a:r>
-            <a:endParaRPr>
-              <a:solidFill>
-                <a:srgbClr val="888888"/>
-              </a:solidFill>
-            </a:endParaRPr>
-          </a:p>
-          <a:p>
-            <a:pPr indent="-351948" lvl="0" marL="457200" rtl="0" algn="ctr">
-              <a:spcBef>
-                <a:spcPts val="0"/>
-              </a:spcBef>
-              <a:spcAft>
-                <a:spcPts val="0"/>
-              </a:spcAft>
-              <a:buClr>
-                <a:srgbClr val="888888"/>
-              </a:buClr>
-              <a:buSzPct val="100000"/>
-              <a:buChar char="-"/>
-            </a:pPr>
-            <a:r>
-              <a:rPr lang="en-US">
-                <a:solidFill>
-                  <a:srgbClr val="888888"/>
-                </a:solidFill>
-              </a:rPr>
-              <a:t>Parth Patel </a:t>
-            </a:r>
-            <a:endParaRPr>
+            <a:endParaRPr dirty="0">
               <a:solidFill>
                 <a:srgbClr val="888888"/>
               </a:solidFill>
@@ -9098,11 +9311,11 @@
 </file>
 
 <file path=ppt/slides/slide10.xml><?xml version="1.0" encoding="utf-8"?>
-<p:sld xmlns:a="http://schemas.openxmlformats.org/drawingml/2006/main" xmlns:r="http://schemas.openxmlformats.org/officeDocument/2006/relationships" xmlns:mc="http://schemas.openxmlformats.org/markup-compatibility/2006" xmlns:mv="urn:schemas-microsoft-com:mac:vml" xmlns:p="http://schemas.openxmlformats.org/presentationml/2006/main" xmlns:c="http://schemas.openxmlformats.org/drawingml/2006/chart" xmlns:dgm="http://schemas.openxmlformats.org/drawingml/2006/diagram" xmlns:o="urn:schemas-microsoft-com:office:office" xmlns:v="urn:schemas-microsoft-com:vml" xmlns:pvml="urn:schemas-microsoft-com:office:powerpoint" xmlns:com="http://schemas.openxmlformats.org/drawingml/2006/compatibility" xmlns:p14="http://schemas.microsoft.com/office/powerpoint/2010/main" xmlns:p15="http://schemas.microsoft.com/office/powerpoint/2012/main" xmlns:ahyp="http://schemas.microsoft.com/office/drawing/2018/hyperlinkcolor">
+<p:sld xmlns:a="http://schemas.openxmlformats.org/drawingml/2006/main" xmlns:r="http://schemas.openxmlformats.org/officeDocument/2006/relationships" xmlns:p="http://schemas.openxmlformats.org/presentationml/2006/main">
   <p:cSld>
     <p:spTree>
       <p:nvGrpSpPr>
-        <p:cNvPr id="127" name="Shape 127"/>
+        <p:cNvPr id="1" name="Shape 127"/>
         <p:cNvGrpSpPr/>
         <p:nvPr/>
       </p:nvGrpSpPr>
@@ -9151,11 +9364,11 @@
 </file>
 
 <file path=ppt/slides/slide11.xml><?xml version="1.0" encoding="utf-8"?>
-<p:sld xmlns:a="http://schemas.openxmlformats.org/drawingml/2006/main" xmlns:r="http://schemas.openxmlformats.org/officeDocument/2006/relationships" xmlns:mc="http://schemas.openxmlformats.org/markup-compatibility/2006" xmlns:mv="urn:schemas-microsoft-com:mac:vml" xmlns:p="http://schemas.openxmlformats.org/presentationml/2006/main" xmlns:c="http://schemas.openxmlformats.org/drawingml/2006/chart" xmlns:dgm="http://schemas.openxmlformats.org/drawingml/2006/diagram" xmlns:o="urn:schemas-microsoft-com:office:office" xmlns:v="urn:schemas-microsoft-com:vml" xmlns:pvml="urn:schemas-microsoft-com:office:powerpoint" xmlns:com="http://schemas.openxmlformats.org/drawingml/2006/compatibility" xmlns:p14="http://schemas.microsoft.com/office/powerpoint/2010/main" xmlns:p15="http://schemas.microsoft.com/office/powerpoint/2012/main" xmlns:ahyp="http://schemas.microsoft.com/office/drawing/2018/hyperlinkcolor">
+<p:sld xmlns:a="http://schemas.openxmlformats.org/drawingml/2006/main" xmlns:r="http://schemas.openxmlformats.org/officeDocument/2006/relationships" xmlns:p="http://schemas.openxmlformats.org/presentationml/2006/main">
   <p:cSld>
     <p:spTree>
       <p:nvGrpSpPr>
-        <p:cNvPr id="132" name="Shape 132"/>
+        <p:cNvPr id="1" name="Shape 132"/>
         <p:cNvGrpSpPr/>
         <p:nvPr/>
       </p:nvGrpSpPr>
@@ -9170,7 +9383,9 @@
       <p:sp>
         <p:nvSpPr>
           <p:cNvPr id="133" name="Google Shape;133;p6"/>
-          <p:cNvSpPr txBox="1"/>
+          <p:cNvSpPr txBox="1">
+            <a:spLocks noGrp="1"/>
+          </p:cNvSpPr>
           <p:nvPr>
             <p:ph type="title"/>
           </p:nvPr>
@@ -9189,12 +9404,12 @@
           </a:ln>
         </p:spPr>
         <p:txBody>
-          <a:bodyPr anchorCtr="0" anchor="ctr" bIns="45700" lIns="91425" spcFirstLastPara="1" rIns="91425" wrap="square" tIns="45700">
+          <a:bodyPr spcFirstLastPara="1" wrap="square" lIns="91425" tIns="45700" rIns="91425" bIns="45700" anchor="ctr" anchorCtr="0">
             <a:normAutofit/>
           </a:bodyPr>
           <a:lstStyle/>
           <a:p>
-            <a:pPr indent="0" lvl="0" marL="0" rtl="0" algn="ctr">
+            <a:pPr marL="0" lvl="0" indent="0" algn="ctr" rtl="0">
               <a:spcBef>
                 <a:spcPts val="0"/>
               </a:spcBef>
@@ -9209,7 +9424,7 @@
               <a:buNone/>
             </a:pPr>
             <a:r>
-              <a:rPr b="1" lang="en-US" sz="3000">
+              <a:rPr lang="en-US" sz="3000" b="1">
                 <a:solidFill>
                   <a:schemeClr val="dk1"/>
                 </a:solidFill>
@@ -9220,7 +9435,7 @@
               </a:rPr>
               <a:t>Sentiment Analysis Results</a:t>
             </a:r>
-            <a:endParaRPr b="1" sz="3000">
+            <a:endParaRPr sz="3000" b="1">
               <a:latin typeface="Open Sans"/>
               <a:ea typeface="Open Sans"/>
               <a:cs typeface="Open Sans"/>
@@ -9232,9 +9447,11 @@
       <p:sp>
         <p:nvSpPr>
           <p:cNvPr id="134" name="Google Shape;134;p6"/>
-          <p:cNvSpPr txBox="1"/>
+          <p:cNvSpPr txBox="1">
+            <a:spLocks noGrp="1"/>
+          </p:cNvSpPr>
           <p:nvPr>
-            <p:ph idx="1" type="body"/>
+            <p:ph type="body" idx="1"/>
           </p:nvPr>
         </p:nvSpPr>
         <p:spPr>
@@ -9251,12 +9468,12 @@
           </a:ln>
         </p:spPr>
         <p:txBody>
-          <a:bodyPr anchorCtr="0" anchor="t" bIns="45700" lIns="91425" spcFirstLastPara="1" rIns="91425" wrap="square" tIns="45700">
+          <a:bodyPr spcFirstLastPara="1" wrap="square" lIns="91425" tIns="45700" rIns="91425" bIns="45700" anchor="t" anchorCtr="0">
             <a:normAutofit fontScale="70000" lnSpcReduction="10000"/>
           </a:bodyPr>
           <a:lstStyle/>
           <a:p>
-            <a:pPr indent="-246380" lvl="0" marL="342900" rtl="0" algn="l">
+            <a:pPr marL="342900" lvl="0" indent="-246380" algn="l" rtl="0">
               <a:spcBef>
                 <a:spcPts val="0"/>
               </a:spcBef>
@@ -9284,7 +9501,7 @@
             <a:endParaRPr sz="2400"/>
           </a:p>
           <a:p>
-            <a:pPr indent="457200" lvl="0" marL="457200" rtl="0" algn="l">
+            <a:pPr marL="457200" lvl="0" indent="457200" algn="l" rtl="0">
               <a:spcBef>
                 <a:spcPts val="640"/>
               </a:spcBef>
@@ -9306,7 +9523,7 @@
               <a:t>  </a:t>
             </a:r>
             <a:r>
-              <a:rPr b="1" lang="en-US" sz="2400">
+              <a:rPr lang="en-US" sz="2400" b="1">
                 <a:solidFill>
                   <a:schemeClr val="dk1"/>
                 </a:solidFill>
@@ -9332,7 +9549,7 @@
             <a:endParaRPr sz="2400"/>
           </a:p>
           <a:p>
-            <a:pPr indent="0" lvl="0" marL="0" rtl="0" algn="l">
+            <a:pPr marL="0" lvl="0" indent="0" algn="l" rtl="0">
               <a:spcBef>
                 <a:spcPts val="640"/>
               </a:spcBef>
@@ -9363,7 +9580,7 @@
               <a:t>  	  </a:t>
             </a:r>
             <a:r>
-              <a:rPr b="1" lang="en-US" sz="2400">
+              <a:rPr lang="en-US" sz="2400" b="1">
                 <a:solidFill>
                   <a:schemeClr val="dk1"/>
                 </a:solidFill>
@@ -9389,7 +9606,7 @@
             <a:endParaRPr sz="2400"/>
           </a:p>
           <a:p>
-            <a:pPr indent="0" lvl="0" marL="342900" rtl="0" algn="l">
+            <a:pPr marL="342900" lvl="0" indent="0" algn="l" rtl="0">
               <a:spcBef>
                 <a:spcPts val="640"/>
               </a:spcBef>
@@ -9420,7 +9637,7 @@
               <a:t>  </a:t>
             </a:r>
             <a:r>
-              <a:rPr b="1" lang="en-US" sz="2400">
+              <a:rPr lang="en-US" sz="2400" b="1">
                 <a:solidFill>
                   <a:schemeClr val="dk1"/>
                 </a:solidFill>
@@ -9454,7 +9671,7 @@
             </a:endParaRPr>
           </a:p>
           <a:p>
-            <a:pPr indent="0" lvl="0" marL="342900" rtl="0" algn="l">
+            <a:pPr marL="342900" lvl="0" indent="0" algn="l" rtl="0">
               <a:spcBef>
                 <a:spcPts val="640"/>
               </a:spcBef>
@@ -9463,9 +9680,6 @@
               </a:spcAft>
               <a:buNone/>
             </a:pPr>
-            <a:r>
-              <a:t/>
-            </a:r>
             <a:endParaRPr sz="2400">
               <a:latin typeface="Calibri"/>
               <a:ea typeface="Calibri"/>
@@ -9474,7 +9688,7 @@
             </a:endParaRPr>
           </a:p>
           <a:p>
-            <a:pPr indent="0" lvl="0" marL="342900" rtl="0" algn="l">
+            <a:pPr marL="342900" lvl="0" indent="0" algn="l" rtl="0">
               <a:spcBef>
                 <a:spcPts val="640"/>
               </a:spcBef>
@@ -9484,7 +9698,7 @@
               <a:buNone/>
             </a:pPr>
             <a:r>
-              <a:rPr b="1" lang="en-US" sz="2400">
+              <a:rPr lang="en-US" sz="2400" b="1">
                 <a:latin typeface="Calibri"/>
                 <a:ea typeface="Calibri"/>
                 <a:cs typeface="Calibri"/>
@@ -9509,7 +9723,7 @@
             </a:endParaRPr>
           </a:p>
           <a:p>
-            <a:pPr indent="0" lvl="0" marL="342900" rtl="0" algn="l">
+            <a:pPr marL="342900" lvl="0" indent="0" algn="l" rtl="0">
               <a:spcBef>
                 <a:spcPts val="640"/>
               </a:spcBef>
@@ -9523,9 +9737,6 @@
               <a:buFont typeface="Arial"/>
               <a:buNone/>
             </a:pPr>
-            <a:r>
-              <a:t/>
-            </a:r>
             <a:endParaRPr sz="2400">
               <a:latin typeface="Calibri"/>
               <a:ea typeface="Calibri"/>
@@ -9534,7 +9745,7 @@
             </a:endParaRPr>
           </a:p>
           <a:p>
-            <a:pPr indent="0" lvl="0" marL="342900" rtl="0" algn="l">
+            <a:pPr marL="342900" lvl="0" indent="0" algn="l" rtl="0">
               <a:spcBef>
                 <a:spcPts val="640"/>
               </a:spcBef>
@@ -9565,7 +9776,7 @@
             </a:endParaRPr>
           </a:p>
           <a:p>
-            <a:pPr indent="0" lvl="0" marL="342900" rtl="0" algn="l">
+            <a:pPr marL="342900" lvl="0" indent="0" algn="l" rtl="0">
               <a:spcBef>
                 <a:spcPts val="640"/>
               </a:spcBef>
@@ -9596,7 +9807,7 @@
             </a:endParaRPr>
           </a:p>
           <a:p>
-            <a:pPr indent="0" lvl="0" marL="342900" rtl="0" algn="l">
+            <a:pPr marL="342900" lvl="0" indent="0" algn="l" rtl="0">
               <a:spcBef>
                 <a:spcPts val="640"/>
               </a:spcBef>
@@ -9605,9 +9816,6 @@
               </a:spcAft>
               <a:buNone/>
             </a:pPr>
-            <a:r>
-              <a:t/>
-            </a:r>
             <a:endParaRPr sz="2400">
               <a:latin typeface="Calibri"/>
               <a:ea typeface="Calibri"/>
@@ -9616,7 +9824,7 @@
             </a:endParaRPr>
           </a:p>
           <a:p>
-            <a:pPr indent="0" lvl="0" marL="342900" rtl="0" algn="l">
+            <a:pPr marL="342900" lvl="0" indent="0" algn="l" rtl="0">
               <a:spcBef>
                 <a:spcPts val="640"/>
               </a:spcBef>
@@ -9625,9 +9833,6 @@
               </a:spcAft>
               <a:buNone/>
             </a:pPr>
-            <a:r>
-              <a:t/>
-            </a:r>
             <a:endParaRPr sz="2400"/>
           </a:p>
         </p:txBody>
@@ -9669,11 +9874,11 @@
 </file>
 
 <file path=ppt/slides/slide12.xml><?xml version="1.0" encoding="utf-8"?>
-<p:sld xmlns:a="http://schemas.openxmlformats.org/drawingml/2006/main" xmlns:r="http://schemas.openxmlformats.org/officeDocument/2006/relationships" xmlns:mc="http://schemas.openxmlformats.org/markup-compatibility/2006" xmlns:mv="urn:schemas-microsoft-com:mac:vml" xmlns:p="http://schemas.openxmlformats.org/presentationml/2006/main" xmlns:c="http://schemas.openxmlformats.org/drawingml/2006/chart" xmlns:dgm="http://schemas.openxmlformats.org/drawingml/2006/diagram" xmlns:o="urn:schemas-microsoft-com:office:office" xmlns:v="urn:schemas-microsoft-com:vml" xmlns:pvml="urn:schemas-microsoft-com:office:powerpoint" xmlns:com="http://schemas.openxmlformats.org/drawingml/2006/compatibility" xmlns:p14="http://schemas.microsoft.com/office/powerpoint/2010/main" xmlns:p15="http://schemas.microsoft.com/office/powerpoint/2012/main" xmlns:ahyp="http://schemas.microsoft.com/office/drawing/2018/hyperlinkcolor">
+<p:sld xmlns:a="http://schemas.openxmlformats.org/drawingml/2006/main" xmlns:r="http://schemas.openxmlformats.org/officeDocument/2006/relationships" xmlns:p="http://schemas.openxmlformats.org/presentationml/2006/main">
   <p:cSld>
     <p:spTree>
       <p:nvGrpSpPr>
-        <p:cNvPr id="139" name="Shape 139"/>
+        <p:cNvPr id="1" name="Shape 139"/>
         <p:cNvGrpSpPr/>
         <p:nvPr/>
       </p:nvGrpSpPr>
@@ -9688,7 +9893,9 @@
       <p:sp>
         <p:nvSpPr>
           <p:cNvPr id="140" name="Google Shape;140;p7"/>
-          <p:cNvSpPr txBox="1"/>
+          <p:cNvSpPr txBox="1">
+            <a:spLocks noGrp="1"/>
+          </p:cNvSpPr>
           <p:nvPr>
             <p:ph type="title"/>
           </p:nvPr>
@@ -9707,12 +9914,12 @@
           </a:ln>
         </p:spPr>
         <p:txBody>
-          <a:bodyPr anchorCtr="0" anchor="ctr" bIns="45700" lIns="91425" spcFirstLastPara="1" rIns="91425" wrap="square" tIns="45700">
+          <a:bodyPr spcFirstLastPara="1" wrap="square" lIns="91425" tIns="45700" rIns="91425" bIns="45700" anchor="ctr" anchorCtr="0">
             <a:normAutofit/>
           </a:bodyPr>
           <a:lstStyle/>
           <a:p>
-            <a:pPr indent="0" lvl="0" marL="0" rtl="0" algn="ctr">
+            <a:pPr marL="0" lvl="0" indent="0" algn="ctr" rtl="0">
               <a:spcBef>
                 <a:spcPts val="0"/>
               </a:spcBef>
@@ -9727,7 +9934,7 @@
               <a:buNone/>
             </a:pPr>
             <a:r>
-              <a:rPr b="1" lang="en-US" sz="3000">
+              <a:rPr lang="en-US" sz="3000" b="1">
                 <a:solidFill>
                   <a:schemeClr val="dk1"/>
                 </a:solidFill>
@@ -9738,7 +9945,7 @@
               </a:rPr>
               <a:t>Topic Modeling</a:t>
             </a:r>
-            <a:endParaRPr b="1" sz="3000">
+            <a:endParaRPr sz="3000" b="1">
               <a:latin typeface="Open Sans"/>
               <a:ea typeface="Open Sans"/>
               <a:cs typeface="Open Sans"/>
@@ -9750,9 +9957,11 @@
       <p:sp>
         <p:nvSpPr>
           <p:cNvPr id="141" name="Google Shape;141;p7"/>
-          <p:cNvSpPr txBox="1"/>
+          <p:cNvSpPr txBox="1">
+            <a:spLocks noGrp="1"/>
+          </p:cNvSpPr>
           <p:nvPr>
-            <p:ph idx="1" type="body"/>
+            <p:ph type="body" idx="1"/>
           </p:nvPr>
         </p:nvSpPr>
         <p:spPr>
@@ -9769,12 +9978,12 @@
           </a:ln>
         </p:spPr>
         <p:txBody>
-          <a:bodyPr anchorCtr="0" anchor="t" bIns="45700" lIns="91425" spcFirstLastPara="1" rIns="91425" wrap="square" tIns="45700">
+          <a:bodyPr spcFirstLastPara="1" wrap="square" lIns="91425" tIns="45700" rIns="91425" bIns="45700" anchor="t" anchorCtr="0">
             <a:normAutofit fontScale="85000" lnSpcReduction="20000"/>
           </a:bodyPr>
           <a:lstStyle/>
           <a:p>
-            <a:pPr indent="-269240" lvl="0" marL="342900" rtl="0" algn="l">
+            <a:pPr marL="342900" lvl="0" indent="-269240" algn="l" rtl="0">
               <a:spcBef>
                 <a:spcPts val="0"/>
               </a:spcBef>
@@ -9797,36 +10006,12 @@
                 <a:cs typeface="Calibri"/>
                 <a:sym typeface="Calibri"/>
               </a:rPr>
-              <a:t> Used </a:t>
-            </a:r>
-            <a:r>
-              <a:rPr lang="en-US" sz="2400">
-                <a:solidFill>
-                  <a:schemeClr val="dk1"/>
-                </a:solidFill>
-                <a:latin typeface="Calibri"/>
-                <a:ea typeface="Calibri"/>
-                <a:cs typeface="Calibri"/>
-                <a:sym typeface="Calibri"/>
-              </a:rPr>
-              <a:t>Latent Dirichlet Allocation</a:t>
-            </a:r>
-            <a:r>
-              <a:rPr lang="en-US" sz="2400">
-                <a:solidFill>
-                  <a:schemeClr val="dk1"/>
-                </a:solidFill>
-                <a:latin typeface="Calibri"/>
-                <a:ea typeface="Calibri"/>
-                <a:cs typeface="Calibri"/>
-                <a:sym typeface="Calibri"/>
-              </a:rPr>
-              <a:t> (LDA).</a:t>
+              <a:t> Used Latent Dirichlet Allocation (LDA).</a:t>
             </a:r>
             <a:endParaRPr sz="2400"/>
           </a:p>
           <a:p>
-            <a:pPr indent="-269240" lvl="0" marL="342900" rtl="0" algn="l">
+            <a:pPr marL="342900" lvl="0" indent="-269240" algn="l" rtl="0">
               <a:spcBef>
                 <a:spcPts val="640"/>
               </a:spcBef>
@@ -9854,7 +10039,7 @@
             <a:endParaRPr sz="2400"/>
           </a:p>
           <a:p>
-            <a:pPr indent="0" lvl="0" marL="342900" rtl="0" algn="l">
+            <a:pPr marL="342900" lvl="0" indent="0" algn="l" rtl="0">
               <a:spcBef>
                 <a:spcPts val="640"/>
               </a:spcBef>
@@ -9878,7 +10063,7 @@
             <a:endParaRPr sz="2400"/>
           </a:p>
           <a:p>
-            <a:pPr indent="0" lvl="0" marL="342900" rtl="0" algn="l">
+            <a:pPr marL="342900" lvl="0" indent="0" algn="l" rtl="0">
               <a:spcBef>
                 <a:spcPts val="640"/>
               </a:spcBef>
@@ -9902,7 +10087,7 @@
             <a:endParaRPr sz="2400"/>
           </a:p>
           <a:p>
-            <a:pPr indent="0" lvl="0" marL="342900" rtl="0" algn="l">
+            <a:pPr marL="342900" lvl="0" indent="0" algn="l" rtl="0">
               <a:spcBef>
                 <a:spcPts val="640"/>
               </a:spcBef>
@@ -9926,7 +10111,7 @@
             <a:endParaRPr sz="2400"/>
           </a:p>
           <a:p>
-            <a:pPr indent="0" lvl="0" marL="342900" rtl="0" algn="l">
+            <a:pPr marL="342900" lvl="0" indent="0" algn="l" rtl="0">
               <a:spcBef>
                 <a:spcPts val="640"/>
               </a:spcBef>
@@ -9950,7 +10135,7 @@
             <a:endParaRPr sz="2400"/>
           </a:p>
           <a:p>
-            <a:pPr indent="0" lvl="0" marL="342900" rtl="0" algn="l">
+            <a:pPr marL="342900" lvl="0" indent="0" algn="l" rtl="0">
               <a:spcBef>
                 <a:spcPts val="640"/>
               </a:spcBef>
@@ -10012,11 +10197,11 @@
 </file>
 
 <file path=ppt/slides/slide13.xml><?xml version="1.0" encoding="utf-8"?>
-<p:sld xmlns:a="http://schemas.openxmlformats.org/drawingml/2006/main" xmlns:r="http://schemas.openxmlformats.org/officeDocument/2006/relationships" xmlns:mc="http://schemas.openxmlformats.org/markup-compatibility/2006" xmlns:mv="urn:schemas-microsoft-com:mac:vml" xmlns:p="http://schemas.openxmlformats.org/presentationml/2006/main" xmlns:c="http://schemas.openxmlformats.org/drawingml/2006/chart" xmlns:dgm="http://schemas.openxmlformats.org/drawingml/2006/diagram" xmlns:o="urn:schemas-microsoft-com:office:office" xmlns:v="urn:schemas-microsoft-com:vml" xmlns:pvml="urn:schemas-microsoft-com:office:powerpoint" xmlns:com="http://schemas.openxmlformats.org/drawingml/2006/compatibility" xmlns:p14="http://schemas.microsoft.com/office/powerpoint/2010/main" xmlns:p15="http://schemas.microsoft.com/office/powerpoint/2012/main" xmlns:ahyp="http://schemas.microsoft.com/office/drawing/2018/hyperlinkcolor">
+<p:sld xmlns:a="http://schemas.openxmlformats.org/drawingml/2006/main" xmlns:r="http://schemas.openxmlformats.org/officeDocument/2006/relationships" xmlns:p="http://schemas.openxmlformats.org/presentationml/2006/main">
   <p:cSld>
     <p:spTree>
       <p:nvGrpSpPr>
-        <p:cNvPr id="146" name="Shape 146"/>
+        <p:cNvPr id="1" name="Shape 146"/>
         <p:cNvGrpSpPr/>
         <p:nvPr/>
       </p:nvGrpSpPr>
@@ -10031,7 +10216,9 @@
       <p:sp>
         <p:nvSpPr>
           <p:cNvPr id="147" name="Google Shape;147;p8"/>
-          <p:cNvSpPr txBox="1"/>
+          <p:cNvSpPr txBox="1">
+            <a:spLocks noGrp="1"/>
+          </p:cNvSpPr>
           <p:nvPr>
             <p:ph type="title"/>
           </p:nvPr>
@@ -10050,12 +10237,12 @@
           </a:ln>
         </p:spPr>
         <p:txBody>
-          <a:bodyPr anchorCtr="0" anchor="ctr" bIns="45700" lIns="91425" spcFirstLastPara="1" rIns="91425" wrap="square" tIns="45700">
+          <a:bodyPr spcFirstLastPara="1" wrap="square" lIns="91425" tIns="45700" rIns="91425" bIns="45700" anchor="ctr" anchorCtr="0">
             <a:normAutofit/>
           </a:bodyPr>
           <a:lstStyle/>
           <a:p>
-            <a:pPr indent="0" lvl="0" marL="0" rtl="0" algn="ctr">
+            <a:pPr marL="0" lvl="0" indent="0" algn="ctr" rtl="0">
               <a:spcBef>
                 <a:spcPts val="0"/>
               </a:spcBef>
@@ -10070,7 +10257,7 @@
               <a:buNone/>
             </a:pPr>
             <a:r>
-              <a:rPr b="1" lang="en-US" sz="3000">
+              <a:rPr lang="en-US" sz="3000" b="1">
                 <a:solidFill>
                   <a:schemeClr val="dk1"/>
                 </a:solidFill>
@@ -10081,7 +10268,7 @@
               </a:rPr>
               <a:t>Key Insights</a:t>
             </a:r>
-            <a:endParaRPr b="1" sz="3000">
+            <a:endParaRPr sz="3000" b="1">
               <a:latin typeface="Open Sans"/>
               <a:ea typeface="Open Sans"/>
               <a:cs typeface="Open Sans"/>
@@ -10093,9 +10280,11 @@
       <p:sp>
         <p:nvSpPr>
           <p:cNvPr id="148" name="Google Shape;148;p8"/>
-          <p:cNvSpPr txBox="1"/>
+          <p:cNvSpPr txBox="1">
+            <a:spLocks noGrp="1"/>
+          </p:cNvSpPr>
           <p:nvPr>
-            <p:ph idx="1" type="body"/>
+            <p:ph type="body" idx="1"/>
           </p:nvPr>
         </p:nvSpPr>
         <p:spPr>
@@ -10112,12 +10301,12 @@
           </a:ln>
         </p:spPr>
         <p:txBody>
-          <a:bodyPr anchorCtr="0" anchor="t" bIns="45700" lIns="91425" spcFirstLastPara="1" rIns="91425" wrap="square" tIns="45700">
+          <a:bodyPr spcFirstLastPara="1" wrap="square" lIns="91425" tIns="45700" rIns="91425" bIns="45700" anchor="t" anchorCtr="0">
             <a:normAutofit/>
           </a:bodyPr>
           <a:lstStyle/>
           <a:p>
-            <a:pPr indent="-342900" lvl="0" marL="342900" rtl="0" algn="l">
+            <a:pPr marL="342900" lvl="0" indent="-342900" algn="l" rtl="0">
               <a:spcBef>
                 <a:spcPts val="640"/>
               </a:spcBef>
@@ -10145,7 +10334,7 @@
             <a:endParaRPr/>
           </a:p>
           <a:p>
-            <a:pPr indent="-342900" lvl="0" marL="342900" rtl="0" algn="l">
+            <a:pPr marL="342900" lvl="0" indent="-342900" algn="l" rtl="0">
               <a:spcBef>
                 <a:spcPts val="640"/>
               </a:spcBef>
@@ -10183,11 +10372,11 @@
 </file>
 
 <file path=ppt/slides/slide14.xml><?xml version="1.0" encoding="utf-8"?>
-<p:sld xmlns:a="http://schemas.openxmlformats.org/drawingml/2006/main" xmlns:r="http://schemas.openxmlformats.org/officeDocument/2006/relationships" xmlns:mc="http://schemas.openxmlformats.org/markup-compatibility/2006" xmlns:mv="urn:schemas-microsoft-com:mac:vml" xmlns:p="http://schemas.openxmlformats.org/presentationml/2006/main" xmlns:c="http://schemas.openxmlformats.org/drawingml/2006/chart" xmlns:dgm="http://schemas.openxmlformats.org/drawingml/2006/diagram" xmlns:o="urn:schemas-microsoft-com:office:office" xmlns:v="urn:schemas-microsoft-com:vml" xmlns:pvml="urn:schemas-microsoft-com:office:powerpoint" xmlns:com="http://schemas.openxmlformats.org/drawingml/2006/compatibility" xmlns:p14="http://schemas.microsoft.com/office/powerpoint/2010/main" xmlns:p15="http://schemas.microsoft.com/office/powerpoint/2012/main" xmlns:ahyp="http://schemas.microsoft.com/office/drawing/2018/hyperlinkcolor">
+<p:sld xmlns:a="http://schemas.openxmlformats.org/drawingml/2006/main" xmlns:r="http://schemas.openxmlformats.org/officeDocument/2006/relationships" xmlns:p="http://schemas.openxmlformats.org/presentationml/2006/main">
   <p:cSld>
     <p:spTree>
       <p:nvGrpSpPr>
-        <p:cNvPr id="152" name="Shape 152"/>
+        <p:cNvPr id="1" name="Shape 152"/>
         <p:cNvGrpSpPr/>
         <p:nvPr/>
       </p:nvGrpSpPr>
@@ -10202,7 +10391,9 @@
       <p:sp>
         <p:nvSpPr>
           <p:cNvPr id="153" name="Google Shape;153;p9"/>
-          <p:cNvSpPr txBox="1"/>
+          <p:cNvSpPr txBox="1">
+            <a:spLocks noGrp="1"/>
+          </p:cNvSpPr>
           <p:nvPr>
             <p:ph type="title"/>
           </p:nvPr>
@@ -10221,12 +10412,12 @@
           </a:ln>
         </p:spPr>
         <p:txBody>
-          <a:bodyPr anchorCtr="0" anchor="ctr" bIns="45700" lIns="91425" spcFirstLastPara="1" rIns="91425" wrap="square" tIns="45700">
+          <a:bodyPr spcFirstLastPara="1" wrap="square" lIns="91425" tIns="45700" rIns="91425" bIns="45700" anchor="ctr" anchorCtr="0">
             <a:normAutofit/>
           </a:bodyPr>
           <a:lstStyle/>
           <a:p>
-            <a:pPr indent="0" lvl="0" marL="0" rtl="0" algn="ctr">
+            <a:pPr marL="0" lvl="0" indent="0" algn="ctr" rtl="0">
               <a:spcBef>
                 <a:spcPts val="0"/>
               </a:spcBef>
@@ -10259,9 +10450,11 @@
       <p:sp>
         <p:nvSpPr>
           <p:cNvPr id="154" name="Google Shape;154;p9"/>
-          <p:cNvSpPr txBox="1"/>
+          <p:cNvSpPr txBox="1">
+            <a:spLocks noGrp="1"/>
+          </p:cNvSpPr>
           <p:nvPr>
-            <p:ph idx="1" type="body"/>
+            <p:ph type="body" idx="1"/>
           </p:nvPr>
         </p:nvSpPr>
         <p:spPr>
@@ -10278,12 +10471,12 @@
           </a:ln>
         </p:spPr>
         <p:txBody>
-          <a:bodyPr anchorCtr="0" anchor="t" bIns="45700" lIns="91425" spcFirstLastPara="1" rIns="91425" wrap="square" tIns="45700">
+          <a:bodyPr spcFirstLastPara="1" wrap="square" lIns="91425" tIns="45700" rIns="91425" bIns="45700" anchor="t" anchorCtr="0">
             <a:normAutofit/>
           </a:bodyPr>
           <a:lstStyle/>
           <a:p>
-            <a:pPr indent="-342900" lvl="0" marL="342900" rtl="0" algn="l">
+            <a:pPr marL="342900" lvl="0" indent="-342900" algn="l" rtl="0">
               <a:spcBef>
                 <a:spcPts val="0"/>
               </a:spcBef>
@@ -10320,7 +10513,7 @@
             <a:endParaRPr/>
           </a:p>
           <a:p>
-            <a:pPr indent="-342900" lvl="0" marL="342900" rtl="0" algn="l">
+            <a:pPr marL="342900" lvl="0" indent="-342900" algn="l" rtl="0">
               <a:spcBef>
                 <a:spcPts val="640"/>
               </a:spcBef>
@@ -10357,7 +10550,7 @@
             <a:endParaRPr/>
           </a:p>
           <a:p>
-            <a:pPr indent="-342900" lvl="0" marL="342900" rtl="0" algn="l">
+            <a:pPr marL="342900" lvl="0" indent="-342900" algn="l" rtl="0">
               <a:spcBef>
                 <a:spcPts val="640"/>
               </a:spcBef>
@@ -10404,11 +10597,11 @@
 </file>
 
 <file path=ppt/slides/slide15.xml><?xml version="1.0" encoding="utf-8"?>
-<p:sld xmlns:a="http://schemas.openxmlformats.org/drawingml/2006/main" xmlns:r="http://schemas.openxmlformats.org/officeDocument/2006/relationships" xmlns:mc="http://schemas.openxmlformats.org/markup-compatibility/2006" xmlns:mv="urn:schemas-microsoft-com:mac:vml" xmlns:p="http://schemas.openxmlformats.org/presentationml/2006/main" xmlns:c="http://schemas.openxmlformats.org/drawingml/2006/chart" xmlns:dgm="http://schemas.openxmlformats.org/drawingml/2006/diagram" xmlns:o="urn:schemas-microsoft-com:office:office" xmlns:v="urn:schemas-microsoft-com:vml" xmlns:pvml="urn:schemas-microsoft-com:office:powerpoint" xmlns:com="http://schemas.openxmlformats.org/drawingml/2006/compatibility" xmlns:p14="http://schemas.microsoft.com/office/powerpoint/2010/main" xmlns:p15="http://schemas.microsoft.com/office/powerpoint/2012/main" xmlns:ahyp="http://schemas.microsoft.com/office/drawing/2018/hyperlinkcolor">
+<p:sld xmlns:a="http://schemas.openxmlformats.org/drawingml/2006/main" xmlns:r="http://schemas.openxmlformats.org/officeDocument/2006/relationships" xmlns:p="http://schemas.openxmlformats.org/presentationml/2006/main">
   <p:cSld>
     <p:spTree>
       <p:nvGrpSpPr>
-        <p:cNvPr id="158" name="Shape 158"/>
+        <p:cNvPr id="1" name="Shape 158"/>
         <p:cNvGrpSpPr/>
         <p:nvPr/>
       </p:nvGrpSpPr>
@@ -10423,7 +10616,9 @@
       <p:sp>
         <p:nvSpPr>
           <p:cNvPr id="159" name="Google Shape;159;g31dd249a56a_0_245"/>
-          <p:cNvSpPr txBox="1"/>
+          <p:cNvSpPr txBox="1">
+            <a:spLocks noGrp="1"/>
+          </p:cNvSpPr>
           <p:nvPr>
             <p:ph type="title"/>
           </p:nvPr>
@@ -10438,12 +10633,12 @@
           </a:prstGeom>
         </p:spPr>
         <p:txBody>
-          <a:bodyPr anchorCtr="0" anchor="b" bIns="91425" lIns="91425" spcFirstLastPara="1" rIns="91425" wrap="square" tIns="91425">
+          <a:bodyPr spcFirstLastPara="1" wrap="square" lIns="91425" tIns="91425" rIns="91425" bIns="91425" anchor="b" anchorCtr="0">
             <a:normAutofit/>
           </a:bodyPr>
           <a:lstStyle/>
           <a:p>
-            <a:pPr indent="0" lvl="0" marL="342900" rtl="0" algn="l">
+            <a:pPr marL="342900" lvl="0" indent="0" algn="l" rtl="0">
               <a:lnSpc>
                 <a:spcPct val="115000"/>
               </a:lnSpc>
@@ -10456,7 +10651,7 @@
               <a:buNone/>
             </a:pPr>
             <a:r>
-              <a:rPr b="1" lang="en-US" sz="3000">
+              <a:rPr lang="en-US" sz="3000" b="1">
                 <a:latin typeface="Calibri"/>
                 <a:ea typeface="Calibri"/>
                 <a:cs typeface="Calibri"/>
@@ -10464,7 +10659,7 @@
               </a:rPr>
               <a:t>Sentiment distribution bar chart.</a:t>
             </a:r>
-            <a:endParaRPr b="1" sz="3000"/>
+            <a:endParaRPr sz="3000" b="1"/>
           </a:p>
         </p:txBody>
       </p:sp>
@@ -10505,11 +10700,11 @@
 </file>
 
 <file path=ppt/slides/slide16.xml><?xml version="1.0" encoding="utf-8"?>
-<p:sld xmlns:a="http://schemas.openxmlformats.org/drawingml/2006/main" xmlns:r="http://schemas.openxmlformats.org/officeDocument/2006/relationships" xmlns:mc="http://schemas.openxmlformats.org/markup-compatibility/2006" xmlns:mv="urn:schemas-microsoft-com:mac:vml" xmlns:p="http://schemas.openxmlformats.org/presentationml/2006/main" xmlns:c="http://schemas.openxmlformats.org/drawingml/2006/chart" xmlns:dgm="http://schemas.openxmlformats.org/drawingml/2006/diagram" xmlns:o="urn:schemas-microsoft-com:office:office" xmlns:v="urn:schemas-microsoft-com:vml" xmlns:pvml="urn:schemas-microsoft-com:office:powerpoint" xmlns:com="http://schemas.openxmlformats.org/drawingml/2006/compatibility" xmlns:p14="http://schemas.microsoft.com/office/powerpoint/2010/main" xmlns:p15="http://schemas.microsoft.com/office/powerpoint/2012/main" xmlns:ahyp="http://schemas.microsoft.com/office/drawing/2018/hyperlinkcolor">
+<p:sld xmlns:a="http://schemas.openxmlformats.org/drawingml/2006/main" xmlns:r="http://schemas.openxmlformats.org/officeDocument/2006/relationships" xmlns:p="http://schemas.openxmlformats.org/presentationml/2006/main">
   <p:cSld>
     <p:spTree>
       <p:nvGrpSpPr>
-        <p:cNvPr id="164" name="Shape 164"/>
+        <p:cNvPr id="1" name="Shape 164"/>
         <p:cNvGrpSpPr/>
         <p:nvPr/>
       </p:nvGrpSpPr>
@@ -10524,7 +10719,9 @@
       <p:sp>
         <p:nvSpPr>
           <p:cNvPr id="165" name="Google Shape;165;g31dd249a56a_0_241"/>
-          <p:cNvSpPr txBox="1"/>
+          <p:cNvSpPr txBox="1">
+            <a:spLocks noGrp="1"/>
+          </p:cNvSpPr>
           <p:nvPr>
             <p:ph type="title"/>
           </p:nvPr>
@@ -10539,12 +10736,12 @@
           </a:prstGeom>
         </p:spPr>
         <p:txBody>
-          <a:bodyPr anchorCtr="0" anchor="b" bIns="91425" lIns="91425" spcFirstLastPara="1" rIns="91425" wrap="square" tIns="91425">
+          <a:bodyPr spcFirstLastPara="1" wrap="square" lIns="91425" tIns="91425" rIns="91425" bIns="91425" anchor="b" anchorCtr="0">
             <a:normAutofit fontScale="90000"/>
           </a:bodyPr>
           <a:lstStyle/>
           <a:p>
-            <a:pPr indent="0" lvl="0" marL="0" rtl="0" algn="l">
+            <a:pPr marL="0" lvl="0" indent="0" algn="l" rtl="0">
               <a:lnSpc>
                 <a:spcPct val="115000"/>
               </a:lnSpc>
@@ -10557,7 +10754,7 @@
               <a:buNone/>
             </a:pPr>
             <a:r>
-              <a:rPr b="1" lang="en-US" sz="3000">
+              <a:rPr lang="en-US" sz="3000" b="1">
                 <a:latin typeface="Calibri"/>
                 <a:ea typeface="Calibri"/>
                 <a:cs typeface="Calibri"/>
@@ -10565,7 +10762,7 @@
               </a:rPr>
               <a:t> Word cloud for frequent terms.</a:t>
             </a:r>
-            <a:endParaRPr b="1" sz="3000"/>
+            <a:endParaRPr sz="3000" b="1"/>
           </a:p>
         </p:txBody>
       </p:sp>
@@ -10606,11 +10803,11 @@
 </file>
 
 <file path=ppt/slides/slide17.xml><?xml version="1.0" encoding="utf-8"?>
-<p:sld xmlns:a="http://schemas.openxmlformats.org/drawingml/2006/main" xmlns:r="http://schemas.openxmlformats.org/officeDocument/2006/relationships" xmlns:mc="http://schemas.openxmlformats.org/markup-compatibility/2006" xmlns:mv="urn:schemas-microsoft-com:mac:vml" xmlns:p="http://schemas.openxmlformats.org/presentationml/2006/main" xmlns:c="http://schemas.openxmlformats.org/drawingml/2006/chart" xmlns:dgm="http://schemas.openxmlformats.org/drawingml/2006/diagram" xmlns:o="urn:schemas-microsoft-com:office:office" xmlns:v="urn:schemas-microsoft-com:vml" xmlns:pvml="urn:schemas-microsoft-com:office:powerpoint" xmlns:com="http://schemas.openxmlformats.org/drawingml/2006/compatibility" xmlns:p14="http://schemas.microsoft.com/office/powerpoint/2010/main" xmlns:p15="http://schemas.microsoft.com/office/powerpoint/2012/main" xmlns:ahyp="http://schemas.microsoft.com/office/drawing/2018/hyperlinkcolor">
+<p:sld xmlns:a="http://schemas.openxmlformats.org/drawingml/2006/main" xmlns:r="http://schemas.openxmlformats.org/officeDocument/2006/relationships" xmlns:p="http://schemas.openxmlformats.org/presentationml/2006/main">
   <p:cSld>
     <p:spTree>
       <p:nvGrpSpPr>
-        <p:cNvPr id="170" name="Shape 170"/>
+        <p:cNvPr id="1" name="Shape 170"/>
         <p:cNvGrpSpPr/>
         <p:nvPr/>
       </p:nvGrpSpPr>
@@ -10625,7 +10822,9 @@
       <p:sp>
         <p:nvSpPr>
           <p:cNvPr id="171" name="Google Shape;171;g31dd249a56a_0_237"/>
-          <p:cNvSpPr txBox="1"/>
+          <p:cNvSpPr txBox="1">
+            <a:spLocks noGrp="1"/>
+          </p:cNvSpPr>
           <p:nvPr>
             <p:ph type="title"/>
           </p:nvPr>
@@ -10640,12 +10839,12 @@
           </a:prstGeom>
         </p:spPr>
         <p:txBody>
-          <a:bodyPr anchorCtr="0" anchor="b" bIns="91425" lIns="91425" spcFirstLastPara="1" rIns="91425" wrap="square" tIns="91425">
+          <a:bodyPr spcFirstLastPara="1" wrap="square" lIns="91425" tIns="91425" rIns="91425" bIns="91425" anchor="b" anchorCtr="0">
             <a:normAutofit/>
           </a:bodyPr>
           <a:lstStyle/>
           <a:p>
-            <a:pPr indent="0" lvl="0" marL="0" rtl="0" algn="l">
+            <a:pPr marL="0" lvl="0" indent="0" algn="l" rtl="0">
               <a:lnSpc>
                 <a:spcPct val="115000"/>
               </a:lnSpc>
@@ -10658,7 +10857,7 @@
               <a:buNone/>
             </a:pPr>
             <a:r>
-              <a:rPr b="1" lang="en-US" sz="3200">
+              <a:rPr lang="en-US" sz="3200" b="1">
                 <a:latin typeface="Calibri"/>
                 <a:ea typeface="Calibri"/>
                 <a:cs typeface="Calibri"/>
@@ -10707,11 +10906,11 @@
 </file>
 
 <file path=ppt/slides/slide18.xml><?xml version="1.0" encoding="utf-8"?>
-<p:sld xmlns:a="http://schemas.openxmlformats.org/drawingml/2006/main" xmlns:r="http://schemas.openxmlformats.org/officeDocument/2006/relationships" xmlns:mc="http://schemas.openxmlformats.org/markup-compatibility/2006" xmlns:mv="urn:schemas-microsoft-com:mac:vml" xmlns:p="http://schemas.openxmlformats.org/presentationml/2006/main" xmlns:c="http://schemas.openxmlformats.org/drawingml/2006/chart" xmlns:dgm="http://schemas.openxmlformats.org/drawingml/2006/diagram" xmlns:o="urn:schemas-microsoft-com:office:office" xmlns:v="urn:schemas-microsoft-com:vml" xmlns:pvml="urn:schemas-microsoft-com:office:powerpoint" xmlns:com="http://schemas.openxmlformats.org/drawingml/2006/compatibility" xmlns:p14="http://schemas.microsoft.com/office/powerpoint/2010/main" xmlns:p15="http://schemas.microsoft.com/office/powerpoint/2012/main" xmlns:ahyp="http://schemas.microsoft.com/office/drawing/2018/hyperlinkcolor">
+<p:sld xmlns:a="http://schemas.openxmlformats.org/drawingml/2006/main" xmlns:r="http://schemas.openxmlformats.org/officeDocument/2006/relationships" xmlns:p="http://schemas.openxmlformats.org/presentationml/2006/main">
   <p:cSld>
     <p:spTree>
       <p:nvGrpSpPr>
-        <p:cNvPr id="176" name="Shape 176"/>
+        <p:cNvPr id="1" name="Shape 176"/>
         <p:cNvGrpSpPr/>
         <p:nvPr/>
       </p:nvGrpSpPr>
@@ -10726,7 +10925,9 @@
       <p:sp>
         <p:nvSpPr>
           <p:cNvPr id="177" name="Google Shape;177;g2d6bcb803ff_0_11"/>
-          <p:cNvSpPr txBox="1"/>
+          <p:cNvSpPr txBox="1">
+            <a:spLocks noGrp="1"/>
+          </p:cNvSpPr>
           <p:nvPr>
             <p:ph type="title"/>
           </p:nvPr>
@@ -10745,12 +10946,12 @@
           </a:ln>
         </p:spPr>
         <p:txBody>
-          <a:bodyPr anchorCtr="0" anchor="ctr" bIns="45700" lIns="91425" spcFirstLastPara="1" rIns="91425" wrap="square" tIns="45700">
+          <a:bodyPr spcFirstLastPara="1" wrap="square" lIns="91425" tIns="45700" rIns="91425" bIns="45700" anchor="ctr" anchorCtr="0">
             <a:normAutofit/>
           </a:bodyPr>
           <a:lstStyle/>
           <a:p>
-            <a:pPr indent="0" lvl="0" marL="0" rtl="0" algn="ctr">
+            <a:pPr marL="0" lvl="0" indent="0" algn="ctr" rtl="0">
               <a:spcBef>
                 <a:spcPts val="0"/>
               </a:spcBef>
@@ -10765,7 +10966,7 @@
               <a:buNone/>
             </a:pPr>
             <a:r>
-              <a:rPr b="1" lang="en-US" sz="3000">
+              <a:rPr lang="en-US" sz="3000" b="1">
                 <a:latin typeface="Calibri"/>
                 <a:ea typeface="Calibri"/>
                 <a:cs typeface="Calibri"/>
@@ -10773,16 +10974,18 @@
               </a:rPr>
               <a:t>Further Work  and lesson learned</a:t>
             </a:r>
-            <a:endParaRPr b="1" sz="3000"/>
+            <a:endParaRPr sz="3000" b="1"/>
           </a:p>
         </p:txBody>
       </p:sp>
       <p:sp>
         <p:nvSpPr>
           <p:cNvPr id="178" name="Google Shape;178;g2d6bcb803ff_0_11"/>
-          <p:cNvSpPr txBox="1"/>
+          <p:cNvSpPr txBox="1">
+            <a:spLocks noGrp="1"/>
+          </p:cNvSpPr>
           <p:nvPr>
-            <p:ph idx="1" type="body"/>
+            <p:ph type="body" idx="1"/>
           </p:nvPr>
         </p:nvSpPr>
         <p:spPr>
@@ -10799,12 +11002,12 @@
           </a:ln>
         </p:spPr>
         <p:txBody>
-          <a:bodyPr anchorCtr="0" anchor="t" bIns="45700" lIns="91425" spcFirstLastPara="1" rIns="91425" wrap="square" tIns="45700">
+          <a:bodyPr spcFirstLastPara="1" wrap="square" lIns="91425" tIns="45700" rIns="91425" bIns="45700" anchor="t" anchorCtr="0">
             <a:normAutofit/>
           </a:bodyPr>
           <a:lstStyle/>
           <a:p>
-            <a:pPr indent="-381000" lvl="0" marL="457200" rtl="0" algn="l">
+            <a:pPr marL="457200" lvl="0" indent="-381000" algn="l" rtl="0">
               <a:spcBef>
                 <a:spcPts val="640"/>
               </a:spcBef>
@@ -10816,20 +11019,12 @@
             </a:pPr>
             <a:r>
               <a:rPr lang="en-US" sz="2400"/>
-              <a:t>Need to address data imbalance by </a:t>
-            </a:r>
-            <a:r>
-              <a:rPr lang="en-US" sz="2400"/>
-              <a:t>using</a:t>
-            </a:r>
-            <a:r>
-              <a:rPr lang="en-US" sz="2400"/>
-              <a:t> different techniques.</a:t>
+              <a:t>Need to address data imbalance by using different techniques.</a:t>
             </a:r>
             <a:endParaRPr sz="2400"/>
           </a:p>
           <a:p>
-            <a:pPr indent="-381000" lvl="0" marL="457200" rtl="0" algn="l">
+            <a:pPr marL="457200" lvl="0" indent="-381000" algn="l" rtl="0">
               <a:spcBef>
                 <a:spcPts val="0"/>
               </a:spcBef>
@@ -10847,7 +11042,7 @@
               <a:rPr lang="en-US" sz="2400">
                 <a:extLst>
                   <a:ext uri="http://customooxmlschemas.google.com/">
-                    <go:slidesCustomData xmlns:go="http://customooxmlschemas.google.com/" textRoundtripDataId="0"/>
+                    <go:slidesCustomData xmlns="" xmlns:mc="http://schemas.openxmlformats.org/markup-compatibility/2006" xmlns:mv="urn:schemas-microsoft-com:mac:vml" xmlns:c="http://schemas.openxmlformats.org/drawingml/2006/chart" xmlns:dgm="http://schemas.openxmlformats.org/drawingml/2006/diagram" xmlns:o="urn:schemas-microsoft-com:office:office" xmlns:v="urn:schemas-microsoft-com:vml" xmlns:pvml="urn:schemas-microsoft-com:office:powerpoint" xmlns:com="http://schemas.openxmlformats.org/drawingml/2006/compatibility" xmlns:p14="http://schemas.microsoft.com/office/powerpoint/2010/main" xmlns:p15="http://schemas.microsoft.com/office/powerpoint/2012/main" xmlns:ahyp="http://schemas.microsoft.com/office/drawing/2018/hyperlinkcolor" xmlns:go="http://customooxmlschemas.google.com/" textRoundtripDataId="0"/>
                   </a:ext>
                 </a:extLst>
               </a:rPr>
@@ -10860,7 +11055,7 @@
             <a:endParaRPr sz="2400"/>
           </a:p>
           <a:p>
-            <a:pPr indent="-381000" lvl="0" marL="457200" rtl="0" algn="l">
+            <a:pPr marL="457200" lvl="0" indent="-381000" algn="l" rtl="0">
               <a:spcBef>
                 <a:spcPts val="0"/>
               </a:spcBef>
@@ -10887,11 +11082,11 @@
 </file>
 
 <file path=ppt/slides/slide19.xml><?xml version="1.0" encoding="utf-8"?>
-<p:sld xmlns:a="http://schemas.openxmlformats.org/drawingml/2006/main" xmlns:r="http://schemas.openxmlformats.org/officeDocument/2006/relationships" xmlns:mc="http://schemas.openxmlformats.org/markup-compatibility/2006" xmlns:mv="urn:schemas-microsoft-com:mac:vml" xmlns:p="http://schemas.openxmlformats.org/presentationml/2006/main" xmlns:c="http://schemas.openxmlformats.org/drawingml/2006/chart" xmlns:dgm="http://schemas.openxmlformats.org/drawingml/2006/diagram" xmlns:o="urn:schemas-microsoft-com:office:office" xmlns:v="urn:schemas-microsoft-com:vml" xmlns:pvml="urn:schemas-microsoft-com:office:powerpoint" xmlns:com="http://schemas.openxmlformats.org/drawingml/2006/compatibility" xmlns:p14="http://schemas.microsoft.com/office/powerpoint/2010/main" xmlns:p15="http://schemas.microsoft.com/office/powerpoint/2012/main" xmlns:ahyp="http://schemas.microsoft.com/office/drawing/2018/hyperlinkcolor">
+<p:sld xmlns:a="http://schemas.openxmlformats.org/drawingml/2006/main" xmlns:r="http://schemas.openxmlformats.org/officeDocument/2006/relationships" xmlns:p="http://schemas.openxmlformats.org/presentationml/2006/main">
   <p:cSld>
     <p:spTree>
       <p:nvGrpSpPr>
-        <p:cNvPr id="182" name="Shape 182"/>
+        <p:cNvPr id="1" name="Shape 182"/>
         <p:cNvGrpSpPr/>
         <p:nvPr/>
       </p:nvGrpSpPr>
@@ -10906,7 +11101,9 @@
       <p:sp>
         <p:nvSpPr>
           <p:cNvPr id="183" name="Google Shape;183;p10"/>
-          <p:cNvSpPr txBox="1"/>
+          <p:cNvSpPr txBox="1">
+            <a:spLocks noGrp="1"/>
+          </p:cNvSpPr>
           <p:nvPr>
             <p:ph type="title"/>
           </p:nvPr>
@@ -10925,12 +11122,12 @@
           </a:ln>
         </p:spPr>
         <p:txBody>
-          <a:bodyPr anchorCtr="0" anchor="ctr" bIns="45700" lIns="91425" spcFirstLastPara="1" rIns="91425" wrap="square" tIns="45700">
+          <a:bodyPr spcFirstLastPara="1" wrap="square" lIns="91425" tIns="45700" rIns="91425" bIns="45700" anchor="ctr" anchorCtr="0">
             <a:normAutofit/>
           </a:bodyPr>
           <a:lstStyle/>
           <a:p>
-            <a:pPr indent="0" lvl="0" marL="0" rtl="0" algn="ctr">
+            <a:pPr marL="0" lvl="0" indent="0" algn="ctr" rtl="0">
               <a:spcBef>
                 <a:spcPts val="0"/>
               </a:spcBef>
@@ -10963,9 +11160,11 @@
       <p:sp>
         <p:nvSpPr>
           <p:cNvPr id="184" name="Google Shape;184;p10"/>
-          <p:cNvSpPr txBox="1"/>
+          <p:cNvSpPr txBox="1">
+            <a:spLocks noGrp="1"/>
+          </p:cNvSpPr>
           <p:nvPr>
-            <p:ph idx="1" type="body"/>
+            <p:ph type="body" idx="1"/>
           </p:nvPr>
         </p:nvSpPr>
         <p:spPr>
@@ -10982,12 +11181,12 @@
           </a:ln>
         </p:spPr>
         <p:txBody>
-          <a:bodyPr anchorCtr="0" anchor="t" bIns="45700" lIns="91425" spcFirstLastPara="1" rIns="91425" wrap="square" tIns="45700">
+          <a:bodyPr spcFirstLastPara="1" wrap="square" lIns="91425" tIns="45700" rIns="91425" bIns="45700" anchor="t" anchorCtr="0">
             <a:normAutofit/>
           </a:bodyPr>
           <a:lstStyle/>
           <a:p>
-            <a:pPr indent="-381000" lvl="0" marL="342900" rtl="0" algn="l">
+            <a:pPr marL="342900" lvl="0" indent="-381000" algn="l" rtl="0">
               <a:spcBef>
                 <a:spcPts val="640"/>
               </a:spcBef>
@@ -11014,7 +11213,7 @@
             </a:endParaRPr>
           </a:p>
           <a:p>
-            <a:pPr indent="-381000" lvl="0" marL="342900" rtl="0" algn="l">
+            <a:pPr marL="342900" lvl="0" indent="-381000" algn="l" rtl="0">
               <a:spcBef>
                 <a:spcPts val="1200"/>
               </a:spcBef>
@@ -11041,7 +11240,7 @@
             </a:endParaRPr>
           </a:p>
           <a:p>
-            <a:pPr indent="-381000" lvl="0" marL="342900" rtl="0" algn="l">
+            <a:pPr marL="342900" lvl="0" indent="-381000" algn="l" rtl="0">
               <a:spcBef>
                 <a:spcPts val="1200"/>
               </a:spcBef>
@@ -11078,11 +11277,11 @@
 </file>
 
 <file path=ppt/slides/slide2.xml><?xml version="1.0" encoding="utf-8"?>
-<p:sld xmlns:a="http://schemas.openxmlformats.org/drawingml/2006/main" xmlns:r="http://schemas.openxmlformats.org/officeDocument/2006/relationships" xmlns:mc="http://schemas.openxmlformats.org/markup-compatibility/2006" xmlns:mv="urn:schemas-microsoft-com:mac:vml" xmlns:p="http://schemas.openxmlformats.org/presentationml/2006/main" xmlns:c="http://schemas.openxmlformats.org/drawingml/2006/chart" xmlns:dgm="http://schemas.openxmlformats.org/drawingml/2006/diagram" xmlns:o="urn:schemas-microsoft-com:office:office" xmlns:v="urn:schemas-microsoft-com:vml" xmlns:pvml="urn:schemas-microsoft-com:office:powerpoint" xmlns:com="http://schemas.openxmlformats.org/drawingml/2006/compatibility" xmlns:p14="http://schemas.microsoft.com/office/powerpoint/2010/main" xmlns:p15="http://schemas.microsoft.com/office/powerpoint/2012/main" xmlns:ahyp="http://schemas.microsoft.com/office/drawing/2018/hyperlinkcolor">
+<p:sld xmlns:a="http://schemas.openxmlformats.org/drawingml/2006/main" xmlns:r="http://schemas.openxmlformats.org/officeDocument/2006/relationships" xmlns:p="http://schemas.openxmlformats.org/presentationml/2006/main">
   <p:cSld>
     <p:spTree>
       <p:nvGrpSpPr>
-        <p:cNvPr id="73" name="Shape 73"/>
+        <p:cNvPr id="1" name="Shape 73"/>
         <p:cNvGrpSpPr/>
         <p:nvPr/>
       </p:nvGrpSpPr>
@@ -11097,7 +11296,9 @@
       <p:sp>
         <p:nvSpPr>
           <p:cNvPr id="74" name="Google Shape;74;p2"/>
-          <p:cNvSpPr txBox="1"/>
+          <p:cNvSpPr txBox="1">
+            <a:spLocks noGrp="1"/>
+          </p:cNvSpPr>
           <p:nvPr>
             <p:ph type="title"/>
           </p:nvPr>
@@ -11116,12 +11317,12 @@
           </a:ln>
         </p:spPr>
         <p:txBody>
-          <a:bodyPr anchorCtr="0" anchor="ctr" bIns="45700" lIns="91425" spcFirstLastPara="1" rIns="91425" wrap="square" tIns="45700">
+          <a:bodyPr spcFirstLastPara="1" wrap="square" lIns="91425" tIns="45700" rIns="91425" bIns="45700" anchor="ctr" anchorCtr="0">
             <a:normAutofit/>
           </a:bodyPr>
           <a:lstStyle/>
           <a:p>
-            <a:pPr indent="0" lvl="0" marL="0" rtl="0" algn="ctr">
+            <a:pPr marL="0" lvl="0" indent="0" algn="ctr" rtl="0">
               <a:spcBef>
                 <a:spcPts val="0"/>
               </a:spcBef>
@@ -11159,9 +11360,11 @@
       <p:sp>
         <p:nvSpPr>
           <p:cNvPr id="75" name="Google Shape;75;p2"/>
-          <p:cNvSpPr txBox="1"/>
+          <p:cNvSpPr txBox="1">
+            <a:spLocks noGrp="1"/>
+          </p:cNvSpPr>
           <p:nvPr>
-            <p:ph idx="1" type="body"/>
+            <p:ph type="body" idx="1"/>
           </p:nvPr>
         </p:nvSpPr>
         <p:spPr>
@@ -11178,12 +11381,12 @@
           </a:ln>
         </p:spPr>
         <p:txBody>
-          <a:bodyPr anchorCtr="0" anchor="t" bIns="45700" lIns="91425" spcFirstLastPara="1" rIns="91425" wrap="square" tIns="45700">
+          <a:bodyPr spcFirstLastPara="1" wrap="square" lIns="91425" tIns="45700" rIns="91425" bIns="45700" anchor="t" anchorCtr="0">
             <a:normAutofit/>
           </a:bodyPr>
           <a:lstStyle/>
           <a:p>
-            <a:pPr indent="-292100" lvl="0" marL="342900" rtl="0" algn="l">
+            <a:pPr marL="342900" lvl="0" indent="-292100" algn="l" rtl="0">
               <a:lnSpc>
                 <a:spcPct val="105000"/>
               </a:lnSpc>
@@ -11210,7 +11413,7 @@
             <a:endParaRPr sz="2400"/>
           </a:p>
           <a:p>
-            <a:pPr indent="-292100" lvl="0" marL="342900" rtl="0" algn="l">
+            <a:pPr marL="342900" lvl="0" indent="-292100" algn="l" rtl="0">
               <a:lnSpc>
                 <a:spcPct val="105000"/>
               </a:lnSpc>
@@ -11237,7 +11440,7 @@
             <a:endParaRPr sz="2400"/>
           </a:p>
           <a:p>
-            <a:pPr indent="-292100" lvl="0" marL="342900" rtl="0" algn="l">
+            <a:pPr marL="342900" lvl="0" indent="-292100" algn="l" rtl="0">
               <a:lnSpc>
                 <a:spcPct val="105000"/>
               </a:lnSpc>
@@ -11274,11 +11477,11 @@
 </file>
 
 <file path=ppt/slides/slide20.xml><?xml version="1.0" encoding="utf-8"?>
-<p:sld xmlns:a="http://schemas.openxmlformats.org/drawingml/2006/main" xmlns:r="http://schemas.openxmlformats.org/officeDocument/2006/relationships" xmlns:mc="http://schemas.openxmlformats.org/markup-compatibility/2006" xmlns:mv="urn:schemas-microsoft-com:mac:vml" xmlns:p="http://schemas.openxmlformats.org/presentationml/2006/main" xmlns:c="http://schemas.openxmlformats.org/drawingml/2006/chart" xmlns:dgm="http://schemas.openxmlformats.org/drawingml/2006/diagram" xmlns:o="urn:schemas-microsoft-com:office:office" xmlns:v="urn:schemas-microsoft-com:vml" xmlns:pvml="urn:schemas-microsoft-com:office:powerpoint" xmlns:com="http://schemas.openxmlformats.org/drawingml/2006/compatibility" xmlns:p14="http://schemas.microsoft.com/office/powerpoint/2010/main" xmlns:p15="http://schemas.microsoft.com/office/powerpoint/2012/main" xmlns:ahyp="http://schemas.microsoft.com/office/drawing/2018/hyperlinkcolor">
+<p:sld xmlns:a="http://schemas.openxmlformats.org/drawingml/2006/main" xmlns:r="http://schemas.openxmlformats.org/officeDocument/2006/relationships" xmlns:p="http://schemas.openxmlformats.org/presentationml/2006/main">
   <p:cSld>
     <p:spTree>
       <p:nvGrpSpPr>
-        <p:cNvPr id="188" name="Shape 188"/>
+        <p:cNvPr id="1" name="Shape 188"/>
         <p:cNvGrpSpPr/>
         <p:nvPr/>
       </p:nvGrpSpPr>
@@ -11293,7 +11496,9 @@
       <p:sp>
         <p:nvSpPr>
           <p:cNvPr id="189" name="Google Shape;189;g31dbdd1e1a3_0_68"/>
-          <p:cNvSpPr txBox="1"/>
+          <p:cNvSpPr txBox="1">
+            <a:spLocks noGrp="1"/>
+          </p:cNvSpPr>
           <p:nvPr>
             <p:ph type="title"/>
           </p:nvPr>
@@ -11308,12 +11513,12 @@
           </a:prstGeom>
         </p:spPr>
         <p:txBody>
-          <a:bodyPr anchorCtr="0" anchor="ctr" bIns="45700" lIns="91425" spcFirstLastPara="1" rIns="91425" wrap="square" tIns="45700">
+          <a:bodyPr spcFirstLastPara="1" wrap="square" lIns="91425" tIns="45700" rIns="91425" bIns="45700" anchor="ctr" anchorCtr="0">
             <a:normAutofit/>
           </a:bodyPr>
           <a:lstStyle/>
           <a:p>
-            <a:pPr indent="0" lvl="0" marL="0" rtl="0" algn="ctr">
+            <a:pPr marL="0" lvl="0" indent="0" algn="ctr" rtl="0">
               <a:spcBef>
                 <a:spcPts val="0"/>
               </a:spcBef>
@@ -11333,9 +11538,11 @@
       <p:sp>
         <p:nvSpPr>
           <p:cNvPr id="190" name="Google Shape;190;g31dbdd1e1a3_0_68"/>
-          <p:cNvSpPr txBox="1"/>
+          <p:cNvSpPr txBox="1">
+            <a:spLocks noGrp="1"/>
+          </p:cNvSpPr>
           <p:nvPr>
-            <p:ph idx="1" type="body"/>
+            <p:ph type="body" idx="1"/>
           </p:nvPr>
         </p:nvSpPr>
         <p:spPr>
@@ -11348,12 +11555,12 @@
           </a:prstGeom>
         </p:spPr>
         <p:txBody>
-          <a:bodyPr anchorCtr="0" anchor="t" bIns="45700" lIns="91425" spcFirstLastPara="1" rIns="91425" wrap="square" tIns="45700">
+          <a:bodyPr spcFirstLastPara="1" wrap="square" lIns="91425" tIns="45700" rIns="91425" bIns="45700" anchor="t" anchorCtr="0">
             <a:normAutofit/>
           </a:bodyPr>
           <a:lstStyle/>
           <a:p>
-            <a:pPr indent="-342900" lvl="0" marL="457200" rtl="0" algn="l">
+            <a:pPr marL="457200" lvl="0" indent="-342900" algn="l" rtl="0">
               <a:spcBef>
                 <a:spcPts val="360"/>
               </a:spcBef>
@@ -11375,7 +11582,7 @@
             <a:endParaRPr/>
           </a:p>
           <a:p>
-            <a:pPr indent="-342900" lvl="0" marL="457200" rtl="0" algn="l">
+            <a:pPr marL="457200" lvl="0" indent="-342900" algn="l" rtl="0">
               <a:spcBef>
                 <a:spcPts val="0"/>
               </a:spcBef>
@@ -11397,7 +11604,7 @@
             <a:endParaRPr/>
           </a:p>
           <a:p>
-            <a:pPr indent="-342900" lvl="0" marL="457200" rtl="0" algn="l">
+            <a:pPr marL="457200" lvl="0" indent="-342900" algn="l" rtl="0">
               <a:spcBef>
                 <a:spcPts val="0"/>
               </a:spcBef>
@@ -11419,7 +11626,7 @@
             <a:endParaRPr/>
           </a:p>
           <a:p>
-            <a:pPr indent="-342900" lvl="0" marL="457200" rtl="0" algn="l">
+            <a:pPr marL="457200" lvl="0" indent="-342900" algn="l" rtl="0">
               <a:spcBef>
                 <a:spcPts val="0"/>
               </a:spcBef>
@@ -11429,9 +11636,6 @@
               <a:buSzPts val="1800"/>
               <a:buChar char="-"/>
             </a:pPr>
-            <a:r>
-              <a:t/>
-            </a:r>
             <a:endParaRPr/>
           </a:p>
         </p:txBody>
@@ -11445,11 +11649,11 @@
 </file>
 
 <file path=ppt/slides/slide3.xml><?xml version="1.0" encoding="utf-8"?>
-<p:sld xmlns:a="http://schemas.openxmlformats.org/drawingml/2006/main" xmlns:r="http://schemas.openxmlformats.org/officeDocument/2006/relationships" xmlns:mc="http://schemas.openxmlformats.org/markup-compatibility/2006" xmlns:mv="urn:schemas-microsoft-com:mac:vml" xmlns:p="http://schemas.openxmlformats.org/presentationml/2006/main" xmlns:c="http://schemas.openxmlformats.org/drawingml/2006/chart" xmlns:dgm="http://schemas.openxmlformats.org/drawingml/2006/diagram" xmlns:o="urn:schemas-microsoft-com:office:office" xmlns:v="urn:schemas-microsoft-com:vml" xmlns:pvml="urn:schemas-microsoft-com:office:powerpoint" xmlns:com="http://schemas.openxmlformats.org/drawingml/2006/compatibility" xmlns:p14="http://schemas.microsoft.com/office/powerpoint/2010/main" xmlns:p15="http://schemas.microsoft.com/office/powerpoint/2012/main" xmlns:ahyp="http://schemas.microsoft.com/office/drawing/2018/hyperlinkcolor">
+<p:sld xmlns:a="http://schemas.openxmlformats.org/drawingml/2006/main" xmlns:r="http://schemas.openxmlformats.org/officeDocument/2006/relationships" xmlns:p="http://schemas.openxmlformats.org/presentationml/2006/main">
   <p:cSld>
     <p:spTree>
       <p:nvGrpSpPr>
-        <p:cNvPr id="79" name="Shape 79"/>
+        <p:cNvPr id="1" name="Shape 79"/>
         <p:cNvGrpSpPr/>
         <p:nvPr/>
       </p:nvGrpSpPr>
@@ -11464,7 +11668,9 @@
       <p:sp>
         <p:nvSpPr>
           <p:cNvPr id="80" name="Google Shape;80;g31dbdd1e1a3_0_0"/>
-          <p:cNvSpPr txBox="1"/>
+          <p:cNvSpPr txBox="1">
+            <a:spLocks noGrp="1"/>
+          </p:cNvSpPr>
           <p:nvPr>
             <p:ph type="title"/>
           </p:nvPr>
@@ -11479,12 +11685,12 @@
           </a:prstGeom>
         </p:spPr>
         <p:txBody>
-          <a:bodyPr anchorCtr="0" anchor="ctr" bIns="45700" lIns="91425" spcFirstLastPara="1" rIns="91425" wrap="square" tIns="45700">
+          <a:bodyPr spcFirstLastPara="1" wrap="square" lIns="91425" tIns="45700" rIns="91425" bIns="45700" anchor="ctr" anchorCtr="0">
             <a:normAutofit/>
           </a:bodyPr>
           <a:lstStyle/>
           <a:p>
-            <a:pPr indent="0" lvl="0" marL="0" rtl="0" algn="ctr">
+            <a:pPr marL="0" lvl="0" indent="0" algn="ctr" rtl="0">
               <a:spcBef>
                 <a:spcPts val="0"/>
               </a:spcBef>
@@ -11494,7 +11700,7 @@
               <a:buNone/>
             </a:pPr>
             <a:r>
-              <a:rPr b="1" lang="en-US" sz="3000">
+              <a:rPr lang="en-US" sz="3000" b="1">
                 <a:latin typeface="Open Sans"/>
                 <a:ea typeface="Open Sans"/>
                 <a:cs typeface="Open Sans"/>
@@ -11502,7 +11708,7 @@
               </a:rPr>
               <a:t>Statement of the problem : </a:t>
             </a:r>
-            <a:endParaRPr b="1" sz="3000">
+            <a:endParaRPr sz="3000" b="1">
               <a:latin typeface="Open Sans"/>
               <a:ea typeface="Open Sans"/>
               <a:cs typeface="Open Sans"/>
@@ -11514,9 +11720,11 @@
       <p:sp>
         <p:nvSpPr>
           <p:cNvPr id="81" name="Google Shape;81;g31dbdd1e1a3_0_0"/>
-          <p:cNvSpPr txBox="1"/>
+          <p:cNvSpPr txBox="1">
+            <a:spLocks noGrp="1"/>
+          </p:cNvSpPr>
           <p:nvPr>
-            <p:ph idx="1" type="body"/>
+            <p:ph type="body" idx="1"/>
           </p:nvPr>
         </p:nvSpPr>
         <p:spPr>
@@ -11529,12 +11737,12 @@
           </a:prstGeom>
         </p:spPr>
         <p:txBody>
-          <a:bodyPr anchorCtr="0" anchor="t" bIns="45700" lIns="91425" spcFirstLastPara="1" rIns="91425" wrap="square" tIns="45700">
+          <a:bodyPr spcFirstLastPara="1" wrap="square" lIns="91425" tIns="45700" rIns="91425" bIns="45700" anchor="t" anchorCtr="0">
             <a:normAutofit/>
           </a:bodyPr>
           <a:lstStyle/>
           <a:p>
-            <a:pPr indent="0" lvl="0" marL="457200" rtl="0" algn="l">
+            <a:pPr marL="457200" lvl="0" indent="0" algn="l" rtl="0">
               <a:spcBef>
                 <a:spcPts val="360"/>
               </a:spcBef>
@@ -11543,9 +11751,6 @@
               </a:spcAft>
               <a:buNone/>
             </a:pPr>
-            <a:r>
-              <a:t/>
-            </a:r>
             <a:endParaRPr sz="1800">
               <a:solidFill>
                 <a:srgbClr val="2D3B45"/>
@@ -11560,7 +11765,7 @@
             </a:endParaRPr>
           </a:p>
           <a:p>
-            <a:pPr indent="-361950" lvl="0" marL="457200" rtl="0" algn="l">
+            <a:pPr marL="457200" lvl="0" indent="-361950" algn="l" rtl="0">
               <a:spcBef>
                 <a:spcPts val="1200"/>
               </a:spcBef>
@@ -11595,7 +11800,7 @@
             </a:endParaRPr>
           </a:p>
           <a:p>
-            <a:pPr indent="-361950" lvl="0" marL="457200" rtl="0" algn="l">
+            <a:pPr marL="457200" lvl="0" indent="-361950" algn="l" rtl="0">
               <a:spcBef>
                 <a:spcPts val="0"/>
               </a:spcBef>
@@ -11630,7 +11835,7 @@
             </a:endParaRPr>
           </a:p>
           <a:p>
-            <a:pPr indent="-361950" lvl="0" marL="457200" rtl="0" algn="l">
+            <a:pPr marL="457200" lvl="0" indent="-361950" algn="l" rtl="0">
               <a:spcBef>
                 <a:spcPts val="0"/>
               </a:spcBef>
@@ -11665,7 +11870,7 @@
             </a:endParaRPr>
           </a:p>
           <a:p>
-            <a:pPr indent="0" lvl="0" marL="0" rtl="0" algn="l">
+            <a:pPr marL="0" lvl="0" indent="0" algn="l" rtl="0">
               <a:spcBef>
                 <a:spcPts val="1200"/>
               </a:spcBef>
@@ -11674,9 +11879,6 @@
               </a:spcAft>
               <a:buNone/>
             </a:pPr>
-            <a:r>
-              <a:t/>
-            </a:r>
             <a:endParaRPr sz="2100">
               <a:solidFill>
                 <a:srgbClr val="2D3B45"/>
@@ -11725,11 +11927,11 @@
 </file>
 
 <file path=ppt/slides/slide4.xml><?xml version="1.0" encoding="utf-8"?>
-<p:sld xmlns:a="http://schemas.openxmlformats.org/drawingml/2006/main" xmlns:r="http://schemas.openxmlformats.org/officeDocument/2006/relationships" xmlns:mc="http://schemas.openxmlformats.org/markup-compatibility/2006" xmlns:mv="urn:schemas-microsoft-com:mac:vml" xmlns:p="http://schemas.openxmlformats.org/presentationml/2006/main" xmlns:c="http://schemas.openxmlformats.org/drawingml/2006/chart" xmlns:dgm="http://schemas.openxmlformats.org/drawingml/2006/diagram" xmlns:o="urn:schemas-microsoft-com:office:office" xmlns:v="urn:schemas-microsoft-com:vml" xmlns:pvml="urn:schemas-microsoft-com:office:powerpoint" xmlns:com="http://schemas.openxmlformats.org/drawingml/2006/compatibility" xmlns:p14="http://schemas.microsoft.com/office/powerpoint/2010/main" xmlns:p15="http://schemas.microsoft.com/office/powerpoint/2012/main" xmlns:ahyp="http://schemas.microsoft.com/office/drawing/2018/hyperlinkcolor">
+<p:sld xmlns:a="http://schemas.openxmlformats.org/drawingml/2006/main" xmlns:r="http://schemas.openxmlformats.org/officeDocument/2006/relationships" xmlns:p="http://schemas.openxmlformats.org/presentationml/2006/main">
   <p:cSld>
     <p:spTree>
       <p:nvGrpSpPr>
-        <p:cNvPr id="86" name="Shape 86"/>
+        <p:cNvPr id="1" name="Shape 86"/>
         <p:cNvGrpSpPr/>
         <p:nvPr/>
       </p:nvGrpSpPr>
@@ -11744,7 +11946,9 @@
       <p:sp>
         <p:nvSpPr>
           <p:cNvPr id="87" name="Google Shape;87;g2d6bcb803ff_0_16"/>
-          <p:cNvSpPr txBox="1"/>
+          <p:cNvSpPr txBox="1">
+            <a:spLocks noGrp="1"/>
+          </p:cNvSpPr>
           <p:nvPr>
             <p:ph type="title"/>
           </p:nvPr>
@@ -11759,12 +11963,12 @@
           </a:prstGeom>
         </p:spPr>
         <p:txBody>
-          <a:bodyPr anchorCtr="0" anchor="ctr" bIns="45700" lIns="91425" spcFirstLastPara="1" rIns="91425" wrap="square" tIns="45700">
+          <a:bodyPr spcFirstLastPara="1" wrap="square" lIns="91425" tIns="45700" rIns="91425" bIns="45700" anchor="ctr" anchorCtr="0">
             <a:normAutofit/>
           </a:bodyPr>
           <a:lstStyle/>
           <a:p>
-            <a:pPr indent="0" lvl="0" marL="0" rtl="0" algn="ctr">
+            <a:pPr marL="0" lvl="0" indent="0" algn="ctr" rtl="0">
               <a:lnSpc>
                 <a:spcPct val="115000"/>
               </a:lnSpc>
@@ -11777,7 +11981,7 @@
               <a:buNone/>
             </a:pPr>
             <a:r>
-              <a:rPr b="1" lang="en-US" sz="3700">
+              <a:rPr lang="en-US" sz="3700" b="1">
                 <a:latin typeface="Open Sans"/>
                 <a:ea typeface="Open Sans"/>
                 <a:cs typeface="Open Sans"/>
@@ -11785,7 +11989,7 @@
               </a:rPr>
               <a:t>Why People Should Care</a:t>
             </a:r>
-            <a:endParaRPr b="1" sz="3700">
+            <a:endParaRPr sz="3700" b="1">
               <a:latin typeface="Open Sans"/>
               <a:ea typeface="Open Sans"/>
               <a:cs typeface="Open Sans"/>
@@ -11797,9 +12001,11 @@
       <p:sp>
         <p:nvSpPr>
           <p:cNvPr id="88" name="Google Shape;88;g2d6bcb803ff_0_16"/>
-          <p:cNvSpPr txBox="1"/>
+          <p:cNvSpPr txBox="1">
+            <a:spLocks noGrp="1"/>
+          </p:cNvSpPr>
           <p:nvPr>
-            <p:ph idx="1" type="body"/>
+            <p:ph type="body" idx="1"/>
           </p:nvPr>
         </p:nvSpPr>
         <p:spPr>
@@ -11812,12 +12018,12 @@
           </a:prstGeom>
         </p:spPr>
         <p:txBody>
-          <a:bodyPr anchorCtr="0" anchor="t" bIns="45700" lIns="91425" spcFirstLastPara="1" rIns="91425" wrap="square" tIns="45700">
+          <a:bodyPr spcFirstLastPara="1" wrap="square" lIns="91425" tIns="45700" rIns="91425" bIns="45700" anchor="t" anchorCtr="0">
             <a:normAutofit fontScale="92500" lnSpcReduction="10000"/>
           </a:bodyPr>
           <a:lstStyle/>
           <a:p>
-            <a:pPr indent="-404812" lvl="0" marL="457200" rtl="0" algn="l">
+            <a:pPr marL="457200" lvl="0" indent="-404812" algn="l" rtl="0">
               <a:spcBef>
                 <a:spcPts val="1200"/>
               </a:spcBef>
@@ -11834,7 +12040,7 @@
             <a:endParaRPr sz="3000"/>
           </a:p>
           <a:p>
-            <a:pPr indent="-404812" lvl="1" marL="914400" rtl="0" algn="l">
+            <a:pPr marL="914400" lvl="1" indent="-404812" algn="l" rtl="0">
               <a:spcBef>
                 <a:spcPts val="0"/>
               </a:spcBef>
@@ -11851,7 +12057,7 @@
             <a:endParaRPr sz="3000"/>
           </a:p>
           <a:p>
-            <a:pPr indent="-404812" lvl="1" marL="914400" rtl="0" algn="l">
+            <a:pPr marL="914400" lvl="1" indent="-404812" algn="l" rtl="0">
               <a:spcBef>
                 <a:spcPts val="0"/>
               </a:spcBef>
@@ -11868,7 +12074,7 @@
             <a:endParaRPr sz="3000"/>
           </a:p>
           <a:p>
-            <a:pPr indent="-404812" lvl="1" marL="914400" rtl="0" algn="l">
+            <a:pPr marL="914400" lvl="1" indent="-404812" algn="l" rtl="0">
               <a:spcBef>
                 <a:spcPts val="0"/>
               </a:spcBef>
@@ -11885,7 +12091,7 @@
             <a:endParaRPr sz="3000"/>
           </a:p>
           <a:p>
-            <a:pPr indent="0" lvl="0" marL="1371600" rtl="0" algn="l">
+            <a:pPr marL="1371600" lvl="0" indent="0" algn="l" rtl="0">
               <a:spcBef>
                 <a:spcPts val="1200"/>
               </a:spcBef>
@@ -11894,13 +12100,10 @@
               </a:spcAft>
               <a:buNone/>
             </a:pPr>
-            <a:r>
-              <a:t/>
-            </a:r>
             <a:endParaRPr sz="3000"/>
           </a:p>
           <a:p>
-            <a:pPr indent="-404812" lvl="0" marL="457200" rtl="0" algn="l">
+            <a:pPr marL="457200" lvl="0" indent="-404812" algn="l" rtl="0">
               <a:spcBef>
                 <a:spcPts val="1200"/>
               </a:spcBef>
@@ -11917,7 +12120,7 @@
             <a:endParaRPr sz="3000"/>
           </a:p>
           <a:p>
-            <a:pPr indent="0" lvl="0" marL="0" rtl="0" algn="l">
+            <a:pPr marL="0" lvl="0" indent="0" algn="l" rtl="0">
               <a:spcBef>
                 <a:spcPts val="1200"/>
               </a:spcBef>
@@ -11926,9 +12129,6 @@
               </a:spcAft>
               <a:buNone/>
             </a:pPr>
-            <a:r>
-              <a:t/>
-            </a:r>
             <a:endParaRPr sz="3000"/>
           </a:p>
         </p:txBody>
@@ -11942,11 +12142,11 @@
 </file>
 
 <file path=ppt/slides/slide5.xml><?xml version="1.0" encoding="utf-8"?>
-<p:sld xmlns:a="http://schemas.openxmlformats.org/drawingml/2006/main" xmlns:r="http://schemas.openxmlformats.org/officeDocument/2006/relationships" xmlns:mc="http://schemas.openxmlformats.org/markup-compatibility/2006" xmlns:mv="urn:schemas-microsoft-com:mac:vml" xmlns:p="http://schemas.openxmlformats.org/presentationml/2006/main" xmlns:c="http://schemas.openxmlformats.org/drawingml/2006/chart" xmlns:dgm="http://schemas.openxmlformats.org/drawingml/2006/diagram" xmlns:o="urn:schemas-microsoft-com:office:office" xmlns:v="urn:schemas-microsoft-com:vml" xmlns:pvml="urn:schemas-microsoft-com:office:powerpoint" xmlns:com="http://schemas.openxmlformats.org/drawingml/2006/compatibility" xmlns:p14="http://schemas.microsoft.com/office/powerpoint/2010/main" xmlns:p15="http://schemas.microsoft.com/office/powerpoint/2012/main" xmlns:ahyp="http://schemas.microsoft.com/office/drawing/2018/hyperlinkcolor">
+<p:sld xmlns:a="http://schemas.openxmlformats.org/drawingml/2006/main" xmlns:r="http://schemas.openxmlformats.org/officeDocument/2006/relationships" xmlns:p="http://schemas.openxmlformats.org/presentationml/2006/main">
   <p:cSld>
     <p:spTree>
       <p:nvGrpSpPr>
-        <p:cNvPr id="92" name="Shape 92"/>
+        <p:cNvPr id="1" name="Shape 92"/>
         <p:cNvGrpSpPr/>
         <p:nvPr/>
       </p:nvGrpSpPr>
@@ -11961,7 +12161,9 @@
       <p:sp>
         <p:nvSpPr>
           <p:cNvPr id="93" name="Google Shape;93;p3"/>
-          <p:cNvSpPr txBox="1"/>
+          <p:cNvSpPr txBox="1">
+            <a:spLocks noGrp="1"/>
+          </p:cNvSpPr>
           <p:nvPr>
             <p:ph type="title"/>
           </p:nvPr>
@@ -11980,12 +12182,12 @@
           </a:ln>
         </p:spPr>
         <p:txBody>
-          <a:bodyPr anchorCtr="0" anchor="ctr" bIns="45700" lIns="91425" spcFirstLastPara="1" rIns="91425" wrap="square" tIns="45700">
+          <a:bodyPr spcFirstLastPara="1" wrap="square" lIns="91425" tIns="45700" rIns="91425" bIns="45700" anchor="ctr" anchorCtr="0">
             <a:normAutofit/>
           </a:bodyPr>
           <a:lstStyle/>
           <a:p>
-            <a:pPr indent="0" lvl="0" marL="0" rtl="0" algn="ctr">
+            <a:pPr marL="0" lvl="0" indent="0" algn="ctr" rtl="0">
               <a:spcBef>
                 <a:spcPts val="0"/>
               </a:spcBef>
@@ -12000,7 +12202,7 @@
               <a:buNone/>
             </a:pPr>
             <a:r>
-              <a:rPr b="1" lang="en-US" sz="3000">
+              <a:rPr lang="en-US" sz="3000" b="1">
                 <a:solidFill>
                   <a:schemeClr val="dk1"/>
                 </a:solidFill>
@@ -12011,7 +12213,7 @@
               </a:rPr>
               <a:t>Dataset Overview</a:t>
             </a:r>
-            <a:endParaRPr b="1" sz="3000">
+            <a:endParaRPr sz="3000" b="1">
               <a:latin typeface="Open Sans"/>
               <a:ea typeface="Open Sans"/>
               <a:cs typeface="Open Sans"/>
@@ -12023,9 +12225,11 @@
       <p:sp>
         <p:nvSpPr>
           <p:cNvPr id="94" name="Google Shape;94;p3"/>
-          <p:cNvSpPr txBox="1"/>
+          <p:cNvSpPr txBox="1">
+            <a:spLocks noGrp="1"/>
+          </p:cNvSpPr>
           <p:nvPr>
-            <p:ph idx="1" type="body"/>
+            <p:ph type="body" idx="1"/>
           </p:nvPr>
         </p:nvSpPr>
         <p:spPr>
@@ -12042,12 +12246,12 @@
           </a:ln>
         </p:spPr>
         <p:txBody>
-          <a:bodyPr anchorCtr="0" anchor="t" bIns="45700" lIns="91425" spcFirstLastPara="1" rIns="91425" wrap="square" tIns="45700">
+          <a:bodyPr spcFirstLastPara="1" wrap="square" lIns="91425" tIns="45700" rIns="91425" bIns="45700" anchor="t" anchorCtr="0">
             <a:normAutofit fontScale="85000" lnSpcReduction="20000"/>
           </a:bodyPr>
           <a:lstStyle/>
           <a:p>
-            <a:pPr indent="-312420" lvl="0" marL="342900" rtl="0" algn="l">
+            <a:pPr marL="342900" lvl="0" indent="-312420" algn="l" rtl="0">
               <a:spcBef>
                 <a:spcPts val="0"/>
               </a:spcBef>
@@ -12061,7 +12265,7 @@
               <a:buChar char="●"/>
             </a:pPr>
             <a:r>
-              <a:rPr b="1" lang="en-US" sz="3200">
+              <a:rPr lang="en-US" sz="3200" b="1">
                 <a:solidFill>
                   <a:schemeClr val="dk1"/>
                 </a:solidFill>
@@ -12079,7 +12283,7 @@
             <a:endParaRPr/>
           </a:p>
           <a:p>
-            <a:pPr indent="-312420" lvl="0" marL="342900" rtl="0" algn="l">
+            <a:pPr marL="342900" lvl="0" indent="-312420" algn="l" rtl="0">
               <a:spcBef>
                 <a:spcPts val="640"/>
               </a:spcBef>
@@ -12093,7 +12297,7 @@
               <a:buChar char="●"/>
             </a:pPr>
             <a:r>
-              <a:rPr b="1" lang="en-US" sz="3200">
+              <a:rPr lang="en-US" sz="3200" b="1">
                 <a:solidFill>
                   <a:schemeClr val="dk1"/>
                 </a:solidFill>
@@ -12111,7 +12315,7 @@
             <a:endParaRPr/>
           </a:p>
           <a:p>
-            <a:pPr indent="-312420" lvl="0" marL="342900" rtl="0" algn="l">
+            <a:pPr marL="342900" lvl="0" indent="-312420" algn="l" rtl="0">
               <a:spcBef>
                 <a:spcPts val="640"/>
               </a:spcBef>
@@ -12125,7 +12329,7 @@
               <a:buChar char="●"/>
             </a:pPr>
             <a:r>
-              <a:rPr b="1" lang="en-US" sz="3200">
+              <a:rPr lang="en-US" sz="3200" b="1">
                 <a:solidFill>
                   <a:schemeClr val="dk1"/>
                 </a:solidFill>
@@ -12143,7 +12347,7 @@
             <a:endParaRPr/>
           </a:p>
           <a:p>
-            <a:pPr indent="-312420" lvl="0" marL="342900" rtl="0" algn="l">
+            <a:pPr marL="342900" lvl="0" indent="-312420" algn="l" rtl="0">
               <a:spcBef>
                 <a:spcPts val="640"/>
               </a:spcBef>
@@ -12157,7 +12361,7 @@
               <a:buChar char="●"/>
             </a:pPr>
             <a:r>
-              <a:rPr b="1" lang="en-US" sz="3200">
+              <a:rPr lang="en-US" sz="3200" b="1">
                 <a:solidFill>
                   <a:schemeClr val="dk1"/>
                 </a:solidFill>
@@ -12213,11 +12417,11 @@
 </file>
 
 <file path=ppt/slides/slide6.xml><?xml version="1.0" encoding="utf-8"?>
-<p:sld xmlns:a="http://schemas.openxmlformats.org/drawingml/2006/main" xmlns:r="http://schemas.openxmlformats.org/officeDocument/2006/relationships" xmlns:mc="http://schemas.openxmlformats.org/markup-compatibility/2006" xmlns:mv="urn:schemas-microsoft-com:mac:vml" xmlns:p="http://schemas.openxmlformats.org/presentationml/2006/main" xmlns:c="http://schemas.openxmlformats.org/drawingml/2006/chart" xmlns:dgm="http://schemas.openxmlformats.org/drawingml/2006/diagram" xmlns:o="urn:schemas-microsoft-com:office:office" xmlns:v="urn:schemas-microsoft-com:vml" xmlns:pvml="urn:schemas-microsoft-com:office:powerpoint" xmlns:com="http://schemas.openxmlformats.org/drawingml/2006/compatibility" xmlns:p14="http://schemas.microsoft.com/office/powerpoint/2010/main" xmlns:p15="http://schemas.microsoft.com/office/powerpoint/2012/main" xmlns:ahyp="http://schemas.microsoft.com/office/drawing/2018/hyperlinkcolor">
+<p:sld xmlns:a="http://schemas.openxmlformats.org/drawingml/2006/main" xmlns:r="http://schemas.openxmlformats.org/officeDocument/2006/relationships" xmlns:p="http://schemas.openxmlformats.org/presentationml/2006/main">
   <p:cSld>
     <p:spTree>
       <p:nvGrpSpPr>
-        <p:cNvPr id="99" name="Shape 99"/>
+        <p:cNvPr id="1" name="Shape 99"/>
         <p:cNvGrpSpPr/>
         <p:nvPr/>
       </p:nvGrpSpPr>
@@ -12232,7 +12436,9 @@
       <p:sp>
         <p:nvSpPr>
           <p:cNvPr id="100" name="Google Shape;100;g2d6bcb803ff_0_0"/>
-          <p:cNvSpPr txBox="1"/>
+          <p:cNvSpPr txBox="1">
+            <a:spLocks noGrp="1"/>
+          </p:cNvSpPr>
           <p:nvPr>
             <p:ph type="title"/>
           </p:nvPr>
@@ -12247,12 +12453,12 @@
           </a:prstGeom>
         </p:spPr>
         <p:txBody>
-          <a:bodyPr anchorCtr="0" anchor="ctr" bIns="45700" lIns="91425" spcFirstLastPara="1" rIns="91425" wrap="square" tIns="45700">
+          <a:bodyPr spcFirstLastPara="1" wrap="square" lIns="91425" tIns="45700" rIns="91425" bIns="45700" anchor="ctr" anchorCtr="0">
             <a:normAutofit/>
           </a:bodyPr>
           <a:lstStyle/>
           <a:p>
-            <a:pPr indent="0" lvl="0" marL="0" rtl="0" algn="ctr">
+            <a:pPr marL="0" lvl="0" indent="0" algn="ctr" rtl="0">
               <a:spcBef>
                 <a:spcPts val="0"/>
               </a:spcBef>
@@ -12262,7 +12468,7 @@
               <a:buNone/>
             </a:pPr>
             <a:r>
-              <a:rPr b="1" lang="en-US" sz="3000">
+              <a:rPr lang="en-US" sz="3000" b="1">
                 <a:latin typeface="Open Sans"/>
                 <a:ea typeface="Open Sans"/>
                 <a:cs typeface="Open Sans"/>
@@ -12270,7 +12476,7 @@
               </a:rPr>
               <a:t>data file </a:t>
             </a:r>
-            <a:endParaRPr b="1" sz="3000">
+            <a:endParaRPr sz="3000" b="1">
               <a:latin typeface="Open Sans"/>
               <a:ea typeface="Open Sans"/>
               <a:cs typeface="Open Sans"/>
@@ -12282,9 +12488,11 @@
       <p:sp>
         <p:nvSpPr>
           <p:cNvPr id="101" name="Google Shape;101;g2d6bcb803ff_0_0"/>
-          <p:cNvSpPr txBox="1"/>
+          <p:cNvSpPr txBox="1">
+            <a:spLocks noGrp="1"/>
+          </p:cNvSpPr>
           <p:nvPr>
-            <p:ph idx="1" type="body"/>
+            <p:ph type="body" idx="1"/>
           </p:nvPr>
         </p:nvSpPr>
         <p:spPr>
@@ -12297,12 +12505,12 @@
           </a:prstGeom>
         </p:spPr>
         <p:txBody>
-          <a:bodyPr anchorCtr="0" anchor="t" bIns="45700" lIns="91425" spcFirstLastPara="1" rIns="91425" wrap="square" tIns="45700">
+          <a:bodyPr spcFirstLastPara="1" wrap="square" lIns="91425" tIns="45700" rIns="91425" bIns="45700" anchor="t" anchorCtr="0">
             <a:normAutofit/>
           </a:bodyPr>
           <a:lstStyle/>
           <a:p>
-            <a:pPr indent="0" lvl="0" marL="0" rtl="0" algn="l">
+            <a:pPr marL="0" lvl="0" indent="0" algn="l" rtl="0">
               <a:spcBef>
                 <a:spcPts val="360"/>
               </a:spcBef>
@@ -12311,9 +12519,6 @@
               </a:spcAft>
               <a:buNone/>
             </a:pPr>
-            <a:r>
-              <a:t/>
-            </a:r>
             <a:endParaRPr/>
           </a:p>
         </p:txBody>
@@ -12366,12 +12571,12 @@
           </a:ln>
         </p:spPr>
         <p:txBody>
-          <a:bodyPr anchorCtr="0" anchor="t" bIns="91425" lIns="91425" spcFirstLastPara="1" rIns="91425" wrap="square" tIns="91425">
+          <a:bodyPr spcFirstLastPara="1" wrap="square" lIns="91425" tIns="91425" rIns="91425" bIns="91425" anchor="t" anchorCtr="0">
             <a:noAutofit/>
           </a:bodyPr>
           <a:lstStyle/>
           <a:p>
-            <a:pPr indent="-374650" lvl="0" marL="457200" rtl="0" algn="l">
+            <a:pPr marL="457200" lvl="0" indent="-374650" algn="l" rtl="0">
               <a:spcBef>
                 <a:spcPts val="0"/>
               </a:spcBef>
@@ -12395,31 +12600,7 @@
                 <a:cs typeface="Open Sans"/>
                 <a:sym typeface="Open Sans"/>
               </a:rPr>
-              <a:t>Contains </a:t>
-            </a:r>
-            <a:r>
-              <a:rPr lang="en-US" sz="2300">
-                <a:solidFill>
-                  <a:schemeClr val="dk1"/>
-                </a:solidFill>
-                <a:latin typeface="Open Sans"/>
-                <a:ea typeface="Open Sans"/>
-                <a:cs typeface="Open Sans"/>
-                <a:sym typeface="Open Sans"/>
-              </a:rPr>
-              <a:t>different</a:t>
-            </a:r>
-            <a:r>
-              <a:rPr lang="en-US" sz="2300">
-                <a:solidFill>
-                  <a:schemeClr val="dk1"/>
-                </a:solidFill>
-                <a:latin typeface="Open Sans"/>
-                <a:ea typeface="Open Sans"/>
-                <a:cs typeface="Open Sans"/>
-                <a:sym typeface="Open Sans"/>
-              </a:rPr>
-              <a:t> data from datafile.</a:t>
+              <a:t>Contains different data from datafile.</a:t>
             </a:r>
             <a:endParaRPr sz="2300">
               <a:solidFill>
@@ -12432,7 +12613,7 @@
             </a:endParaRPr>
           </a:p>
           <a:p>
-            <a:pPr indent="-374650" lvl="0" marL="457200" rtl="0" algn="l">
+            <a:pPr marL="457200" lvl="0" indent="-374650" algn="l" rtl="0">
               <a:spcBef>
                 <a:spcPts val="0"/>
               </a:spcBef>
@@ -12456,31 +12637,7 @@
                 <a:cs typeface="Open Sans"/>
                 <a:sym typeface="Open Sans"/>
               </a:rPr>
-              <a:t>Import </a:t>
-            </a:r>
-            <a:r>
-              <a:rPr lang="en-US" sz="2300">
-                <a:solidFill>
-                  <a:schemeClr val="dk1"/>
-                </a:solidFill>
-                <a:latin typeface="Open Sans"/>
-                <a:ea typeface="Open Sans"/>
-                <a:cs typeface="Open Sans"/>
-                <a:sym typeface="Open Sans"/>
-              </a:rPr>
-              <a:t>columns</a:t>
-            </a:r>
-            <a:r>
-              <a:rPr lang="en-US" sz="2300">
-                <a:solidFill>
-                  <a:schemeClr val="dk1"/>
-                </a:solidFill>
-                <a:latin typeface="Open Sans"/>
-                <a:ea typeface="Open Sans"/>
-                <a:cs typeface="Open Sans"/>
-                <a:sym typeface="Open Sans"/>
-              </a:rPr>
-              <a:t> are </a:t>
+              <a:t>Import columns are </a:t>
             </a:r>
             <a:endParaRPr sz="2300">
               <a:solidFill>
@@ -12493,7 +12650,7 @@
             </a:endParaRPr>
           </a:p>
           <a:p>
-            <a:pPr indent="0" lvl="0" marL="457200" rtl="0" algn="l">
+            <a:pPr marL="457200" lvl="0" indent="0" algn="l" rtl="0">
               <a:spcBef>
                 <a:spcPts val="0"/>
               </a:spcBef>
@@ -12525,7 +12682,7 @@
             </a:endParaRPr>
           </a:p>
           <a:p>
-            <a:pPr indent="0" lvl="0" marL="457200" rtl="0" algn="l">
+            <a:pPr marL="457200" lvl="0" indent="0" algn="l" rtl="0">
               <a:spcBef>
                 <a:spcPts val="0"/>
               </a:spcBef>
@@ -12567,11 +12724,11 @@
 </file>
 
 <file path=ppt/slides/slide7.xml><?xml version="1.0" encoding="utf-8"?>
-<p:sld xmlns:a="http://schemas.openxmlformats.org/drawingml/2006/main" xmlns:r="http://schemas.openxmlformats.org/officeDocument/2006/relationships" xmlns:mc="http://schemas.openxmlformats.org/markup-compatibility/2006" xmlns:mv="urn:schemas-microsoft-com:mac:vml" xmlns:p="http://schemas.openxmlformats.org/presentationml/2006/main" xmlns:c="http://schemas.openxmlformats.org/drawingml/2006/chart" xmlns:dgm="http://schemas.openxmlformats.org/drawingml/2006/diagram" xmlns:o="urn:schemas-microsoft-com:office:office" xmlns:v="urn:schemas-microsoft-com:vml" xmlns:pvml="urn:schemas-microsoft-com:office:powerpoint" xmlns:com="http://schemas.openxmlformats.org/drawingml/2006/compatibility" xmlns:p14="http://schemas.microsoft.com/office/powerpoint/2010/main" xmlns:p15="http://schemas.microsoft.com/office/powerpoint/2012/main" xmlns:ahyp="http://schemas.microsoft.com/office/drawing/2018/hyperlinkcolor">
+<p:sld xmlns:a="http://schemas.openxmlformats.org/drawingml/2006/main" xmlns:r="http://schemas.openxmlformats.org/officeDocument/2006/relationships" xmlns:p="http://schemas.openxmlformats.org/presentationml/2006/main">
   <p:cSld>
     <p:spTree>
       <p:nvGrpSpPr>
-        <p:cNvPr id="107" name="Shape 107"/>
+        <p:cNvPr id="1" name="Shape 107"/>
         <p:cNvGrpSpPr/>
         <p:nvPr/>
       </p:nvGrpSpPr>
@@ -12586,7 +12743,9 @@
       <p:sp>
         <p:nvSpPr>
           <p:cNvPr id="108" name="Google Shape;108;p4"/>
-          <p:cNvSpPr txBox="1"/>
+          <p:cNvSpPr txBox="1">
+            <a:spLocks noGrp="1"/>
+          </p:cNvSpPr>
           <p:nvPr>
             <p:ph type="title"/>
           </p:nvPr>
@@ -12605,12 +12764,12 @@
           </a:ln>
         </p:spPr>
         <p:txBody>
-          <a:bodyPr anchorCtr="0" anchor="ctr" bIns="45700" lIns="91425" spcFirstLastPara="1" rIns="91425" wrap="square" tIns="45700">
+          <a:bodyPr spcFirstLastPara="1" wrap="square" lIns="91425" tIns="45700" rIns="91425" bIns="45700" anchor="ctr" anchorCtr="0">
             <a:normAutofit/>
           </a:bodyPr>
           <a:lstStyle/>
           <a:p>
-            <a:pPr indent="0" lvl="0" marL="0" rtl="0" algn="ctr">
+            <a:pPr marL="0" lvl="0" indent="0" algn="ctr" rtl="0">
               <a:spcBef>
                 <a:spcPts val="0"/>
               </a:spcBef>
@@ -12625,7 +12784,7 @@
               <a:buNone/>
             </a:pPr>
             <a:r>
-              <a:rPr b="1" lang="en-US" sz="3000">
+              <a:rPr lang="en-US" sz="3000" b="1">
                 <a:solidFill>
                   <a:schemeClr val="dk1"/>
                 </a:solidFill>
@@ -12636,7 +12795,7 @@
               </a:rPr>
               <a:t>Data Preprocessing</a:t>
             </a:r>
-            <a:endParaRPr b="1" sz="3000">
+            <a:endParaRPr sz="3000" b="1">
               <a:latin typeface="Open Sans"/>
               <a:ea typeface="Open Sans"/>
               <a:cs typeface="Open Sans"/>
@@ -12648,9 +12807,11 @@
       <p:sp>
         <p:nvSpPr>
           <p:cNvPr id="109" name="Google Shape;109;p4"/>
-          <p:cNvSpPr txBox="1"/>
+          <p:cNvSpPr txBox="1">
+            <a:spLocks noGrp="1"/>
+          </p:cNvSpPr>
           <p:nvPr>
-            <p:ph idx="1" type="body"/>
+            <p:ph type="body" idx="1"/>
           </p:nvPr>
         </p:nvSpPr>
         <p:spPr>
@@ -12667,12 +12828,12 @@
           </a:ln>
         </p:spPr>
         <p:txBody>
-          <a:bodyPr anchorCtr="0" anchor="t" bIns="45700" lIns="91425" spcFirstLastPara="1" rIns="91425" wrap="square" tIns="45700">
+          <a:bodyPr spcFirstLastPara="1" wrap="square" lIns="91425" tIns="45700" rIns="91425" bIns="45700" anchor="t" anchorCtr="0">
             <a:normAutofit/>
           </a:bodyPr>
           <a:lstStyle/>
           <a:p>
-            <a:pPr indent="-292100" lvl="0" marL="342900" rtl="0" algn="l">
+            <a:pPr marL="342900" lvl="0" indent="-292100" algn="l" rtl="0">
               <a:spcBef>
                 <a:spcPts val="0"/>
               </a:spcBef>
@@ -12700,7 +12861,7 @@
             <a:endParaRPr sz="2400"/>
           </a:p>
           <a:p>
-            <a:pPr indent="-292100" lvl="0" marL="342900" rtl="0" algn="l">
+            <a:pPr marL="342900" lvl="0" indent="-292100" algn="l" rtl="0">
               <a:spcBef>
                 <a:spcPts val="640"/>
               </a:spcBef>
@@ -12728,7 +12889,7 @@
             <a:endParaRPr sz="2400"/>
           </a:p>
           <a:p>
-            <a:pPr indent="-292100" lvl="0" marL="342900" rtl="0" algn="l">
+            <a:pPr marL="342900" lvl="0" indent="-292100" algn="l" rtl="0">
               <a:spcBef>
                 <a:spcPts val="640"/>
               </a:spcBef>
@@ -12756,7 +12917,7 @@
             <a:endParaRPr sz="2400"/>
           </a:p>
           <a:p>
-            <a:pPr indent="-292100" lvl="0" marL="342900" rtl="0" algn="l">
+            <a:pPr marL="342900" lvl="0" indent="-292100" algn="l" rtl="0">
               <a:spcBef>
                 <a:spcPts val="640"/>
               </a:spcBef>
@@ -12822,11 +12983,11 @@
 </file>
 
 <file path=ppt/slides/slide8.xml><?xml version="1.0" encoding="utf-8"?>
-<p:sld xmlns:a="http://schemas.openxmlformats.org/drawingml/2006/main" xmlns:r="http://schemas.openxmlformats.org/officeDocument/2006/relationships" xmlns:mc="http://schemas.openxmlformats.org/markup-compatibility/2006" xmlns:mv="urn:schemas-microsoft-com:mac:vml" xmlns:p="http://schemas.openxmlformats.org/presentationml/2006/main" xmlns:c="http://schemas.openxmlformats.org/drawingml/2006/chart" xmlns:dgm="http://schemas.openxmlformats.org/drawingml/2006/diagram" xmlns:o="urn:schemas-microsoft-com:office:office" xmlns:v="urn:schemas-microsoft-com:vml" xmlns:pvml="urn:schemas-microsoft-com:office:powerpoint" xmlns:com="http://schemas.openxmlformats.org/drawingml/2006/compatibility" xmlns:p14="http://schemas.microsoft.com/office/powerpoint/2010/main" xmlns:p15="http://schemas.microsoft.com/office/powerpoint/2012/main" xmlns:ahyp="http://schemas.microsoft.com/office/drawing/2018/hyperlinkcolor">
+<p:sld xmlns:a="http://schemas.openxmlformats.org/drawingml/2006/main" xmlns:r="http://schemas.openxmlformats.org/officeDocument/2006/relationships" xmlns:p="http://schemas.openxmlformats.org/presentationml/2006/main">
   <p:cSld>
     <p:spTree>
       <p:nvGrpSpPr>
-        <p:cNvPr id="114" name="Shape 114"/>
+        <p:cNvPr id="1" name="Shape 114"/>
         <p:cNvGrpSpPr/>
         <p:nvPr/>
       </p:nvGrpSpPr>
@@ -12841,7 +13002,9 @@
       <p:sp>
         <p:nvSpPr>
           <p:cNvPr id="115" name="Google Shape;115;p5"/>
-          <p:cNvSpPr txBox="1"/>
+          <p:cNvSpPr txBox="1">
+            <a:spLocks noGrp="1"/>
+          </p:cNvSpPr>
           <p:nvPr>
             <p:ph type="title"/>
           </p:nvPr>
@@ -12860,12 +13023,12 @@
           </a:ln>
         </p:spPr>
         <p:txBody>
-          <a:bodyPr anchorCtr="0" anchor="ctr" bIns="45700" lIns="91425" spcFirstLastPara="1" rIns="91425" wrap="square" tIns="45700">
+          <a:bodyPr spcFirstLastPara="1" wrap="square" lIns="91425" tIns="45700" rIns="91425" bIns="45700" anchor="ctr" anchorCtr="0">
             <a:normAutofit/>
           </a:bodyPr>
           <a:lstStyle/>
           <a:p>
-            <a:pPr indent="0" lvl="0" marL="0" rtl="0" algn="ctr">
+            <a:pPr marL="0" lvl="0" indent="0" algn="ctr" rtl="0">
               <a:spcBef>
                 <a:spcPts val="0"/>
               </a:spcBef>
@@ -12880,7 +13043,7 @@
               <a:buNone/>
             </a:pPr>
             <a:r>
-              <a:rPr b="1" lang="en-US" sz="3000">
+              <a:rPr lang="en-US" sz="3000" b="1">
                 <a:solidFill>
                   <a:schemeClr val="dk1"/>
                 </a:solidFill>
@@ -12891,16 +13054,18 @@
               </a:rPr>
               <a:t>Sentiment Analysis</a:t>
             </a:r>
-            <a:endParaRPr b="1" sz="3000"/>
+            <a:endParaRPr sz="3000" b="1"/>
           </a:p>
         </p:txBody>
       </p:sp>
       <p:sp>
         <p:nvSpPr>
           <p:cNvPr id="116" name="Google Shape;116;p5"/>
-          <p:cNvSpPr txBox="1"/>
+          <p:cNvSpPr txBox="1">
+            <a:spLocks noGrp="1"/>
+          </p:cNvSpPr>
           <p:nvPr>
-            <p:ph idx="1" type="body"/>
+            <p:ph type="body" idx="1"/>
           </p:nvPr>
         </p:nvSpPr>
         <p:spPr>
@@ -12917,12 +13082,12 @@
           </a:ln>
         </p:spPr>
         <p:txBody>
-          <a:bodyPr anchorCtr="0" anchor="t" bIns="45700" lIns="91425" spcFirstLastPara="1" rIns="91425" wrap="square" tIns="45700">
+          <a:bodyPr spcFirstLastPara="1" wrap="square" lIns="91425" tIns="45700" rIns="91425" bIns="45700" anchor="t" anchorCtr="0">
             <a:normAutofit/>
           </a:bodyPr>
           <a:lstStyle/>
           <a:p>
-            <a:pPr indent="-342900" lvl="0" marL="342900" rtl="0" algn="l">
+            <a:pPr marL="342900" lvl="0" indent="-342900" algn="l" rtl="0">
               <a:spcBef>
                 <a:spcPts val="0"/>
               </a:spcBef>
@@ -12950,7 +13115,7 @@
             <a:endParaRPr/>
           </a:p>
           <a:p>
-            <a:pPr indent="114300" lvl="0" marL="1257300" rtl="0" algn="l">
+            <a:pPr marL="1257300" lvl="0" indent="114300" algn="l" rtl="0">
               <a:spcBef>
                 <a:spcPts val="640"/>
               </a:spcBef>
@@ -12974,7 +13139,7 @@
             <a:endParaRPr/>
           </a:p>
           <a:p>
-            <a:pPr indent="114300" lvl="0" marL="1257300" rtl="0" algn="l">
+            <a:pPr marL="1257300" lvl="0" indent="114300" algn="l" rtl="0">
               <a:spcBef>
                 <a:spcPts val="640"/>
               </a:spcBef>
@@ -12998,7 +13163,7 @@
             <a:endParaRPr/>
           </a:p>
           <a:p>
-            <a:pPr indent="114300" lvl="0" marL="1257300" rtl="0" algn="l">
+            <a:pPr marL="1257300" lvl="0" indent="114300" algn="l" rtl="0">
               <a:spcBef>
                 <a:spcPts val="640"/>
               </a:spcBef>
@@ -13022,7 +13187,7 @@
             <a:endParaRPr/>
           </a:p>
           <a:p>
-            <a:pPr indent="-342900" lvl="0" marL="342900" rtl="0" algn="l">
+            <a:pPr marL="342900" lvl="0" indent="-342900" algn="l" rtl="0">
               <a:spcBef>
                 <a:spcPts val="640"/>
               </a:spcBef>
@@ -13050,7 +13215,7 @@
             <a:endParaRPr/>
           </a:p>
           <a:p>
-            <a:pPr indent="-342900" lvl="0" marL="342900" rtl="0" algn="l">
+            <a:pPr marL="342900" lvl="0" indent="-342900" algn="l" rtl="0">
               <a:spcBef>
                 <a:spcPts val="640"/>
               </a:spcBef>
@@ -13088,11 +13253,11 @@
 </file>
 
 <file path=ppt/slides/slide9.xml><?xml version="1.0" encoding="utf-8"?>
-<p:sld xmlns:a="http://schemas.openxmlformats.org/drawingml/2006/main" xmlns:r="http://schemas.openxmlformats.org/officeDocument/2006/relationships" xmlns:mc="http://schemas.openxmlformats.org/markup-compatibility/2006" xmlns:mv="urn:schemas-microsoft-com:mac:vml" xmlns:p="http://schemas.openxmlformats.org/presentationml/2006/main" xmlns:c="http://schemas.openxmlformats.org/drawingml/2006/chart" xmlns:dgm="http://schemas.openxmlformats.org/drawingml/2006/diagram" xmlns:o="urn:schemas-microsoft-com:office:office" xmlns:v="urn:schemas-microsoft-com:vml" xmlns:pvml="urn:schemas-microsoft-com:office:powerpoint" xmlns:com="http://schemas.openxmlformats.org/drawingml/2006/compatibility" xmlns:p14="http://schemas.microsoft.com/office/powerpoint/2010/main" xmlns:p15="http://schemas.microsoft.com/office/powerpoint/2012/main" xmlns:ahyp="http://schemas.microsoft.com/office/drawing/2018/hyperlinkcolor">
+<p:sld xmlns:a="http://schemas.openxmlformats.org/drawingml/2006/main" xmlns:r="http://schemas.openxmlformats.org/officeDocument/2006/relationships" xmlns:p="http://schemas.openxmlformats.org/presentationml/2006/main">
   <p:cSld>
     <p:spTree>
       <p:nvGrpSpPr>
-        <p:cNvPr id="120" name="Shape 120"/>
+        <p:cNvPr id="1" name="Shape 120"/>
         <p:cNvGrpSpPr/>
         <p:nvPr/>
       </p:nvGrpSpPr>
@@ -13107,7 +13272,9 @@
       <p:sp>
         <p:nvSpPr>
           <p:cNvPr id="121" name="Google Shape;121;g2d6bcb803ff_0_28"/>
-          <p:cNvSpPr txBox="1"/>
+          <p:cNvSpPr txBox="1">
+            <a:spLocks noGrp="1"/>
+          </p:cNvSpPr>
           <p:nvPr>
             <p:ph type="title"/>
           </p:nvPr>
@@ -13122,12 +13289,12 @@
           </a:prstGeom>
         </p:spPr>
         <p:txBody>
-          <a:bodyPr anchorCtr="0" anchor="ctr" bIns="45700" lIns="91425" spcFirstLastPara="1" rIns="91425" wrap="square" tIns="45700">
+          <a:bodyPr spcFirstLastPara="1" wrap="square" lIns="91425" tIns="45700" rIns="91425" bIns="45700" anchor="ctr" anchorCtr="0">
             <a:normAutofit/>
           </a:bodyPr>
           <a:lstStyle/>
           <a:p>
-            <a:pPr indent="0" lvl="0" marL="0" rtl="0" algn="ctr">
+            <a:pPr marL="0" lvl="0" indent="0" algn="ctr" rtl="0">
               <a:spcBef>
                 <a:spcPts val="0"/>
               </a:spcBef>
@@ -13157,9 +13324,11 @@
       <p:sp>
         <p:nvSpPr>
           <p:cNvPr id="122" name="Google Shape;122;g2d6bcb803ff_0_28"/>
-          <p:cNvSpPr txBox="1"/>
+          <p:cNvSpPr txBox="1">
+            <a:spLocks noGrp="1"/>
+          </p:cNvSpPr>
           <p:nvPr>
-            <p:ph idx="1" type="body"/>
+            <p:ph type="body" idx="1"/>
           </p:nvPr>
         </p:nvSpPr>
         <p:spPr>
@@ -13172,12 +13341,12 @@
           </a:prstGeom>
         </p:spPr>
         <p:txBody>
-          <a:bodyPr anchorCtr="0" anchor="t" bIns="45700" lIns="91425" spcFirstLastPara="1" rIns="91425" wrap="square" tIns="45700">
+          <a:bodyPr spcFirstLastPara="1" wrap="square" lIns="91425" tIns="45700" rIns="91425" bIns="45700" anchor="t" anchorCtr="0">
             <a:normAutofit/>
           </a:bodyPr>
           <a:lstStyle/>
           <a:p>
-            <a:pPr indent="0" lvl="0" marL="0" rtl="0" algn="l">
+            <a:pPr marL="0" lvl="0" indent="0" algn="l" rtl="0">
               <a:spcBef>
                 <a:spcPts val="360"/>
               </a:spcBef>
@@ -13186,9 +13355,6 @@
               </a:spcAft>
               <a:buNone/>
             </a:pPr>
-            <a:r>
-              <a:t/>
-            </a:r>
             <a:endParaRPr/>
           </a:p>
         </p:txBody>
@@ -13230,7 +13396,7 @@
 </file>
 
 <file path=ppt/theme/theme1.xml><?xml version="1.0" encoding="utf-8"?>
-<a:theme xmlns:a="http://schemas.openxmlformats.org/drawingml/2006/main" xmlns:r="http://schemas.openxmlformats.org/officeDocument/2006/relationships" name="Luxe">
+<a:theme xmlns:a="http://schemas.openxmlformats.org/drawingml/2006/main" name="Luxe">
   <a:themeElements>
     <a:clrScheme name="Luxe">
       <a:dk1>
@@ -13505,11 +13671,13 @@
       </a:bgFillStyleLst>
     </a:fmtScheme>
   </a:themeElements>
+  <a:objectDefaults/>
+  <a:extraClrSchemeLst/>
 </a:theme>
 </file>
 
 <file path=ppt/theme/theme2.xml><?xml version="1.0" encoding="utf-8"?>
-<a:theme xmlns:a="http://schemas.openxmlformats.org/drawingml/2006/main" xmlns:r="http://schemas.openxmlformats.org/officeDocument/2006/relationships">
+<a:theme xmlns:a="http://schemas.openxmlformats.org/drawingml/2006/main">
   <a:themeElements>
     <a:clrScheme name="Default">
       <a:dk1>
@@ -13784,5 +13952,7 @@
       </a:bgFillStyleLst>
     </a:fmtScheme>
   </a:themeElements>
+  <a:objectDefaults/>
+  <a:extraClrSchemeLst/>
 </a:theme>
 </file>